--- a/项目书/results/完成情况汇报.pptx
+++ b/项目书/results/完成情况汇报.pptx
@@ -1,30 +1,31 @@
 
 <file path=ppt/presentation.xml><?xml version="1.0" encoding="utf-8"?>
-<p:presentation xmlns:a="http://schemas.openxmlformats.org/drawingml/2006/main" xmlns:r="http://schemas.openxmlformats.org/officeDocument/2006/relationships" xmlns:p="http://schemas.openxmlformats.org/presentationml/2006/main" saveSubsetFonts="1" autoCompressPictures="0">
+<p:presentation xmlns:a="http://schemas.openxmlformats.org/drawingml/2006/main" xmlns:r="http://schemas.openxmlformats.org/officeDocument/2006/relationships" xmlns:p="http://schemas.openxmlformats.org/presentationml/2006/main" autoCompressPictures="0">
   <p:sldMasterIdLst>
     <p:sldMasterId id="2147483648" r:id="rId1"/>
   </p:sldMasterIdLst>
   <p:sldIdLst>
-    <p:sldId id="256" r:id="rId7"/>
-    <p:sldId id="257" r:id="rId8"/>
-    <p:sldId id="258" r:id="rId9"/>
-    <p:sldId id="259" r:id="rId10"/>
-    <p:sldId id="260" r:id="rId11"/>
-    <p:sldId id="261" r:id="rId12"/>
-    <p:sldId id="262" r:id="rId13"/>
-    <p:sldId id="263" r:id="rId14"/>
-    <p:sldId id="264" r:id="rId15"/>
-    <p:sldId id="265" r:id="rId16"/>
-    <p:sldId id="266" r:id="rId17"/>
-    <p:sldId id="267" r:id="rId18"/>
-    <p:sldId id="268" r:id="rId19"/>
-    <p:sldId id="269" r:id="rId20"/>
-    <p:sldId id="270" r:id="rId21"/>
-    <p:sldId id="271" r:id="rId22"/>
-    <p:sldId id="272" r:id="rId23"/>
-    <p:sldId id="273" r:id="rId24"/>
+    <p:sldId id="256" r:id="rId3"/>
+    <p:sldId id="274" r:id="rId4"/>
+    <p:sldId id="257" r:id="rId5"/>
+    <p:sldId id="258" r:id="rId6"/>
+    <p:sldId id="259" r:id="rId7"/>
+    <p:sldId id="260" r:id="rId8"/>
+    <p:sldId id="261" r:id="rId9"/>
+    <p:sldId id="262" r:id="rId10"/>
+    <p:sldId id="263" r:id="rId11"/>
+    <p:sldId id="264" r:id="rId12"/>
+    <p:sldId id="265" r:id="rId13"/>
+    <p:sldId id="266" r:id="rId14"/>
+    <p:sldId id="267" r:id="rId15"/>
+    <p:sldId id="268" r:id="rId16"/>
+    <p:sldId id="269" r:id="rId17"/>
+    <p:sldId id="270" r:id="rId18"/>
+    <p:sldId id="271" r:id="rId19"/>
+    <p:sldId id="272" r:id="rId20"/>
+    <p:sldId id="273" r:id="rId21"/>
   </p:sldIdLst>
-  <p:sldSz cx="12191695" cy="6858000" type="screen4x3"/>
+  <p:sldSz cx="12191365" cy="6858000" type="screen4x3"/>
   <p:notesSz cx="6858000" cy="9144000"/>
   <p:defaultTextStyle>
     <a:defPPr>
@@ -121,6 +122,22 @@
       </a:defRPr>
     </a:lvl9pPr>
   </p:defaultTextStyle>
+  <p:extLst>
+    <p:ext uri="{EFAFB233-063F-42B5-8137-9DF3F51BA10A}">
+      <p15:sldGuideLst xmlns:p15="http://schemas.microsoft.com/office/powerpoint/2012/main">
+        <p15:guide id="1" orient="horz" pos="2131" userDrawn="1">
+          <p15:clr>
+            <a:srgbClr val="A4A3A4"/>
+          </p15:clr>
+        </p15:guide>
+        <p15:guide id="2" pos="2880" userDrawn="1">
+          <p15:clr>
+            <a:srgbClr val="A4A3A4"/>
+          </p15:clr>
+        </p15:guide>
+      </p15:sldGuideLst>
+    </p:ext>
+  </p:extLst>
 </p:presentation>
 </file>
 
@@ -305,7 +322,6 @@
           <a:p>
             <a:fld id="{5BCAD085-E8A6-8845-BD4E-CB4CCA059FC4}" type="datetimeFigureOut">
               <a:rPr lang="en-US" smtClean="0"/>
-              <a:t>1/27/13</a:t>
             </a:fld>
             <a:endParaRPr lang="en-US"/>
           </a:p>
@@ -347,18 +363,12 @@
           <a:p>
             <a:fld id="{C1FF6DA9-008F-8B48-92A6-B652298478BF}" type="slidenum">
               <a:rPr lang="en-US" smtClean="0"/>
-              <a:t>‹#›</a:t>
             </a:fld>
             <a:endParaRPr lang="en-US"/>
           </a:p>
         </p:txBody>
       </p:sp>
     </p:spTree>
-    <p:extLst>
-      <p:ext uri="{BB962C8B-B14F-4D97-AF65-F5344CB8AC3E}">
-        <p14:creationId xmlns:p14="http://schemas.microsoft.com/office/powerpoint/2010/main" val="3168075583"/>
-      </p:ext>
-    </p:extLst>
   </p:cSld>
   <p:clrMapOvr>
     <a:masterClrMapping/>
@@ -426,6 +436,7 @@
               <a:rPr lang="en-US" smtClean="0"/>
               <a:t>Click to edit Master text styles</a:t>
             </a:r>
+            <a:endParaRPr lang="en-US" smtClean="0"/>
           </a:p>
           <a:p>
             <a:pPr lvl="1"/>
@@ -433,6 +444,7 @@
               <a:rPr lang="en-US" smtClean="0"/>
               <a:t>Second level</a:t>
             </a:r>
+            <a:endParaRPr lang="en-US" smtClean="0"/>
           </a:p>
           <a:p>
             <a:pPr lvl="2"/>
@@ -440,6 +452,7 @@
               <a:rPr lang="en-US" smtClean="0"/>
               <a:t>Third level</a:t>
             </a:r>
+            <a:endParaRPr lang="en-US" smtClean="0"/>
           </a:p>
           <a:p>
             <a:pPr lvl="3"/>
@@ -447,6 +460,7 @@
               <a:rPr lang="en-US" smtClean="0"/>
               <a:t>Fourth level</a:t>
             </a:r>
+            <a:endParaRPr lang="en-US" smtClean="0"/>
           </a:p>
           <a:p>
             <a:pPr lvl="4"/>
@@ -475,7 +489,6 @@
           <a:p>
             <a:fld id="{5BCAD085-E8A6-8845-BD4E-CB4CCA059FC4}" type="datetimeFigureOut">
               <a:rPr lang="en-US" smtClean="0"/>
-              <a:t>1/27/13</a:t>
             </a:fld>
             <a:endParaRPr lang="en-US"/>
           </a:p>
@@ -517,18 +530,12 @@
           <a:p>
             <a:fld id="{C1FF6DA9-008F-8B48-92A6-B652298478BF}" type="slidenum">
               <a:rPr lang="en-US" smtClean="0"/>
-              <a:t>‹#›</a:t>
             </a:fld>
             <a:endParaRPr lang="en-US"/>
           </a:p>
         </p:txBody>
       </p:sp>
     </p:spTree>
-    <p:extLst>
-      <p:ext uri="{BB962C8B-B14F-4D97-AF65-F5344CB8AC3E}">
-        <p14:creationId xmlns:p14="http://schemas.microsoft.com/office/powerpoint/2010/main" val="2910927964"/>
-      </p:ext>
-    </p:extLst>
   </p:cSld>
   <p:clrMapOvr>
     <a:masterClrMapping/>
@@ -606,6 +613,7 @@
               <a:rPr lang="en-US" smtClean="0"/>
               <a:t>Click to edit Master text styles</a:t>
             </a:r>
+            <a:endParaRPr lang="en-US" smtClean="0"/>
           </a:p>
           <a:p>
             <a:pPr lvl="1"/>
@@ -613,6 +621,7 @@
               <a:rPr lang="en-US" smtClean="0"/>
               <a:t>Second level</a:t>
             </a:r>
+            <a:endParaRPr lang="en-US" smtClean="0"/>
           </a:p>
           <a:p>
             <a:pPr lvl="2"/>
@@ -620,6 +629,7 @@
               <a:rPr lang="en-US" smtClean="0"/>
               <a:t>Third level</a:t>
             </a:r>
+            <a:endParaRPr lang="en-US" smtClean="0"/>
           </a:p>
           <a:p>
             <a:pPr lvl="3"/>
@@ -627,6 +637,7 @@
               <a:rPr lang="en-US" smtClean="0"/>
               <a:t>Fourth level</a:t>
             </a:r>
+            <a:endParaRPr lang="en-US" smtClean="0"/>
           </a:p>
           <a:p>
             <a:pPr lvl="4"/>
@@ -655,7 +666,6 @@
           <a:p>
             <a:fld id="{5BCAD085-E8A6-8845-BD4E-CB4CCA059FC4}" type="datetimeFigureOut">
               <a:rPr lang="en-US" smtClean="0"/>
-              <a:t>1/27/13</a:t>
             </a:fld>
             <a:endParaRPr lang="en-US"/>
           </a:p>
@@ -697,18 +707,12 @@
           <a:p>
             <a:fld id="{C1FF6DA9-008F-8B48-92A6-B652298478BF}" type="slidenum">
               <a:rPr lang="en-US" smtClean="0"/>
-              <a:t>‹#›</a:t>
             </a:fld>
             <a:endParaRPr lang="en-US"/>
           </a:p>
         </p:txBody>
       </p:sp>
     </p:spTree>
-    <p:extLst>
-      <p:ext uri="{BB962C8B-B14F-4D97-AF65-F5344CB8AC3E}">
-        <p14:creationId xmlns:p14="http://schemas.microsoft.com/office/powerpoint/2010/main" val="3612223792"/>
-      </p:ext>
-    </p:extLst>
   </p:cSld>
   <p:clrMapOvr>
     <a:masterClrMapping/>
@@ -776,6 +780,7 @@
               <a:rPr lang="en-US" smtClean="0"/>
               <a:t>Click to edit Master text styles</a:t>
             </a:r>
+            <a:endParaRPr lang="en-US" smtClean="0"/>
           </a:p>
           <a:p>
             <a:pPr lvl="1"/>
@@ -783,6 +788,7 @@
               <a:rPr lang="en-US" smtClean="0"/>
               <a:t>Second level</a:t>
             </a:r>
+            <a:endParaRPr lang="en-US" smtClean="0"/>
           </a:p>
           <a:p>
             <a:pPr lvl="2"/>
@@ -790,6 +796,7 @@
               <a:rPr lang="en-US" smtClean="0"/>
               <a:t>Third level</a:t>
             </a:r>
+            <a:endParaRPr lang="en-US" smtClean="0"/>
           </a:p>
           <a:p>
             <a:pPr lvl="3"/>
@@ -797,6 +804,7 @@
               <a:rPr lang="en-US" smtClean="0"/>
               <a:t>Fourth level</a:t>
             </a:r>
+            <a:endParaRPr lang="en-US" smtClean="0"/>
           </a:p>
           <a:p>
             <a:pPr lvl="4"/>
@@ -825,7 +833,6 @@
           <a:p>
             <a:fld id="{5BCAD085-E8A6-8845-BD4E-CB4CCA059FC4}" type="datetimeFigureOut">
               <a:rPr lang="en-US" smtClean="0"/>
-              <a:t>1/27/13</a:t>
             </a:fld>
             <a:endParaRPr lang="en-US"/>
           </a:p>
@@ -867,18 +874,12 @@
           <a:p>
             <a:fld id="{C1FF6DA9-008F-8B48-92A6-B652298478BF}" type="slidenum">
               <a:rPr lang="en-US" smtClean="0"/>
-              <a:t>‹#›</a:t>
             </a:fld>
             <a:endParaRPr lang="en-US"/>
           </a:p>
         </p:txBody>
       </p:sp>
     </p:spTree>
-    <p:extLst>
-      <p:ext uri="{BB962C8B-B14F-4D97-AF65-F5344CB8AC3E}">
-        <p14:creationId xmlns:p14="http://schemas.microsoft.com/office/powerpoint/2010/main" val="2614314258"/>
-      </p:ext>
-    </p:extLst>
   </p:cSld>
   <p:clrMapOvr>
     <a:masterClrMapping/>
@@ -1051,6 +1052,7 @@
               <a:rPr lang="en-US" smtClean="0"/>
               <a:t>Click to edit Master text styles</a:t>
             </a:r>
+            <a:endParaRPr lang="en-US" smtClean="0"/>
           </a:p>
         </p:txBody>
       </p:sp>
@@ -1071,7 +1073,6 @@
           <a:p>
             <a:fld id="{5BCAD085-E8A6-8845-BD4E-CB4CCA059FC4}" type="datetimeFigureOut">
               <a:rPr lang="en-US" smtClean="0"/>
-              <a:t>1/27/13</a:t>
             </a:fld>
             <a:endParaRPr lang="en-US"/>
           </a:p>
@@ -1113,18 +1114,12 @@
           <a:p>
             <a:fld id="{C1FF6DA9-008F-8B48-92A6-B652298478BF}" type="slidenum">
               <a:rPr lang="en-US" smtClean="0"/>
-              <a:t>‹#›</a:t>
             </a:fld>
             <a:endParaRPr lang="en-US"/>
           </a:p>
         </p:txBody>
       </p:sp>
     </p:spTree>
-    <p:extLst>
-      <p:ext uri="{BB962C8B-B14F-4D97-AF65-F5344CB8AC3E}">
-        <p14:creationId xmlns:p14="http://schemas.microsoft.com/office/powerpoint/2010/main" val="960648375"/>
-      </p:ext>
-    </p:extLst>
   </p:cSld>
   <p:clrMapOvr>
     <a:masterClrMapping/>
@@ -1225,6 +1220,7 @@
               <a:rPr lang="en-US" smtClean="0"/>
               <a:t>Click to edit Master text styles</a:t>
             </a:r>
+            <a:endParaRPr lang="en-US" smtClean="0"/>
           </a:p>
           <a:p>
             <a:pPr lvl="1"/>
@@ -1232,6 +1228,7 @@
               <a:rPr lang="en-US" smtClean="0"/>
               <a:t>Second level</a:t>
             </a:r>
+            <a:endParaRPr lang="en-US" smtClean="0"/>
           </a:p>
           <a:p>
             <a:pPr lvl="2"/>
@@ -1239,6 +1236,7 @@
               <a:rPr lang="en-US" smtClean="0"/>
               <a:t>Third level</a:t>
             </a:r>
+            <a:endParaRPr lang="en-US" smtClean="0"/>
           </a:p>
           <a:p>
             <a:pPr lvl="3"/>
@@ -1246,6 +1244,7 @@
               <a:rPr lang="en-US" smtClean="0"/>
               <a:t>Fourth level</a:t>
             </a:r>
+            <a:endParaRPr lang="en-US" smtClean="0"/>
           </a:p>
           <a:p>
             <a:pPr lvl="4"/>
@@ -1310,6 +1309,7 @@
               <a:rPr lang="en-US" smtClean="0"/>
               <a:t>Click to edit Master text styles</a:t>
             </a:r>
+            <a:endParaRPr lang="en-US" smtClean="0"/>
           </a:p>
           <a:p>
             <a:pPr lvl="1"/>
@@ -1317,6 +1317,7 @@
               <a:rPr lang="en-US" smtClean="0"/>
               <a:t>Second level</a:t>
             </a:r>
+            <a:endParaRPr lang="en-US" smtClean="0"/>
           </a:p>
           <a:p>
             <a:pPr lvl="2"/>
@@ -1324,6 +1325,7 @@
               <a:rPr lang="en-US" smtClean="0"/>
               <a:t>Third level</a:t>
             </a:r>
+            <a:endParaRPr lang="en-US" smtClean="0"/>
           </a:p>
           <a:p>
             <a:pPr lvl="3"/>
@@ -1331,6 +1333,7 @@
               <a:rPr lang="en-US" smtClean="0"/>
               <a:t>Fourth level</a:t>
             </a:r>
+            <a:endParaRPr lang="en-US" smtClean="0"/>
           </a:p>
           <a:p>
             <a:pPr lvl="4"/>
@@ -1359,7 +1362,6 @@
           <a:p>
             <a:fld id="{5BCAD085-E8A6-8845-BD4E-CB4CCA059FC4}" type="datetimeFigureOut">
               <a:rPr lang="en-US" smtClean="0"/>
-              <a:t>1/27/13</a:t>
             </a:fld>
             <a:endParaRPr lang="en-US"/>
           </a:p>
@@ -1401,18 +1403,12 @@
           <a:p>
             <a:fld id="{C1FF6DA9-008F-8B48-92A6-B652298478BF}" type="slidenum">
               <a:rPr lang="en-US" smtClean="0"/>
-              <a:t>‹#›</a:t>
             </a:fld>
             <a:endParaRPr lang="en-US"/>
           </a:p>
         </p:txBody>
       </p:sp>
     </p:spTree>
-    <p:extLst>
-      <p:ext uri="{BB962C8B-B14F-4D97-AF65-F5344CB8AC3E}">
-        <p14:creationId xmlns:p14="http://schemas.microsoft.com/office/powerpoint/2010/main" val="2782244947"/>
-      </p:ext>
-    </p:extLst>
   </p:cSld>
   <p:clrMapOvr>
     <a:masterClrMapping/>
@@ -1526,6 +1522,7 @@
               <a:rPr lang="en-US" smtClean="0"/>
               <a:t>Click to edit Master text styles</a:t>
             </a:r>
+            <a:endParaRPr lang="en-US" smtClean="0"/>
           </a:p>
         </p:txBody>
       </p:sp>
@@ -1582,6 +1579,7 @@
               <a:rPr lang="en-US" smtClean="0"/>
               <a:t>Click to edit Master text styles</a:t>
             </a:r>
+            <a:endParaRPr lang="en-US" smtClean="0"/>
           </a:p>
           <a:p>
             <a:pPr lvl="1"/>
@@ -1589,6 +1587,7 @@
               <a:rPr lang="en-US" smtClean="0"/>
               <a:t>Second level</a:t>
             </a:r>
+            <a:endParaRPr lang="en-US" smtClean="0"/>
           </a:p>
           <a:p>
             <a:pPr lvl="2"/>
@@ -1596,6 +1595,7 @@
               <a:rPr lang="en-US" smtClean="0"/>
               <a:t>Third level</a:t>
             </a:r>
+            <a:endParaRPr lang="en-US" smtClean="0"/>
           </a:p>
           <a:p>
             <a:pPr lvl="3"/>
@@ -1603,6 +1603,7 @@
               <a:rPr lang="en-US" smtClean="0"/>
               <a:t>Fourth level</a:t>
             </a:r>
+            <a:endParaRPr lang="en-US" smtClean="0"/>
           </a:p>
           <a:p>
             <a:pPr lvl="4"/>
@@ -1676,6 +1677,7 @@
               <a:rPr lang="en-US" smtClean="0"/>
               <a:t>Click to edit Master text styles</a:t>
             </a:r>
+            <a:endParaRPr lang="en-US" smtClean="0"/>
           </a:p>
         </p:txBody>
       </p:sp>
@@ -1732,6 +1734,7 @@
               <a:rPr lang="en-US" smtClean="0"/>
               <a:t>Click to edit Master text styles</a:t>
             </a:r>
+            <a:endParaRPr lang="en-US" smtClean="0"/>
           </a:p>
           <a:p>
             <a:pPr lvl="1"/>
@@ -1739,6 +1742,7 @@
               <a:rPr lang="en-US" smtClean="0"/>
               <a:t>Second level</a:t>
             </a:r>
+            <a:endParaRPr lang="en-US" smtClean="0"/>
           </a:p>
           <a:p>
             <a:pPr lvl="2"/>
@@ -1746,6 +1750,7 @@
               <a:rPr lang="en-US" smtClean="0"/>
               <a:t>Third level</a:t>
             </a:r>
+            <a:endParaRPr lang="en-US" smtClean="0"/>
           </a:p>
           <a:p>
             <a:pPr lvl="3"/>
@@ -1753,6 +1758,7 @@
               <a:rPr lang="en-US" smtClean="0"/>
               <a:t>Fourth level</a:t>
             </a:r>
+            <a:endParaRPr lang="en-US" smtClean="0"/>
           </a:p>
           <a:p>
             <a:pPr lvl="4"/>
@@ -1781,7 +1787,6 @@
           <a:p>
             <a:fld id="{5BCAD085-E8A6-8845-BD4E-CB4CCA059FC4}" type="datetimeFigureOut">
               <a:rPr lang="en-US" smtClean="0"/>
-              <a:t>1/27/13</a:t>
             </a:fld>
             <a:endParaRPr lang="en-US"/>
           </a:p>
@@ -1823,18 +1828,12 @@
           <a:p>
             <a:fld id="{C1FF6DA9-008F-8B48-92A6-B652298478BF}" type="slidenum">
               <a:rPr lang="en-US" smtClean="0"/>
-              <a:t>‹#›</a:t>
             </a:fld>
             <a:endParaRPr lang="en-US"/>
           </a:p>
         </p:txBody>
       </p:sp>
     </p:spTree>
-    <p:extLst>
-      <p:ext uri="{BB962C8B-B14F-4D97-AF65-F5344CB8AC3E}">
-        <p14:creationId xmlns:p14="http://schemas.microsoft.com/office/powerpoint/2010/main" val="990158736"/>
-      </p:ext>
-    </p:extLst>
   </p:cSld>
   <p:clrMapOvr>
     <a:masterClrMapping/>
@@ -1899,7 +1898,6 @@
           <a:p>
             <a:fld id="{5BCAD085-E8A6-8845-BD4E-CB4CCA059FC4}" type="datetimeFigureOut">
               <a:rPr lang="en-US" smtClean="0"/>
-              <a:t>1/27/13</a:t>
             </a:fld>
             <a:endParaRPr lang="en-US"/>
           </a:p>
@@ -1941,18 +1939,12 @@
           <a:p>
             <a:fld id="{C1FF6DA9-008F-8B48-92A6-B652298478BF}" type="slidenum">
               <a:rPr lang="en-US" smtClean="0"/>
-              <a:t>‹#›</a:t>
             </a:fld>
             <a:endParaRPr lang="en-US"/>
           </a:p>
         </p:txBody>
       </p:sp>
     </p:spTree>
-    <p:extLst>
-      <p:ext uri="{BB962C8B-B14F-4D97-AF65-F5344CB8AC3E}">
-        <p14:creationId xmlns:p14="http://schemas.microsoft.com/office/powerpoint/2010/main" val="727027711"/>
-      </p:ext>
-    </p:extLst>
   </p:cSld>
   <p:clrMapOvr>
     <a:masterClrMapping/>
@@ -1994,7 +1986,6 @@
           <a:p>
             <a:fld id="{5BCAD085-E8A6-8845-BD4E-CB4CCA059FC4}" type="datetimeFigureOut">
               <a:rPr lang="en-US" smtClean="0"/>
-              <a:t>1/27/13</a:t>
             </a:fld>
             <a:endParaRPr lang="en-US"/>
           </a:p>
@@ -2036,18 +2027,12 @@
           <a:p>
             <a:fld id="{C1FF6DA9-008F-8B48-92A6-B652298478BF}" type="slidenum">
               <a:rPr lang="en-US" smtClean="0"/>
-              <a:t>‹#›</a:t>
             </a:fld>
             <a:endParaRPr lang="en-US"/>
           </a:p>
         </p:txBody>
       </p:sp>
     </p:spTree>
-    <p:extLst>
-      <p:ext uri="{BB962C8B-B14F-4D97-AF65-F5344CB8AC3E}">
-        <p14:creationId xmlns:p14="http://schemas.microsoft.com/office/powerpoint/2010/main" val="1212999818"/>
-      </p:ext>
-    </p:extLst>
   </p:cSld>
   <p:clrMapOvr>
     <a:masterClrMapping/>
@@ -2157,6 +2142,7 @@
               <a:rPr lang="en-US" smtClean="0"/>
               <a:t>Click to edit Master text styles</a:t>
             </a:r>
+            <a:endParaRPr lang="en-US" smtClean="0"/>
           </a:p>
           <a:p>
             <a:pPr lvl="1"/>
@@ -2164,6 +2150,7 @@
               <a:rPr lang="en-US" smtClean="0"/>
               <a:t>Second level</a:t>
             </a:r>
+            <a:endParaRPr lang="en-US" smtClean="0"/>
           </a:p>
           <a:p>
             <a:pPr lvl="2"/>
@@ -2171,6 +2158,7 @@
               <a:rPr lang="en-US" smtClean="0"/>
               <a:t>Third level</a:t>
             </a:r>
+            <a:endParaRPr lang="en-US" smtClean="0"/>
           </a:p>
           <a:p>
             <a:pPr lvl="3"/>
@@ -2178,6 +2166,7 @@
               <a:rPr lang="en-US" smtClean="0"/>
               <a:t>Fourth level</a:t>
             </a:r>
+            <a:endParaRPr lang="en-US" smtClean="0"/>
           </a:p>
           <a:p>
             <a:pPr lvl="4"/>
@@ -2251,6 +2240,7 @@
               <a:rPr lang="en-US" smtClean="0"/>
               <a:t>Click to edit Master text styles</a:t>
             </a:r>
+            <a:endParaRPr lang="en-US" smtClean="0"/>
           </a:p>
         </p:txBody>
       </p:sp>
@@ -2271,7 +2261,6 @@
           <a:p>
             <a:fld id="{5BCAD085-E8A6-8845-BD4E-CB4CCA059FC4}" type="datetimeFigureOut">
               <a:rPr lang="en-US" smtClean="0"/>
-              <a:t>1/27/13</a:t>
             </a:fld>
             <a:endParaRPr lang="en-US"/>
           </a:p>
@@ -2313,18 +2302,12 @@
           <a:p>
             <a:fld id="{C1FF6DA9-008F-8B48-92A6-B652298478BF}" type="slidenum">
               <a:rPr lang="en-US" smtClean="0"/>
-              <a:t>‹#›</a:t>
             </a:fld>
             <a:endParaRPr lang="en-US"/>
           </a:p>
         </p:txBody>
       </p:sp>
     </p:spTree>
-    <p:extLst>
-      <p:ext uri="{BB962C8B-B14F-4D97-AF65-F5344CB8AC3E}">
-        <p14:creationId xmlns:p14="http://schemas.microsoft.com/office/powerpoint/2010/main" val="1840726560"/>
-      </p:ext>
-    </p:extLst>
   </p:cSld>
   <p:clrMapOvr>
     <a:masterClrMapping/>
@@ -2504,6 +2487,7 @@
               <a:rPr lang="en-US" smtClean="0"/>
               <a:t>Click to edit Master text styles</a:t>
             </a:r>
+            <a:endParaRPr lang="en-US" smtClean="0"/>
           </a:p>
         </p:txBody>
       </p:sp>
@@ -2524,7 +2508,6 @@
           <a:p>
             <a:fld id="{5BCAD085-E8A6-8845-BD4E-CB4CCA059FC4}" type="datetimeFigureOut">
               <a:rPr lang="en-US" smtClean="0"/>
-              <a:t>1/27/13</a:t>
             </a:fld>
             <a:endParaRPr lang="en-US"/>
           </a:p>
@@ -2566,18 +2549,12 @@
           <a:p>
             <a:fld id="{C1FF6DA9-008F-8B48-92A6-B652298478BF}" type="slidenum">
               <a:rPr lang="en-US" smtClean="0"/>
-              <a:t>‹#›</a:t>
             </a:fld>
             <a:endParaRPr lang="en-US"/>
           </a:p>
         </p:txBody>
       </p:sp>
     </p:spTree>
-    <p:extLst>
-      <p:ext uri="{BB962C8B-B14F-4D97-AF65-F5344CB8AC3E}">
-        <p14:creationId xmlns:p14="http://schemas.microsoft.com/office/powerpoint/2010/main" val="3889236939"/>
-      </p:ext>
-    </p:extLst>
   </p:cSld>
   <p:clrMapOvr>
     <a:masterClrMapping/>
@@ -2670,6 +2647,7 @@
               <a:rPr lang="en-US" smtClean="0"/>
               <a:t>Click to edit Master text styles</a:t>
             </a:r>
+            <a:endParaRPr lang="en-US" smtClean="0"/>
           </a:p>
           <a:p>
             <a:pPr lvl="1"/>
@@ -2677,6 +2655,7 @@
               <a:rPr lang="en-US" smtClean="0"/>
               <a:t>Second level</a:t>
             </a:r>
+            <a:endParaRPr lang="en-US" smtClean="0"/>
           </a:p>
           <a:p>
             <a:pPr lvl="2"/>
@@ -2684,6 +2663,7 @@
               <a:rPr lang="en-US" smtClean="0"/>
               <a:t>Third level</a:t>
             </a:r>
+            <a:endParaRPr lang="en-US" smtClean="0"/>
           </a:p>
           <a:p>
             <a:pPr lvl="3"/>
@@ -2691,6 +2671,7 @@
               <a:rPr lang="en-US" smtClean="0"/>
               <a:t>Fourth level</a:t>
             </a:r>
+            <a:endParaRPr lang="en-US" smtClean="0"/>
           </a:p>
           <a:p>
             <a:pPr lvl="4"/>
@@ -2737,7 +2718,6 @@
           <a:p>
             <a:fld id="{5BCAD085-E8A6-8845-BD4E-CB4CCA059FC4}" type="datetimeFigureOut">
               <a:rPr lang="en-US" smtClean="0"/>
-              <a:t>1/27/13</a:t>
             </a:fld>
             <a:endParaRPr lang="en-US"/>
           </a:p>
@@ -2815,18 +2795,12 @@
           <a:p>
             <a:fld id="{C1FF6DA9-008F-8B48-92A6-B652298478BF}" type="slidenum">
               <a:rPr lang="en-US" smtClean="0"/>
-              <a:t>‹#›</a:t>
             </a:fld>
             <a:endParaRPr lang="en-US"/>
           </a:p>
         </p:txBody>
       </p:sp>
     </p:spTree>
-    <p:extLst>
-      <p:ext uri="{BB962C8B-B14F-4D97-AF65-F5344CB8AC3E}">
-        <p14:creationId xmlns:p14="http://schemas.microsoft.com/office/powerpoint/2010/main" val="2209977519"/>
-      </p:ext>
-    </p:extLst>
   </p:cSld>
   <p:clrMap bg1="lt1" tx1="dk1" bg2="lt2" tx2="dk2" accent1="accent1" accent2="accent2" accent3="accent3" accent4="accent4" accent5="accent5" accent6="accent6" hlink="hlink" folHlink="folHlink"/>
   <p:sldLayoutIdLst>
@@ -2864,7 +2838,7 @@
         <a:spcBef>
           <a:spcPct val="20000"/>
         </a:spcBef>
-        <a:buFont typeface="Arial"/>
+        <a:buFont typeface="Arial" panose="020B0604020202020204"/>
         <a:buChar char="•"/>
         <a:defRPr sz="3200" kern="1200">
           <a:solidFill>
@@ -2879,7 +2853,7 @@
         <a:spcBef>
           <a:spcPct val="20000"/>
         </a:spcBef>
-        <a:buFont typeface="Arial"/>
+        <a:buFont typeface="Arial" panose="020B0604020202020204"/>
         <a:buChar char="–"/>
         <a:defRPr sz="2800" kern="1200">
           <a:solidFill>
@@ -2894,7 +2868,7 @@
         <a:spcBef>
           <a:spcPct val="20000"/>
         </a:spcBef>
-        <a:buFont typeface="Arial"/>
+        <a:buFont typeface="Arial" panose="020B0604020202020204"/>
         <a:buChar char="•"/>
         <a:defRPr sz="2400" kern="1200">
           <a:solidFill>
@@ -2909,7 +2883,7 @@
         <a:spcBef>
           <a:spcPct val="20000"/>
         </a:spcBef>
-        <a:buFont typeface="Arial"/>
+        <a:buFont typeface="Arial" panose="020B0604020202020204"/>
         <a:buChar char="–"/>
         <a:defRPr sz="2000" kern="1200">
           <a:solidFill>
@@ -2924,7 +2898,7 @@
         <a:spcBef>
           <a:spcPct val="20000"/>
         </a:spcBef>
-        <a:buFont typeface="Arial"/>
+        <a:buFont typeface="Arial" panose="020B0604020202020204"/>
         <a:buChar char="»"/>
         <a:defRPr sz="2000" kern="1200">
           <a:solidFill>
@@ -2939,7 +2913,7 @@
         <a:spcBef>
           <a:spcPct val="20000"/>
         </a:spcBef>
-        <a:buFont typeface="Arial"/>
+        <a:buFont typeface="Arial" panose="020B0604020202020204"/>
         <a:buChar char="•"/>
         <a:defRPr sz="2000" kern="1200">
           <a:solidFill>
@@ -2954,7 +2928,7 @@
         <a:spcBef>
           <a:spcPct val="20000"/>
         </a:spcBef>
-        <a:buFont typeface="Arial"/>
+        <a:buFont typeface="Arial" panose="020B0604020202020204"/>
         <a:buChar char="•"/>
         <a:defRPr sz="2000" kern="1200">
           <a:solidFill>
@@ -2969,7 +2943,7 @@
         <a:spcBef>
           <a:spcPct val="20000"/>
         </a:spcBef>
-        <a:buFont typeface="Arial"/>
+        <a:buFont typeface="Arial" panose="020B0604020202020204"/>
         <a:buChar char="•"/>
         <a:defRPr sz="2000" kern="1200">
           <a:solidFill>
@@ -2984,7 +2958,7 @@
         <a:spcBef>
           <a:spcPct val="20000"/>
         </a:spcBef>
-        <a:buFont typeface="Arial"/>
+        <a:buFont typeface="Arial" panose="020B0604020202020204"/>
         <a:buChar char="•"/>
         <a:defRPr sz="2000" kern="1200">
           <a:solidFill>
@@ -3096,7 +3070,7 @@
 </file>
 
 <file path=ppt/slides/slide1.xml><?xml version="1.0" encoding="utf-8"?>
-<p:sld xmlns:a="http://schemas.openxmlformats.org/drawingml/2006/main" xmlns:p="http://schemas.openxmlformats.org/presentationml/2006/main" xmlns:r="http://schemas.openxmlformats.org/officeDocument/2006/relationships">
+<p:sld xmlns:a="http://schemas.openxmlformats.org/drawingml/2006/main" xmlns:r="http://schemas.openxmlformats.org/officeDocument/2006/relationships" xmlns:p="http://schemas.openxmlformats.org/presentationml/2006/main">
   <p:cSld>
     <p:bg>
       <p:bgPr>
@@ -3158,42 +3132,6 @@
       </p:sp>
       <p:sp>
         <p:nvSpPr>
-          <p:cNvPr id="3" name="TextBox 2"/>
-          <p:cNvSpPr txBox="1"/>
-          <p:nvPr/>
-        </p:nvSpPr>
-        <p:spPr>
-          <a:xfrm>
-            <a:off x="914400" y="914400"/>
-            <a:ext cx="10058400" cy="548640"/>
-          </a:xfrm>
-          <a:prstGeom prst="rect">
-            <a:avLst/>
-          </a:prstGeom>
-          <a:noFill/>
-        </p:spPr>
-        <p:txBody>
-          <a:bodyPr wrap="square">
-            <a:spAutoFit/>
-          </a:bodyPr>
-          <a:lstStyle/>
-          <a:p>
-            <a:pPr algn="l">
-              <a:defRPr sz="1600" b="0">
-                <a:solidFill>
-                  <a:srgbClr val="FFFFFF"/>
-                </a:solidFill>
-                <a:latin typeface="Calibri"/>
-              </a:defRPr>
-            </a:pPr>
-            <a:r>
-              <a:t>课程作业 · 软件体系结构</a:t>
-            </a:r>
-          </a:p>
-        </p:txBody>
-      </p:sp>
-      <p:sp>
-        <p:nvSpPr>
           <p:cNvPr id="4" name="TextBox 3"/>
           <p:cNvSpPr txBox="1"/>
           <p:nvPr/>
@@ -3219,7 +3157,7 @@
                 <a:solidFill>
                   <a:srgbClr val="FFFFFF"/>
                 </a:solidFill>
-                <a:latin typeface="Calibri"/>
+                <a:latin typeface="Calibri" panose="020F0502020204030204"/>
               </a:defRPr>
             </a:pPr>
             <a:r>
@@ -3237,7 +3175,7 @@
         <p:spPr>
           <a:xfrm>
             <a:off x="914400" y="3931920"/>
-            <a:ext cx="10058400" cy="731520"/>
+            <a:ext cx="10058400" cy="629920"/>
           </a:xfrm>
           <a:prstGeom prst="rect">
             <a:avLst/>
@@ -3255,13 +3193,64 @@
                 <a:solidFill>
                   <a:srgbClr val="F5F7FA"/>
                 </a:solidFill>
-                <a:latin typeface="Calibri"/>
+                <a:latin typeface="Calibri" panose="020F0502020204030204"/>
               </a:defRPr>
             </a:pPr>
             <a:r>
               <a:t>α,β-CROWN 与 Marabou 在 MNIST/CIFAR-10 上的实验分析</a:t>
             </a:r>
           </a:p>
+          <a:p>
+            <a:pPr algn="l">
+              <a:defRPr sz="2000" b="0">
+                <a:solidFill>
+                  <a:srgbClr val="F5F7FA"/>
+                </a:solidFill>
+                <a:latin typeface="Calibri" panose="020F0502020204030204"/>
+              </a:defRPr>
+            </a:pPr>
+            <a:r>
+              <a:rPr lang="zh-CN" sz="1500"/>
+              <a:t>小组成员：</a:t>
+            </a:r>
+            <a:r>
+              <a:rPr lang="zh-CN" altLang="en-US" sz="1500"/>
+              <a:t>郑博瀚</a:t>
+            </a:r>
+            <a:r>
+              <a:rPr lang="en-US" altLang="zh-CN" sz="1500"/>
+              <a:t> </a:t>
+            </a:r>
+            <a:r>
+              <a:rPr lang="zh-CN" altLang="en-US" sz="1500"/>
+              <a:t>于瑞锋</a:t>
+            </a:r>
+            <a:r>
+              <a:rPr lang="en-US" altLang="zh-CN" sz="1500"/>
+              <a:t> </a:t>
+            </a:r>
+            <a:r>
+              <a:rPr lang="zh-CN" altLang="en-US" sz="1500"/>
+              <a:t>邓正宇</a:t>
+            </a:r>
+            <a:r>
+              <a:rPr lang="en-US" altLang="zh-CN" sz="1500"/>
+              <a:t> </a:t>
+            </a:r>
+            <a:r>
+              <a:rPr lang="zh-CN" altLang="en-US" sz="1500"/>
+              <a:t>陈风</a:t>
+            </a:r>
+            <a:r>
+              <a:rPr lang="en-US" altLang="zh-CN" sz="1500"/>
+              <a:t> </a:t>
+            </a:r>
+            <a:r>
+              <a:rPr lang="zh-CN" altLang="en-US" sz="1500"/>
+              <a:t>姚逸辰</a:t>
+            </a:r>
+            <a:endParaRPr lang="zh-CN" altLang="en-US" sz="1500"/>
+          </a:p>
         </p:txBody>
       </p:sp>
       <p:sp>
@@ -3273,7 +3262,7 @@
         <p:spPr>
           <a:xfrm>
             <a:off x="914400" y="5303520"/>
-            <a:ext cx="10058400" cy="457200"/>
+            <a:ext cx="10058400" cy="306705"/>
           </a:xfrm>
           <a:prstGeom prst="rect">
             <a:avLst/>
@@ -3291,12 +3280,17 @@
                 <a:solidFill>
                   <a:srgbClr val="BBCCDD"/>
                 </a:solidFill>
-                <a:latin typeface="Calibri"/>
-              </a:defRPr>
-            </a:pPr>
-            <a:r>
-              <a:t>完成情况汇报 · 2026-05</a:t>
-            </a:r>
+                <a:latin typeface="Calibri" panose="020F0502020204030204"/>
+              </a:defRPr>
+            </a:pPr>
+            <a:r>
+              <a:t>完成情况汇报 · 2026-0</a:t>
+            </a:r>
+            <a:r>
+              <a:rPr lang="en-US"/>
+              <a:t>6</a:t>
+            </a:r>
+            <a:endParaRPr lang="en-US"/>
           </a:p>
         </p:txBody>
       </p:sp>
@@ -3327,7 +3321,7 @@
                 <a:solidFill>
                   <a:srgbClr val="7F8C9A"/>
                 </a:solidFill>
-                <a:latin typeface="Calibri"/>
+                <a:latin typeface="Calibri" panose="020F0502020204030204"/>
               </a:defRPr>
             </a:pPr>
             <a:r>
@@ -3345,7 +3339,7 @@
 </file>
 
 <file path=ppt/slides/slide10.xml><?xml version="1.0" encoding="utf-8"?>
-<p:sld xmlns:a="http://schemas.openxmlformats.org/drawingml/2006/main" xmlns:p="http://schemas.openxmlformats.org/presentationml/2006/main" xmlns:r="http://schemas.openxmlformats.org/officeDocument/2006/relationships">
+<p:sld xmlns:a="http://schemas.openxmlformats.org/drawingml/2006/main" xmlns:r="http://schemas.openxmlformats.org/officeDocument/2006/relationships" xmlns:p="http://schemas.openxmlformats.org/presentationml/2006/main">
   <p:cSld>
     <p:bg>
       <p:bgPr>
@@ -3432,7 +3426,1105 @@
                 <a:solidFill>
                   <a:srgbClr val="FFFFFF"/>
                 </a:solidFill>
-                <a:latin typeface="Calibri"/>
+                <a:latin typeface="Calibri" panose="020F0502020204030204"/>
+              </a:defRPr>
+            </a:pPr>
+            <a:r>
+              <a:t>跨数据集验证：CIFAR-10</a:t>
+            </a:r>
+          </a:p>
+        </p:txBody>
+      </p:sp>
+      <p:graphicFrame>
+        <p:nvGraphicFramePr>
+          <p:cNvPr id="4" name="Table 3"/>
+          <p:cNvGraphicFramePr>
+            <a:graphicFrameLocks noGrp="1"/>
+          </p:cNvGraphicFramePr>
+          <p:nvPr/>
+        </p:nvGraphicFramePr>
+        <p:xfrm>
+          <a:off x="731520" y="1188720"/>
+          <a:ext cx="10515600" cy="2286000"/>
+        </p:xfrm>
+        <a:graphic>
+          <a:graphicData uri="http://schemas.openxmlformats.org/drawingml/2006/table">
+            <a:tbl>
+              <a:tblPr firstRow="1" bandRow="1">
+                <a:tableStyleId>{5C22544A-7EE6-4342-B048-85BDC9FD1C3A}</a:tableStyleId>
+              </a:tblPr>
+              <a:tblGrid>
+                <a:gridCol w="2628900"/>
+                <a:gridCol w="2628900"/>
+                <a:gridCol w="2628900"/>
+                <a:gridCol w="2628900"/>
+              </a:tblGrid>
+              <a:tr h="457200">
+                <a:tc>
+                  <a:txBody>
+                    <a:bodyPr/>
+                    <a:lstStyle/>
+                    <a:p>
+                      <a:pPr algn="ctr">
+                        <a:defRPr sz="1200" b="1">
+                          <a:solidFill>
+                            <a:srgbClr val="FFFFFF"/>
+                          </a:solidFill>
+                          <a:latin typeface="Calibri" panose="020F0502020204030204"/>
+                        </a:defRPr>
+                      </a:pPr>
+                      <a:r>
+                        <a:t>指标</a:t>
+                      </a:r>
+                    </a:p>
+                  </a:txBody>
+                  <a:tcPr anchor="ctr">
+                    <a:solidFill>
+                      <a:srgbClr val="1A3A5C"/>
+                    </a:solidFill>
+                  </a:tcPr>
+                </a:tc>
+                <a:tc>
+                  <a:txBody>
+                    <a:bodyPr/>
+                    <a:lstStyle/>
+                    <a:p>
+                      <a:pPr algn="ctr">
+                        <a:defRPr sz="1200" b="1">
+                          <a:solidFill>
+                            <a:srgbClr val="FFFFFF"/>
+                          </a:solidFill>
+                          <a:latin typeface="Calibri" panose="020F0502020204030204"/>
+                        </a:defRPr>
+                      </a:pPr>
+                      <a:r>
+                        <a:t>MNIST (ε=0.01)</a:t>
+                      </a:r>
+                    </a:p>
+                  </a:txBody>
+                  <a:tcPr anchor="ctr">
+                    <a:solidFill>
+                      <a:srgbClr val="1A3A5C"/>
+                    </a:solidFill>
+                  </a:tcPr>
+                </a:tc>
+                <a:tc>
+                  <a:txBody>
+                    <a:bodyPr/>
+                    <a:lstStyle/>
+                    <a:p>
+                      <a:pPr algn="ctr">
+                        <a:defRPr sz="1200" b="1">
+                          <a:solidFill>
+                            <a:srgbClr val="FFFFFF"/>
+                          </a:solidFill>
+                          <a:latin typeface="Calibri" panose="020F0502020204030204"/>
+                        </a:defRPr>
+                      </a:pPr>
+                      <a:r>
+                        <a:t>CIFAR-10 (ε=2/255)</a:t>
+                      </a:r>
+                    </a:p>
+                  </a:txBody>
+                  <a:tcPr anchor="ctr">
+                    <a:solidFill>
+                      <a:srgbClr val="1A3A5C"/>
+                    </a:solidFill>
+                  </a:tcPr>
+                </a:tc>
+                <a:tc>
+                  <a:txBody>
+                    <a:bodyPr/>
+                    <a:lstStyle/>
+                    <a:p>
+                      <a:pPr algn="ctr">
+                        <a:defRPr sz="1200" b="1">
+                          <a:solidFill>
+                            <a:srgbClr val="FFFFFF"/>
+                          </a:solidFill>
+                          <a:latin typeface="Calibri" panose="020F0502020204030204"/>
+                        </a:defRPr>
+                      </a:pPr>
+                      <a:r>
+                        <a:t>差距</a:t>
+                      </a:r>
+                    </a:p>
+                  </a:txBody>
+                  <a:tcPr anchor="ctr">
+                    <a:solidFill>
+                      <a:srgbClr val="1A3A5C"/>
+                    </a:solidFill>
+                  </a:tcPr>
+                </a:tc>
+              </a:tr>
+              <a:tr h="457200">
+                <a:tc>
+                  <a:txBody>
+                    <a:bodyPr/>
+                    <a:lstStyle/>
+                    <a:p>
+                      <a:pPr algn="ctr">
+                        <a:defRPr sz="1200">
+                          <a:solidFill>
+                            <a:srgbClr val="2C3E50"/>
+                          </a:solidFill>
+                          <a:latin typeface="Calibri" panose="020F0502020204030204"/>
+                        </a:defRPr>
+                      </a:pPr>
+                      <a:r>
+                        <a:t>CROWN VRA</a:t>
+                      </a:r>
+                    </a:p>
+                  </a:txBody>
+                  <a:tcPr anchor="ctr">
+                    <a:solidFill>
+                      <a:srgbClr val="FFFFFF"/>
+                    </a:solidFill>
+                  </a:tcPr>
+                </a:tc>
+                <a:tc>
+                  <a:txBody>
+                    <a:bodyPr/>
+                    <a:lstStyle/>
+                    <a:p>
+                      <a:pPr algn="ctr">
+                        <a:defRPr sz="1200">
+                          <a:solidFill>
+                            <a:srgbClr val="2C3E50"/>
+                          </a:solidFill>
+                          <a:latin typeface="Calibri" panose="020F0502020204030204"/>
+                        </a:defRPr>
+                      </a:pPr>
+                      <a:r>
+                        <a:t>98.0%</a:t>
+                      </a:r>
+                    </a:p>
+                  </a:txBody>
+                  <a:tcPr anchor="ctr">
+                    <a:solidFill>
+                      <a:srgbClr val="FFFFFF"/>
+                    </a:solidFill>
+                  </a:tcPr>
+                </a:tc>
+                <a:tc>
+                  <a:txBody>
+                    <a:bodyPr/>
+                    <a:lstStyle/>
+                    <a:p>
+                      <a:pPr algn="ctr">
+                        <a:defRPr sz="1200">
+                          <a:solidFill>
+                            <a:srgbClr val="2C3E50"/>
+                          </a:solidFill>
+                          <a:latin typeface="Calibri" panose="020F0502020204030204"/>
+                        </a:defRPr>
+                      </a:pPr>
+                      <a:r>
+                        <a:t>0.0%</a:t>
+                      </a:r>
+                    </a:p>
+                  </a:txBody>
+                  <a:tcPr anchor="ctr">
+                    <a:solidFill>
+                      <a:srgbClr val="FFFFFF"/>
+                    </a:solidFill>
+                  </a:tcPr>
+                </a:tc>
+                <a:tc>
+                  <a:txBody>
+                    <a:bodyPr/>
+                    <a:lstStyle/>
+                    <a:p>
+                      <a:pPr algn="ctr">
+                        <a:defRPr sz="1200">
+                          <a:solidFill>
+                            <a:srgbClr val="2C3E50"/>
+                          </a:solidFill>
+                          <a:latin typeface="Calibri" panose="020F0502020204030204"/>
+                        </a:defRPr>
+                      </a:pPr>
+                      <a:r>
+                        <a:t>断层</a:t>
+                      </a:r>
+                    </a:p>
+                  </a:txBody>
+                  <a:tcPr anchor="ctr">
+                    <a:solidFill>
+                      <a:srgbClr val="FFFFFF"/>
+                    </a:solidFill>
+                  </a:tcPr>
+                </a:tc>
+              </a:tr>
+              <a:tr h="457200">
+                <a:tc>
+                  <a:txBody>
+                    <a:bodyPr/>
+                    <a:lstStyle/>
+                    <a:p>
+                      <a:pPr algn="ctr">
+                        <a:defRPr sz="1200">
+                          <a:solidFill>
+                            <a:srgbClr val="2C3E50"/>
+                          </a:solidFill>
+                          <a:latin typeface="Calibri" panose="020F0502020204030204"/>
+                        </a:defRPr>
+                      </a:pPr>
+                      <a:r>
+                        <a:t>BaB VRA</a:t>
+                      </a:r>
+                    </a:p>
+                  </a:txBody>
+                  <a:tcPr anchor="ctr">
+                    <a:solidFill>
+                      <a:srgbClr val="FFFFFF"/>
+                    </a:solidFill>
+                  </a:tcPr>
+                </a:tc>
+                <a:tc>
+                  <a:txBody>
+                    <a:bodyPr/>
+                    <a:lstStyle/>
+                    <a:p>
+                      <a:pPr algn="ctr">
+                        <a:defRPr sz="1200">
+                          <a:solidFill>
+                            <a:srgbClr val="2C3E50"/>
+                          </a:solidFill>
+                          <a:latin typeface="Calibri" panose="020F0502020204030204"/>
+                        </a:defRPr>
+                      </a:pPr>
+                      <a:r>
+                        <a:t>100.0%</a:t>
+                      </a:r>
+                    </a:p>
+                  </a:txBody>
+                  <a:tcPr anchor="ctr">
+                    <a:solidFill>
+                      <a:srgbClr val="FFFFFF"/>
+                    </a:solidFill>
+                  </a:tcPr>
+                </a:tc>
+                <a:tc>
+                  <a:txBody>
+                    <a:bodyPr/>
+                    <a:lstStyle/>
+                    <a:p>
+                      <a:pPr algn="ctr">
+                        <a:defRPr sz="1200">
+                          <a:solidFill>
+                            <a:srgbClr val="2C3E50"/>
+                          </a:solidFill>
+                          <a:latin typeface="Calibri" panose="020F0502020204030204"/>
+                        </a:defRPr>
+                      </a:pPr>
+                      <a:r>
+                        <a:t>0.0%</a:t>
+                      </a:r>
+                    </a:p>
+                  </a:txBody>
+                  <a:tcPr anchor="ctr">
+                    <a:solidFill>
+                      <a:srgbClr val="FFFFFF"/>
+                    </a:solidFill>
+                  </a:tcPr>
+                </a:tc>
+                <a:tc>
+                  <a:txBody>
+                    <a:bodyPr/>
+                    <a:lstStyle/>
+                    <a:p>
+                      <a:pPr algn="ctr">
+                        <a:defRPr sz="1200">
+                          <a:solidFill>
+                            <a:srgbClr val="2C3E50"/>
+                          </a:solidFill>
+                          <a:latin typeface="Calibri" panose="020F0502020204030204"/>
+                        </a:defRPr>
+                      </a:pPr>
+                      <a:r>
+                        <a:t>断层</a:t>
+                      </a:r>
+                    </a:p>
+                  </a:txBody>
+                  <a:tcPr anchor="ctr">
+                    <a:solidFill>
+                      <a:srgbClr val="FFFFFF"/>
+                    </a:solidFill>
+                  </a:tcPr>
+                </a:tc>
+              </a:tr>
+              <a:tr h="457200">
+                <a:tc>
+                  <a:txBody>
+                    <a:bodyPr/>
+                    <a:lstStyle/>
+                    <a:p>
+                      <a:pPr algn="ctr">
+                        <a:defRPr sz="1200">
+                          <a:solidFill>
+                            <a:srgbClr val="2C3E50"/>
+                          </a:solidFill>
+                          <a:latin typeface="Calibri" panose="020F0502020204030204"/>
+                        </a:defRPr>
+                      </a:pPr>
+                      <a:r>
+                        <a:t>单样本耗时</a:t>
+                      </a:r>
+                    </a:p>
+                  </a:txBody>
+                  <a:tcPr anchor="ctr">
+                    <a:solidFill>
+                      <a:srgbClr val="FFFFFF"/>
+                    </a:solidFill>
+                  </a:tcPr>
+                </a:tc>
+                <a:tc>
+                  <a:txBody>
+                    <a:bodyPr/>
+                    <a:lstStyle/>
+                    <a:p>
+                      <a:pPr algn="ctr">
+                        <a:defRPr sz="1200">
+                          <a:solidFill>
+                            <a:srgbClr val="2C3E50"/>
+                          </a:solidFill>
+                          <a:latin typeface="Calibri" panose="020F0502020204030204"/>
+                        </a:defRPr>
+                      </a:pPr>
+                      <a:r>
+                        <a:t>~3s</a:t>
+                      </a:r>
+                    </a:p>
+                  </a:txBody>
+                  <a:tcPr anchor="ctr">
+                    <a:solidFill>
+                      <a:srgbClr val="FFFFFF"/>
+                    </a:solidFill>
+                  </a:tcPr>
+                </a:tc>
+                <a:tc>
+                  <a:txBody>
+                    <a:bodyPr/>
+                    <a:lstStyle/>
+                    <a:p>
+                      <a:pPr algn="ctr">
+                        <a:defRPr sz="1200">
+                          <a:solidFill>
+                            <a:srgbClr val="2C3E50"/>
+                          </a:solidFill>
+                          <a:latin typeface="Calibri" panose="020F0502020204030204"/>
+                        </a:defRPr>
+                      </a:pPr>
+                      <a:r>
+                        <a:t>~68s</a:t>
+                      </a:r>
+                    </a:p>
+                  </a:txBody>
+                  <a:tcPr anchor="ctr">
+                    <a:solidFill>
+                      <a:srgbClr val="FFFFFF"/>
+                    </a:solidFill>
+                  </a:tcPr>
+                </a:tc>
+                <a:tc>
+                  <a:txBody>
+                    <a:bodyPr/>
+                    <a:lstStyle/>
+                    <a:p>
+                      <a:pPr algn="ctr">
+                        <a:defRPr sz="1200">
+                          <a:solidFill>
+                            <a:srgbClr val="2C3E50"/>
+                          </a:solidFill>
+                          <a:latin typeface="Calibri" panose="020F0502020204030204"/>
+                        </a:defRPr>
+                      </a:pPr>
+                      <a:r>
+                        <a:t>~23×</a:t>
+                      </a:r>
+                    </a:p>
+                  </a:txBody>
+                  <a:tcPr anchor="ctr">
+                    <a:solidFill>
+                      <a:srgbClr val="FFFFFF"/>
+                    </a:solidFill>
+                  </a:tcPr>
+                </a:tc>
+              </a:tr>
+              <a:tr h="457200">
+                <a:tc>
+                  <a:txBody>
+                    <a:bodyPr/>
+                    <a:lstStyle/>
+                    <a:p>
+                      <a:pPr algn="ctr">
+                        <a:defRPr sz="1200">
+                          <a:solidFill>
+                            <a:srgbClr val="2C3E50"/>
+                          </a:solidFill>
+                          <a:latin typeface="Calibri" panose="020F0502020204030204"/>
+                        </a:defRPr>
+                      </a:pPr>
+                      <a:r>
+                        <a:t>PGD unsafe 检出</a:t>
+                      </a:r>
+                    </a:p>
+                  </a:txBody>
+                  <a:tcPr anchor="ctr">
+                    <a:solidFill>
+                      <a:srgbClr val="FFFFFF"/>
+                    </a:solidFill>
+                  </a:tcPr>
+                </a:tc>
+                <a:tc>
+                  <a:txBody>
+                    <a:bodyPr/>
+                    <a:lstStyle/>
+                    <a:p>
+                      <a:pPr algn="ctr">
+                        <a:defRPr sz="1200">
+                          <a:solidFill>
+                            <a:srgbClr val="2C3E50"/>
+                          </a:solidFill>
+                          <a:latin typeface="Calibri" panose="020F0502020204030204"/>
+                        </a:defRPr>
+                      </a:pPr>
+                      <a:r>
+                        <a:t>0%</a:t>
+                      </a:r>
+                    </a:p>
+                  </a:txBody>
+                  <a:tcPr anchor="ctr">
+                    <a:solidFill>
+                      <a:srgbClr val="FFFFFF"/>
+                    </a:solidFill>
+                  </a:tcPr>
+                </a:tc>
+                <a:tc>
+                  <a:txBody>
+                    <a:bodyPr/>
+                    <a:lstStyle/>
+                    <a:p>
+                      <a:pPr algn="ctr">
+                        <a:defRPr sz="1200">
+                          <a:solidFill>
+                            <a:srgbClr val="2C3E50"/>
+                          </a:solidFill>
+                          <a:latin typeface="Calibri" panose="020F0502020204030204"/>
+                        </a:defRPr>
+                      </a:pPr>
+                      <a:r>
+                        <a:t>80%</a:t>
+                      </a:r>
+                    </a:p>
+                  </a:txBody>
+                  <a:tcPr anchor="ctr">
+                    <a:solidFill>
+                      <a:srgbClr val="FFFFFF"/>
+                    </a:solidFill>
+                  </a:tcPr>
+                </a:tc>
+                <a:tc>
+                  <a:txBody>
+                    <a:bodyPr/>
+                    <a:lstStyle/>
+                    <a:p>
+                      <a:pPr algn="ctr">
+                        <a:defRPr sz="1200">
+                          <a:solidFill>
+                            <a:srgbClr val="2C3E50"/>
+                          </a:solidFill>
+                          <a:latin typeface="Calibri" panose="020F0502020204030204"/>
+                        </a:defRPr>
+                      </a:pPr>
+                      <a:r>
+                        <a:t>—</a:t>
+                      </a:r>
+                    </a:p>
+                  </a:txBody>
+                  <a:tcPr anchor="ctr">
+                    <a:solidFill>
+                      <a:srgbClr val="FFFFFF"/>
+                    </a:solidFill>
+                  </a:tcPr>
+                </a:tc>
+              </a:tr>
+            </a:tbl>
+          </a:graphicData>
+        </a:graphic>
+      </p:graphicFrame>
+      <p:sp>
+        <p:nvSpPr>
+          <p:cNvPr id="5" name="Rectangle 4"/>
+          <p:cNvSpPr/>
+          <p:nvPr/>
+        </p:nvSpPr>
+        <p:spPr>
+          <a:xfrm>
+            <a:off x="731520" y="3840480"/>
+            <a:ext cx="10515600" cy="2560320"/>
+          </a:xfrm>
+          <a:prstGeom prst="rect">
+            <a:avLst/>
+          </a:prstGeom>
+          <a:solidFill>
+            <a:srgbClr val="FFFFFF"/>
+          </a:solidFill>
+          <a:ln>
+            <a:noFill/>
+          </a:ln>
+        </p:spPr>
+        <p:style>
+          <a:lnRef idx="1">
+            <a:schemeClr val="accent1"/>
+          </a:lnRef>
+          <a:fillRef idx="3">
+            <a:schemeClr val="accent1"/>
+          </a:fillRef>
+          <a:effectRef idx="2">
+            <a:schemeClr val="accent1"/>
+          </a:effectRef>
+          <a:fontRef idx="minor">
+            <a:schemeClr val="lt1"/>
+          </a:fontRef>
+        </p:style>
+        <p:txBody>
+          <a:bodyPr rtlCol="0" anchor="ctr"/>
+          <a:lstStyle/>
+          <a:p>
+            <a:pPr algn="ctr"/>
+          </a:p>
+        </p:txBody>
+      </p:sp>
+      <p:sp>
+        <p:nvSpPr>
+          <p:cNvPr id="6" name="TextBox 5"/>
+          <p:cNvSpPr txBox="1"/>
+          <p:nvPr/>
+        </p:nvSpPr>
+        <p:spPr>
+          <a:xfrm>
+            <a:off x="1097280" y="4023360"/>
+            <a:ext cx="5486400" cy="365760"/>
+          </a:xfrm>
+          <a:prstGeom prst="rect">
+            <a:avLst/>
+          </a:prstGeom>
+          <a:noFill/>
+        </p:spPr>
+        <p:txBody>
+          <a:bodyPr wrap="square">
+            <a:spAutoFit/>
+          </a:bodyPr>
+          <a:lstStyle/>
+          <a:p>
+            <a:pPr algn="l">
+              <a:defRPr sz="2000" b="1">
+                <a:solidFill>
+                  <a:srgbClr val="2E86AB"/>
+                </a:solidFill>
+                <a:latin typeface="Calibri" panose="020F0502020204030204"/>
+              </a:defRPr>
+            </a:pPr>
+            <a:r>
+              <a:t>难度骤降的 5 因素复合作用</a:t>
+            </a:r>
+          </a:p>
+        </p:txBody>
+      </p:sp>
+      <p:sp>
+        <p:nvSpPr>
+          <p:cNvPr id="7" name="TextBox 6"/>
+          <p:cNvSpPr txBox="1"/>
+          <p:nvPr/>
+        </p:nvSpPr>
+        <p:spPr>
+          <a:xfrm>
+            <a:off x="1097280" y="4480560"/>
+            <a:ext cx="1828800" cy="274320"/>
+          </a:xfrm>
+          <a:prstGeom prst="rect">
+            <a:avLst/>
+          </a:prstGeom>
+          <a:noFill/>
+        </p:spPr>
+        <p:txBody>
+          <a:bodyPr wrap="square">
+            <a:spAutoFit/>
+          </a:bodyPr>
+          <a:lstStyle/>
+          <a:p>
+            <a:pPr algn="l">
+              <a:defRPr sz="1200" b="1">
+                <a:solidFill>
+                  <a:srgbClr val="1A3A5C"/>
+                </a:solidFill>
+                <a:latin typeface="Calibri" panose="020F0502020204030204"/>
+              </a:defRPr>
+            </a:pPr>
+            <a:r>
+              <a:t>  1. 输入维度</a:t>
+            </a:r>
+          </a:p>
+        </p:txBody>
+      </p:sp>
+      <p:sp>
+        <p:nvSpPr>
+          <p:cNvPr id="8" name="TextBox 7"/>
+          <p:cNvSpPr txBox="1"/>
+          <p:nvPr/>
+        </p:nvSpPr>
+        <p:spPr>
+          <a:xfrm>
+            <a:off x="2926080" y="4480560"/>
+            <a:ext cx="7772400" cy="274320"/>
+          </a:xfrm>
+          <a:prstGeom prst="rect">
+            <a:avLst/>
+          </a:prstGeom>
+          <a:noFill/>
+        </p:spPr>
+        <p:txBody>
+          <a:bodyPr wrap="square">
+            <a:spAutoFit/>
+          </a:bodyPr>
+          <a:lstStyle/>
+          <a:p>
+            <a:pPr algn="l">
+              <a:defRPr sz="1200" b="0">
+                <a:solidFill>
+                  <a:srgbClr val="2C3E50"/>
+                </a:solidFill>
+                <a:latin typeface="Calibri" panose="020F0502020204030204"/>
+              </a:defRPr>
+            </a:pPr>
+            <a:r>
+              <a:t>784 → 3072 (×3.9)</a:t>
+            </a:r>
+          </a:p>
+        </p:txBody>
+      </p:sp>
+      <p:sp>
+        <p:nvSpPr>
+          <p:cNvPr id="9" name="TextBox 8"/>
+          <p:cNvSpPr txBox="1"/>
+          <p:nvPr/>
+        </p:nvSpPr>
+        <p:spPr>
+          <a:xfrm>
+            <a:off x="1097280" y="4864608"/>
+            <a:ext cx="1828800" cy="274320"/>
+          </a:xfrm>
+          <a:prstGeom prst="rect">
+            <a:avLst/>
+          </a:prstGeom>
+          <a:noFill/>
+        </p:spPr>
+        <p:txBody>
+          <a:bodyPr wrap="square">
+            <a:spAutoFit/>
+          </a:bodyPr>
+          <a:lstStyle/>
+          <a:p>
+            <a:pPr algn="l">
+              <a:defRPr sz="1200" b="1">
+                <a:solidFill>
+                  <a:srgbClr val="1A3A5C"/>
+                </a:solidFill>
+                <a:latin typeface="Calibri" panose="020F0502020204030204"/>
+              </a:defRPr>
+            </a:pPr>
+            <a:r>
+              <a:t>  2. RGB 通道</a:t>
+            </a:r>
+          </a:p>
+        </p:txBody>
+      </p:sp>
+      <p:sp>
+        <p:nvSpPr>
+          <p:cNvPr id="10" name="TextBox 9"/>
+          <p:cNvSpPr txBox="1"/>
+          <p:nvPr/>
+        </p:nvSpPr>
+        <p:spPr>
+          <a:xfrm>
+            <a:off x="2926080" y="4864608"/>
+            <a:ext cx="7772400" cy="274320"/>
+          </a:xfrm>
+          <a:prstGeom prst="rect">
+            <a:avLst/>
+          </a:prstGeom>
+          <a:noFill/>
+        </p:spPr>
+        <p:txBody>
+          <a:bodyPr wrap="square">
+            <a:spAutoFit/>
+          </a:bodyPr>
+          <a:lstStyle/>
+          <a:p>
+            <a:pPr algn="l">
+              <a:defRPr sz="1200" b="0">
+                <a:solidFill>
+                  <a:srgbClr val="2C3E50"/>
+                </a:solidFill>
+                <a:latin typeface="Calibri" panose="020F0502020204030204"/>
+              </a:defRPr>
+            </a:pPr>
+            <a:r>
+              <a:t>灰度 → 3 通道扰动组合爆炸</a:t>
+            </a:r>
+          </a:p>
+        </p:txBody>
+      </p:sp>
+      <p:sp>
+        <p:nvSpPr>
+          <p:cNvPr id="11" name="TextBox 10"/>
+          <p:cNvSpPr txBox="1"/>
+          <p:nvPr/>
+        </p:nvSpPr>
+        <p:spPr>
+          <a:xfrm>
+            <a:off x="1097280" y="5248656"/>
+            <a:ext cx="1828800" cy="274320"/>
+          </a:xfrm>
+          <a:prstGeom prst="rect">
+            <a:avLst/>
+          </a:prstGeom>
+          <a:noFill/>
+        </p:spPr>
+        <p:txBody>
+          <a:bodyPr wrap="square">
+            <a:spAutoFit/>
+          </a:bodyPr>
+          <a:lstStyle/>
+          <a:p>
+            <a:pPr algn="l">
+              <a:defRPr sz="1200" b="1">
+                <a:solidFill>
+                  <a:srgbClr val="1A3A5C"/>
+                </a:solidFill>
+                <a:latin typeface="Calibri" panose="020F0502020204030204"/>
+              </a:defRPr>
+            </a:pPr>
+            <a:r>
+              <a:t>  3. Conv 松弛放大</a:t>
+            </a:r>
+          </a:p>
+        </p:txBody>
+      </p:sp>
+      <p:sp>
+        <p:nvSpPr>
+          <p:cNvPr id="12" name="TextBox 11"/>
+          <p:cNvSpPr txBox="1"/>
+          <p:nvPr/>
+        </p:nvSpPr>
+        <p:spPr>
+          <a:xfrm>
+            <a:off x="2926080" y="5248656"/>
+            <a:ext cx="7772400" cy="274320"/>
+          </a:xfrm>
+          <a:prstGeom prst="rect">
+            <a:avLst/>
+          </a:prstGeom>
+          <a:noFill/>
+        </p:spPr>
+        <p:txBody>
+          <a:bodyPr wrap="square">
+            <a:spAutoFit/>
+          </a:bodyPr>
+          <a:lstStyle/>
+          <a:p>
+            <a:pPr algn="l">
+              <a:defRPr sz="1200" b="0">
+                <a:solidFill>
+                  <a:srgbClr val="2C3E50"/>
+                </a:solidFill>
+                <a:latin typeface="Calibri" panose="020F0502020204030204"/>
+              </a:defRPr>
+            </a:pPr>
+            <a:r>
+              <a:t>共享感受野使不确定性相互放大</a:t>
+            </a:r>
+          </a:p>
+        </p:txBody>
+      </p:sp>
+      <p:sp>
+        <p:nvSpPr>
+          <p:cNvPr id="13" name="TextBox 12"/>
+          <p:cNvSpPr txBox="1"/>
+          <p:nvPr/>
+        </p:nvSpPr>
+        <p:spPr>
+          <a:xfrm>
+            <a:off x="1097280" y="5632704"/>
+            <a:ext cx="1828800" cy="274320"/>
+          </a:xfrm>
+          <a:prstGeom prst="rect">
+            <a:avLst/>
+          </a:prstGeom>
+          <a:noFill/>
+        </p:spPr>
+        <p:txBody>
+          <a:bodyPr wrap="square">
+            <a:spAutoFit/>
+          </a:bodyPr>
+          <a:lstStyle/>
+          <a:p>
+            <a:pPr algn="l">
+              <a:defRPr sz="1200" b="1">
+                <a:solidFill>
+                  <a:srgbClr val="1A3A5C"/>
+                </a:solidFill>
+                <a:latin typeface="Calibri" panose="020F0502020204030204"/>
+              </a:defRPr>
+            </a:pPr>
+            <a:r>
+              <a:t>  4. ReLU 层数</a:t>
+            </a:r>
+          </a:p>
+        </p:txBody>
+      </p:sp>
+      <p:sp>
+        <p:nvSpPr>
+          <p:cNvPr id="14" name="TextBox 13"/>
+          <p:cNvSpPr txBox="1"/>
+          <p:nvPr/>
+        </p:nvSpPr>
+        <p:spPr>
+          <a:xfrm>
+            <a:off x="2926080" y="5632704"/>
+            <a:ext cx="7772400" cy="274320"/>
+          </a:xfrm>
+          <a:prstGeom prst="rect">
+            <a:avLst/>
+          </a:prstGeom>
+          <a:noFill/>
+        </p:spPr>
+        <p:txBody>
+          <a:bodyPr wrap="square">
+            <a:spAutoFit/>
+          </a:bodyPr>
+          <a:lstStyle/>
+          <a:p>
+            <a:pPr algn="l">
+              <a:defRPr sz="1200" b="0">
+                <a:solidFill>
+                  <a:srgbClr val="2C3E50"/>
+                </a:solidFill>
+                <a:latin typeface="Calibri" panose="020F0502020204030204"/>
+              </a:defRPr>
+            </a:pPr>
+            <a:r>
+              <a:t>2 → 4，累积误差非线性增长</a:t>
+            </a:r>
+          </a:p>
+        </p:txBody>
+      </p:sp>
+      <p:sp>
+        <p:nvSpPr>
+          <p:cNvPr id="15" name="TextBox 14"/>
+          <p:cNvSpPr txBox="1"/>
+          <p:nvPr/>
+        </p:nvSpPr>
+        <p:spPr>
+          <a:xfrm>
+            <a:off x="1097280" y="6016752"/>
+            <a:ext cx="1828800" cy="274320"/>
+          </a:xfrm>
+          <a:prstGeom prst="rect">
+            <a:avLst/>
+          </a:prstGeom>
+          <a:noFill/>
+        </p:spPr>
+        <p:txBody>
+          <a:bodyPr wrap="square">
+            <a:spAutoFit/>
+          </a:bodyPr>
+          <a:lstStyle/>
+          <a:p>
+            <a:pPr algn="l">
+              <a:defRPr sz="1200" b="1">
+                <a:solidFill>
+                  <a:srgbClr val="1A3A5C"/>
+                </a:solidFill>
+                <a:latin typeface="Calibri" panose="020F0502020204030204"/>
+              </a:defRPr>
+            </a:pPr>
+            <a:r>
+              <a:t>  5. 数据复杂度</a:t>
+            </a:r>
+          </a:p>
+        </p:txBody>
+      </p:sp>
+      <p:sp>
+        <p:nvSpPr>
+          <p:cNvPr id="16" name="TextBox 15"/>
+          <p:cNvSpPr txBox="1"/>
+          <p:nvPr/>
+        </p:nvSpPr>
+        <p:spPr>
+          <a:xfrm>
+            <a:off x="2926080" y="6016752"/>
+            <a:ext cx="7772400" cy="274320"/>
+          </a:xfrm>
+          <a:prstGeom prst="rect">
+            <a:avLst/>
+          </a:prstGeom>
+          <a:noFill/>
+        </p:spPr>
+        <p:txBody>
+          <a:bodyPr wrap="square">
+            <a:spAutoFit/>
+          </a:bodyPr>
+          <a:lstStyle/>
+          <a:p>
+            <a:pPr algn="l">
+              <a:defRPr sz="1200" b="0">
+                <a:solidFill>
+                  <a:srgbClr val="2C3E50"/>
+                </a:solidFill>
+                <a:latin typeface="Calibri" panose="020F0502020204030204"/>
+              </a:defRPr>
+            </a:pPr>
+            <a:r>
+              <a:t>手写数字 → 自然图像高纹理</a:t>
+            </a:r>
+          </a:p>
+        </p:txBody>
+      </p:sp>
+      <p:sp>
+        <p:nvSpPr>
+          <p:cNvPr id="17" name="TextBox 16"/>
+          <p:cNvSpPr txBox="1"/>
+          <p:nvPr/>
+        </p:nvSpPr>
+        <p:spPr>
+          <a:xfrm>
+            <a:off x="11094415" y="6400800"/>
+            <a:ext cx="914400" cy="365760"/>
+          </a:xfrm>
+          <a:prstGeom prst="rect">
+            <a:avLst/>
+          </a:prstGeom>
+          <a:noFill/>
+        </p:spPr>
+        <p:txBody>
+          <a:bodyPr wrap="square">
+            <a:spAutoFit/>
+          </a:bodyPr>
+          <a:lstStyle/>
+          <a:p>
+            <a:pPr algn="r">
+              <a:defRPr sz="1000" b="0">
+                <a:solidFill>
+                  <a:srgbClr val="7F8C9A"/>
+                </a:solidFill>
+                <a:latin typeface="Calibri" panose="020F0502020204030204"/>
+              </a:defRPr>
+            </a:pPr>
+            <a:r>
+              <a:t>9/18</a:t>
+            </a:r>
+          </a:p>
+        </p:txBody>
+      </p:sp>
+    </p:spTree>
+  </p:cSld>
+  <p:clrMapOvr>
+    <a:masterClrMapping/>
+  </p:clrMapOvr>
+</p:sld>
+</file>
+
+<file path=ppt/slides/slide11.xml><?xml version="1.0" encoding="utf-8"?>
+<p:sld xmlns:a="http://schemas.openxmlformats.org/drawingml/2006/main" xmlns:r="http://schemas.openxmlformats.org/officeDocument/2006/relationships" xmlns:p="http://schemas.openxmlformats.org/presentationml/2006/main">
+  <p:cSld>
+    <p:bg>
+      <p:bgPr>
+        <a:solidFill>
+          <a:srgbClr val="F5F7FA"/>
+        </a:solidFill>
+        <a:effectLst/>
+      </p:bgPr>
+    </p:bg>
+    <p:spTree>
+      <p:nvGrpSpPr>
+        <p:cNvPr id="1" name=""/>
+        <p:cNvGrpSpPr/>
+        <p:nvPr/>
+      </p:nvGrpSpPr>
+      <p:grpSpPr/>
+      <p:sp>
+        <p:nvSpPr>
+          <p:cNvPr id="2" name="Rectangle 1"/>
+          <p:cNvSpPr/>
+          <p:nvPr/>
+        </p:nvSpPr>
+        <p:spPr>
+          <a:xfrm>
+            <a:off x="0" y="0"/>
+            <a:ext cx="12191695" cy="914400"/>
+          </a:xfrm>
+          <a:prstGeom prst="rect">
+            <a:avLst/>
+          </a:prstGeom>
+          <a:solidFill>
+            <a:srgbClr val="1A3A5C"/>
+          </a:solidFill>
+          <a:ln>
+            <a:noFill/>
+          </a:ln>
+        </p:spPr>
+        <p:style>
+          <a:lnRef idx="1">
+            <a:schemeClr val="accent1"/>
+          </a:lnRef>
+          <a:fillRef idx="3">
+            <a:schemeClr val="accent1"/>
+          </a:fillRef>
+          <a:effectRef idx="2">
+            <a:schemeClr val="accent1"/>
+          </a:effectRef>
+          <a:fontRef idx="minor">
+            <a:schemeClr val="lt1"/>
+          </a:fontRef>
+        </p:style>
+        <p:txBody>
+          <a:bodyPr rtlCol="0" anchor="ctr"/>
+          <a:lstStyle/>
+          <a:p>
+            <a:pPr algn="ctr"/>
+          </a:p>
+        </p:txBody>
+      </p:sp>
+      <p:sp>
+        <p:nvSpPr>
+          <p:cNvPr id="3" name="TextBox 2"/>
+          <p:cNvSpPr txBox="1"/>
+          <p:nvPr/>
+        </p:nvSpPr>
+        <p:spPr>
+          <a:xfrm>
+            <a:off x="731520" y="137160"/>
+            <a:ext cx="9144000" cy="640080"/>
+          </a:xfrm>
+          <a:prstGeom prst="rect">
+            <a:avLst/>
+          </a:prstGeom>
+          <a:noFill/>
+        </p:spPr>
+        <p:txBody>
+          <a:bodyPr wrap="square">
+            <a:spAutoFit/>
+          </a:bodyPr>
+          <a:lstStyle/>
+          <a:p>
+            <a:pPr algn="l">
+              <a:defRPr sz="2800" b="1">
+                <a:solidFill>
+                  <a:srgbClr val="FFFFFF"/>
+                </a:solidFill>
+                <a:latin typeface="Calibri" panose="020F0502020204030204"/>
               </a:defRPr>
             </a:pPr>
             <a:r>
@@ -3468,7 +4560,7 @@
                 <a:solidFill>
                   <a:srgbClr val="2E86AB"/>
                 </a:solidFill>
-                <a:latin typeface="Calibri"/>
+                <a:latin typeface="Calibri" panose="020F0502020204030204"/>
               </a:defRPr>
             </a:pPr>
             <a:r>
@@ -3513,7 +4605,7 @@
                           <a:solidFill>
                             <a:srgbClr val="FFFFFF"/>
                           </a:solidFill>
-                          <a:latin typeface="Calibri"/>
+                          <a:latin typeface="Calibri" panose="020F0502020204030204"/>
                         </a:defRPr>
                       </a:pPr>
                       <a:r>
@@ -3537,7 +4629,7 @@
                           <a:solidFill>
                             <a:srgbClr val="FFFFFF"/>
                           </a:solidFill>
-                          <a:latin typeface="Calibri"/>
+                          <a:latin typeface="Calibri" panose="020F0502020204030204"/>
                         </a:defRPr>
                       </a:pPr>
                       <a:r>
@@ -3561,7 +4653,7 @@
                           <a:solidFill>
                             <a:srgbClr val="FFFFFF"/>
                           </a:solidFill>
-                          <a:latin typeface="Calibri"/>
+                          <a:latin typeface="Calibri" panose="020F0502020204030204"/>
                         </a:defRPr>
                       </a:pPr>
                       <a:r>
@@ -3585,7 +4677,7 @@
                           <a:solidFill>
                             <a:srgbClr val="FFFFFF"/>
                           </a:solidFill>
-                          <a:latin typeface="Calibri"/>
+                          <a:latin typeface="Calibri" panose="020F0502020204030204"/>
                         </a:defRPr>
                       </a:pPr>
                       <a:r>
@@ -3609,7 +4701,7 @@
                           <a:solidFill>
                             <a:srgbClr val="FFFFFF"/>
                           </a:solidFill>
-                          <a:latin typeface="Calibri"/>
+                          <a:latin typeface="Calibri" panose="020F0502020204030204"/>
                         </a:defRPr>
                       </a:pPr>
                       <a:r>
@@ -3635,7 +4727,7 @@
                           <a:solidFill>
                             <a:srgbClr val="2C3E50"/>
                           </a:solidFill>
-                          <a:latin typeface="Calibri"/>
+                          <a:latin typeface="Calibri" panose="020F0502020204030204"/>
                         </a:defRPr>
                       </a:pPr>
                       <a:r>
@@ -3659,7 +4751,7 @@
                           <a:solidFill>
                             <a:srgbClr val="2C3E50"/>
                           </a:solidFill>
-                          <a:latin typeface="Calibri"/>
+                          <a:latin typeface="Calibri" panose="020F0502020204030204"/>
                         </a:defRPr>
                       </a:pPr>
                       <a:r>
@@ -3683,7 +4775,7 @@
                           <a:solidFill>
                             <a:srgbClr val="2C3E50"/>
                           </a:solidFill>
-                          <a:latin typeface="Calibri"/>
+                          <a:latin typeface="Calibri" panose="020F0502020204030204"/>
                         </a:defRPr>
                       </a:pPr>
                       <a:r>
@@ -3707,7 +4799,7 @@
                           <a:solidFill>
                             <a:srgbClr val="2C3E50"/>
                           </a:solidFill>
-                          <a:latin typeface="Calibri"/>
+                          <a:latin typeface="Calibri" panose="020F0502020204030204"/>
                         </a:defRPr>
                       </a:pPr>
                       <a:r>
@@ -3731,7 +4823,7 @@
                           <a:solidFill>
                             <a:srgbClr val="2C3E50"/>
                           </a:solidFill>
-                          <a:latin typeface="Calibri"/>
+                          <a:latin typeface="Calibri" panose="020F0502020204030204"/>
                         </a:defRPr>
                       </a:pPr>
                       <a:r>
@@ -3757,7 +4849,7 @@
                           <a:solidFill>
                             <a:srgbClr val="2C3E50"/>
                           </a:solidFill>
-                          <a:latin typeface="Calibri"/>
+                          <a:latin typeface="Calibri" panose="020F0502020204030204"/>
                         </a:defRPr>
                       </a:pPr>
                       <a:r>
@@ -3781,7 +4873,7 @@
                           <a:solidFill>
                             <a:srgbClr val="2C3E50"/>
                           </a:solidFill>
-                          <a:latin typeface="Calibri"/>
+                          <a:latin typeface="Calibri" panose="020F0502020204030204"/>
                         </a:defRPr>
                       </a:pPr>
                       <a:r>
@@ -3805,7 +4897,7 @@
                           <a:solidFill>
                             <a:srgbClr val="2C3E50"/>
                           </a:solidFill>
-                          <a:latin typeface="Calibri"/>
+                          <a:latin typeface="Calibri" panose="020F0502020204030204"/>
                         </a:defRPr>
                       </a:pPr>
                       <a:r>
@@ -3829,7 +4921,7 @@
                           <a:solidFill>
                             <a:srgbClr val="2C3E50"/>
                           </a:solidFill>
-                          <a:latin typeface="Calibri"/>
+                          <a:latin typeface="Calibri" panose="020F0502020204030204"/>
                         </a:defRPr>
                       </a:pPr>
                       <a:r>
@@ -3853,7 +4945,7 @@
                           <a:solidFill>
                             <a:srgbClr val="2C3E50"/>
                           </a:solidFill>
-                          <a:latin typeface="Calibri"/>
+                          <a:latin typeface="Calibri" panose="020F0502020204030204"/>
                         </a:defRPr>
                       </a:pPr>
                       <a:r>
@@ -3879,7 +4971,7 @@
                           <a:solidFill>
                             <a:srgbClr val="2C3E50"/>
                           </a:solidFill>
-                          <a:latin typeface="Calibri"/>
+                          <a:latin typeface="Calibri" panose="020F0502020204030204"/>
                         </a:defRPr>
                       </a:pPr>
                       <a:r>
@@ -3903,7 +4995,7 @@
                           <a:solidFill>
                             <a:srgbClr val="2C3E50"/>
                           </a:solidFill>
-                          <a:latin typeface="Calibri"/>
+                          <a:latin typeface="Calibri" panose="020F0502020204030204"/>
                         </a:defRPr>
                       </a:pPr>
                       <a:r>
@@ -3927,7 +5019,7 @@
                           <a:solidFill>
                             <a:srgbClr val="2C3E50"/>
                           </a:solidFill>
-                          <a:latin typeface="Calibri"/>
+                          <a:latin typeface="Calibri" panose="020F0502020204030204"/>
                         </a:defRPr>
                       </a:pPr>
                       <a:r>
@@ -3951,7 +5043,7 @@
                           <a:solidFill>
                             <a:srgbClr val="2C3E50"/>
                           </a:solidFill>
-                          <a:latin typeface="Calibri"/>
+                          <a:latin typeface="Calibri" panose="020F0502020204030204"/>
                         </a:defRPr>
                       </a:pPr>
                       <a:r>
@@ -3975,7 +5067,7 @@
                           <a:solidFill>
                             <a:srgbClr val="2C3E50"/>
                           </a:solidFill>
-                          <a:latin typeface="Calibri"/>
+                          <a:latin typeface="Calibri" panose="020F0502020204030204"/>
                         </a:defRPr>
                       </a:pPr>
                       <a:r>
@@ -4064,7 +5156,7 @@
                 <a:solidFill>
                   <a:srgbClr val="2E86AB"/>
                 </a:solidFill>
-                <a:latin typeface="Calibri"/>
+                <a:latin typeface="Calibri" panose="020F0502020204030204"/>
               </a:defRPr>
             </a:pPr>
             <a:r>
@@ -4100,7 +5192,7 @@
                 <a:solidFill>
                   <a:srgbClr val="2C3E50"/>
                 </a:solidFill>
-                <a:latin typeface="Calibri"/>
+                <a:latin typeface="Calibri" panose="020F0502020204030204"/>
               </a:defRPr>
             </a:pPr>
           </a:p>
@@ -4113,7 +5205,7 @@
                 <a:solidFill>
                   <a:srgbClr val="2C3E50"/>
                 </a:solidFill>
-                <a:latin typeface="Calibri"/>
+                <a:latin typeface="Calibri" panose="020F0502020204030204"/>
               </a:defRPr>
             </a:pPr>
             <a:r>
@@ -4129,7 +5221,7 @@
                 <a:solidFill>
                   <a:srgbClr val="7F8C9A"/>
                 </a:solidFill>
-                <a:latin typeface="Calibri"/>
+                <a:latin typeface="Calibri" panose="020F0502020204030204"/>
               </a:defRPr>
             </a:pPr>
             <a:r>
@@ -4145,7 +5237,7 @@
                 <a:solidFill>
                   <a:srgbClr val="7F8C9A"/>
                 </a:solidFill>
-                <a:latin typeface="Calibri"/>
+                <a:latin typeface="Calibri" panose="020F0502020204030204"/>
               </a:defRPr>
             </a:pPr>
             <a:r>
@@ -4161,7 +5253,7 @@
                 <a:solidFill>
                   <a:srgbClr val="7F8C9A"/>
                 </a:solidFill>
-                <a:latin typeface="Calibri"/>
+                <a:latin typeface="Calibri" panose="020F0502020204030204"/>
               </a:defRPr>
             </a:pPr>
             <a:r>
@@ -4177,7 +5269,7 @@
                 <a:solidFill>
                   <a:srgbClr val="2C3E50"/>
                 </a:solidFill>
-                <a:latin typeface="Calibri"/>
+                <a:latin typeface="Calibri" panose="020F0502020204030204"/>
               </a:defRPr>
             </a:pPr>
           </a:p>
@@ -4190,7 +5282,7 @@
                 <a:solidFill>
                   <a:srgbClr val="2C3E50"/>
                 </a:solidFill>
-                <a:latin typeface="Calibri"/>
+                <a:latin typeface="Calibri" panose="020F0502020204030204"/>
               </a:defRPr>
             </a:pPr>
             <a:r>
@@ -4206,7 +5298,7 @@
                 <a:solidFill>
                   <a:srgbClr val="7F8C9A"/>
                 </a:solidFill>
-                <a:latin typeface="Calibri"/>
+                <a:latin typeface="Calibri" panose="020F0502020204030204"/>
               </a:defRPr>
             </a:pPr>
             <a:r>
@@ -4222,7 +5314,7 @@
                 <a:solidFill>
                   <a:srgbClr val="7F8C9A"/>
                 </a:solidFill>
-                <a:latin typeface="Calibri"/>
+                <a:latin typeface="Calibri" panose="020F0502020204030204"/>
               </a:defRPr>
             </a:pPr>
             <a:r>
@@ -4238,7 +5330,7 @@
                 <a:solidFill>
                   <a:srgbClr val="7F8C9A"/>
                 </a:solidFill>
-                <a:latin typeface="Calibri"/>
+                <a:latin typeface="Calibri" panose="020F0502020204030204"/>
               </a:defRPr>
             </a:pPr>
             <a:r>
@@ -4317,7 +5409,7 @@
                 <a:solidFill>
                   <a:srgbClr val="27AE60"/>
                 </a:solidFill>
-                <a:latin typeface="Calibri"/>
+                <a:latin typeface="Calibri" panose="020F0502020204030204"/>
               </a:defRPr>
             </a:pPr>
             <a:r>
@@ -4353,7 +5445,7 @@
                 <a:solidFill>
                   <a:srgbClr val="2C3E50"/>
                 </a:solidFill>
-                <a:latin typeface="Calibri"/>
+                <a:latin typeface="Calibri" panose="020F0502020204030204"/>
               </a:defRPr>
             </a:pPr>
           </a:p>
@@ -4366,7 +5458,7 @@
                 <a:solidFill>
                   <a:srgbClr val="2C3E50"/>
                 </a:solidFill>
-                <a:latin typeface="Calibri"/>
+                <a:latin typeface="Calibri" panose="020F0502020204030204"/>
               </a:defRPr>
             </a:pPr>
             <a:r>
@@ -4382,7 +5474,7 @@
                 <a:solidFill>
                   <a:srgbClr val="7F8C9A"/>
                 </a:solidFill>
-                <a:latin typeface="Calibri"/>
+                <a:latin typeface="Calibri" panose="020F0502020204030204"/>
               </a:defRPr>
             </a:pPr>
             <a:r>
@@ -4398,7 +5490,7 @@
                 <a:solidFill>
                   <a:srgbClr val="7F8C9A"/>
                 </a:solidFill>
-                <a:latin typeface="Calibri"/>
+                <a:latin typeface="Calibri" panose="020F0502020204030204"/>
               </a:defRPr>
             </a:pPr>
             <a:r>
@@ -4414,7 +5506,7 @@
                 <a:solidFill>
                   <a:srgbClr val="7F8C9A"/>
                 </a:solidFill>
-                <a:latin typeface="Calibri"/>
+                <a:latin typeface="Calibri" panose="020F0502020204030204"/>
               </a:defRPr>
             </a:pPr>
             <a:r>
@@ -4430,7 +5522,7 @@
                 <a:solidFill>
                   <a:srgbClr val="2C3E50"/>
                 </a:solidFill>
-                <a:latin typeface="Calibri"/>
+                <a:latin typeface="Calibri" panose="020F0502020204030204"/>
               </a:defRPr>
             </a:pPr>
           </a:p>
@@ -4443,7 +5535,7 @@
                 <a:solidFill>
                   <a:srgbClr val="2C3E50"/>
                 </a:solidFill>
-                <a:latin typeface="Calibri"/>
+                <a:latin typeface="Calibri" panose="020F0502020204030204"/>
               </a:defRPr>
             </a:pPr>
             <a:r>
@@ -4459,7 +5551,7 @@
                 <a:solidFill>
                   <a:srgbClr val="2C3E50"/>
                 </a:solidFill>
-                <a:latin typeface="Calibri"/>
+                <a:latin typeface="Calibri" panose="020F0502020204030204"/>
               </a:defRPr>
             </a:pPr>
             <a:r>
@@ -4495,7 +5587,7 @@
                 <a:solidFill>
                   <a:srgbClr val="7F8C9A"/>
                 </a:solidFill>
-                <a:latin typeface="Calibri"/>
+                <a:latin typeface="Calibri" panose="020F0502020204030204"/>
               </a:defRPr>
             </a:pPr>
             <a:r>
@@ -4512,8 +5604,8 @@
 </p:sld>
 </file>
 
-<file path=ppt/slides/slide11.xml><?xml version="1.0" encoding="utf-8"?>
-<p:sld xmlns:a="http://schemas.openxmlformats.org/drawingml/2006/main" xmlns:p="http://schemas.openxmlformats.org/presentationml/2006/main" xmlns:r="http://schemas.openxmlformats.org/officeDocument/2006/relationships">
+<file path=ppt/slides/slide12.xml><?xml version="1.0" encoding="utf-8"?>
+<p:sld xmlns:a="http://schemas.openxmlformats.org/drawingml/2006/main" xmlns:r="http://schemas.openxmlformats.org/officeDocument/2006/relationships" xmlns:p="http://schemas.openxmlformats.org/presentationml/2006/main">
   <p:cSld>
     <p:bg>
       <p:bgPr>
@@ -4600,7 +5692,7 @@
                 <a:solidFill>
                   <a:srgbClr val="FFFFFF"/>
                 </a:solidFill>
-                <a:latin typeface="Calibri"/>
+                <a:latin typeface="Calibri" panose="020F0502020204030204"/>
               </a:defRPr>
             </a:pPr>
             <a:r>
@@ -4679,7 +5771,7 @@
                 <a:solidFill>
                   <a:srgbClr val="FFFFFF"/>
                 </a:solidFill>
-                <a:latin typeface="Calibri"/>
+                <a:latin typeface="Calibri" panose="020F0502020204030204"/>
               </a:defRPr>
             </a:pPr>
             <a:r>
@@ -4758,7 +5850,7 @@
                 <a:solidFill>
                   <a:srgbClr val="FFFFFF"/>
                 </a:solidFill>
-                <a:latin typeface="Calibri"/>
+                <a:latin typeface="Calibri" panose="020F0502020204030204"/>
               </a:defRPr>
             </a:pPr>
             <a:r>
@@ -4880,7 +5972,7 @@
                 <a:solidFill>
                   <a:srgbClr val="2C3E50"/>
                 </a:solidFill>
-                <a:latin typeface="Calibri"/>
+                <a:latin typeface="Calibri" panose="020F0502020204030204"/>
               </a:defRPr>
             </a:pPr>
             <a:r>
@@ -4916,7 +6008,7 @@
                 <a:solidFill>
                   <a:srgbClr val="7F8C9A"/>
                 </a:solidFill>
-                <a:latin typeface="Calibri"/>
+                <a:latin typeface="Calibri" panose="020F0502020204030204"/>
               </a:defRPr>
             </a:pPr>
             <a:r>
@@ -4952,7 +6044,7 @@
                 <a:solidFill>
                   <a:srgbClr val="27AE60"/>
                 </a:solidFill>
-                <a:latin typeface="Calibri"/>
+                <a:latin typeface="Calibri" panose="020F0502020204030204"/>
               </a:defRPr>
             </a:pPr>
             <a:r>
@@ -5074,7 +6166,7 @@
                 <a:solidFill>
                   <a:srgbClr val="2C3E50"/>
                 </a:solidFill>
-                <a:latin typeface="Calibri"/>
+                <a:latin typeface="Calibri" panose="020F0502020204030204"/>
               </a:defRPr>
             </a:pPr>
             <a:r>
@@ -5110,7 +6202,7 @@
                 <a:solidFill>
                   <a:srgbClr val="7F8C9A"/>
                 </a:solidFill>
-                <a:latin typeface="Calibri"/>
+                <a:latin typeface="Calibri" panose="020F0502020204030204"/>
               </a:defRPr>
             </a:pPr>
             <a:r>
@@ -5146,7 +6238,7 @@
                 <a:solidFill>
                   <a:srgbClr val="27AE60"/>
                 </a:solidFill>
-                <a:latin typeface="Calibri"/>
+                <a:latin typeface="Calibri" panose="020F0502020204030204"/>
               </a:defRPr>
             </a:pPr>
             <a:r>
@@ -5268,7 +6360,7 @@
                 <a:solidFill>
                   <a:srgbClr val="2C3E50"/>
                 </a:solidFill>
-                <a:latin typeface="Calibri"/>
+                <a:latin typeface="Calibri" panose="020F0502020204030204"/>
               </a:defRPr>
             </a:pPr>
             <a:r>
@@ -5304,7 +6396,7 @@
                 <a:solidFill>
                   <a:srgbClr val="7F8C9A"/>
                 </a:solidFill>
-                <a:latin typeface="Calibri"/>
+                <a:latin typeface="Calibri" panose="020F0502020204030204"/>
               </a:defRPr>
             </a:pPr>
             <a:r>
@@ -5340,7 +6432,7 @@
                 <a:solidFill>
                   <a:srgbClr val="27AE60"/>
                 </a:solidFill>
-                <a:latin typeface="Calibri"/>
+                <a:latin typeface="Calibri" panose="020F0502020204030204"/>
               </a:defRPr>
             </a:pPr>
             <a:r>
@@ -5462,7 +6554,7 @@
                 <a:solidFill>
                   <a:srgbClr val="2C3E50"/>
                 </a:solidFill>
-                <a:latin typeface="Calibri"/>
+                <a:latin typeface="Calibri" panose="020F0502020204030204"/>
               </a:defRPr>
             </a:pPr>
             <a:r>
@@ -5498,7 +6590,7 @@
                 <a:solidFill>
                   <a:srgbClr val="7F8C9A"/>
                 </a:solidFill>
-                <a:latin typeface="Calibri"/>
+                <a:latin typeface="Calibri" panose="020F0502020204030204"/>
               </a:defRPr>
             </a:pPr>
             <a:r>
@@ -5534,7 +6626,7 @@
                 <a:solidFill>
                   <a:srgbClr val="27AE60"/>
                 </a:solidFill>
-                <a:latin typeface="Calibri"/>
+                <a:latin typeface="Calibri" panose="020F0502020204030204"/>
               </a:defRPr>
             </a:pPr>
             <a:r>
@@ -5656,7 +6748,7 @@
                 <a:solidFill>
                   <a:srgbClr val="2C3E50"/>
                 </a:solidFill>
-                <a:latin typeface="Calibri"/>
+                <a:latin typeface="Calibri" panose="020F0502020204030204"/>
               </a:defRPr>
             </a:pPr>
             <a:r>
@@ -5692,7 +6784,7 @@
                 <a:solidFill>
                   <a:srgbClr val="7F8C9A"/>
                 </a:solidFill>
-                <a:latin typeface="Calibri"/>
+                <a:latin typeface="Calibri" panose="020F0502020204030204"/>
               </a:defRPr>
             </a:pPr>
             <a:r>
@@ -5728,7 +6820,7 @@
                 <a:solidFill>
                   <a:srgbClr val="27AE60"/>
                 </a:solidFill>
-                <a:latin typeface="Calibri"/>
+                <a:latin typeface="Calibri" panose="020F0502020204030204"/>
               </a:defRPr>
             </a:pPr>
             <a:r>
@@ -5807,7 +6899,7 @@
                 <a:solidFill>
                   <a:srgbClr val="7F8C9A"/>
                 </a:solidFill>
-                <a:latin typeface="Calibri"/>
+                <a:latin typeface="Calibri" panose="020F0502020204030204"/>
               </a:defRPr>
             </a:pPr>
             <a:r>
@@ -5843,7 +6935,7 @@
                 <a:solidFill>
                   <a:srgbClr val="7F8C9A"/>
                 </a:solidFill>
-                <a:latin typeface="Calibri"/>
+                <a:latin typeface="Calibri" panose="020F0502020204030204"/>
               </a:defRPr>
             </a:pPr>
             <a:r>
@@ -5860,8 +6952,8 @@
 </p:sld>
 </file>
 
-<file path=ppt/slides/slide12.xml><?xml version="1.0" encoding="utf-8"?>
-<p:sld xmlns:a="http://schemas.openxmlformats.org/drawingml/2006/main" xmlns:p="http://schemas.openxmlformats.org/presentationml/2006/main" xmlns:r="http://schemas.openxmlformats.org/officeDocument/2006/relationships">
+<file path=ppt/slides/slide13.xml><?xml version="1.0" encoding="utf-8"?>
+<p:sld xmlns:a="http://schemas.openxmlformats.org/drawingml/2006/main" xmlns:r="http://schemas.openxmlformats.org/officeDocument/2006/relationships" xmlns:p="http://schemas.openxmlformats.org/presentationml/2006/main">
   <p:cSld>
     <p:bg>
       <p:bgPr>
@@ -5948,7 +7040,7 @@
                 <a:solidFill>
                   <a:srgbClr val="FFFFFF"/>
                 </a:solidFill>
-                <a:latin typeface="Calibri"/>
+                <a:latin typeface="Calibri" panose="020F0502020204030204"/>
               </a:defRPr>
             </a:pPr>
             <a:r>
@@ -5984,7 +7076,7 @@
                 <a:solidFill>
                   <a:srgbClr val="2E86AB"/>
                 </a:solidFill>
-                <a:latin typeface="Calibri"/>
+                <a:latin typeface="Calibri" panose="020F0502020204030204"/>
               </a:defRPr>
             </a:pPr>
             <a:r>
@@ -6029,7 +7121,7 @@
                           <a:solidFill>
                             <a:srgbClr val="FFFFFF"/>
                           </a:solidFill>
-                          <a:latin typeface="Calibri"/>
+                          <a:latin typeface="Calibri" panose="020F0502020204030204"/>
                         </a:defRPr>
                       </a:pPr>
                       <a:r>
@@ -6053,7 +7145,7 @@
                           <a:solidFill>
                             <a:srgbClr val="FFFFFF"/>
                           </a:solidFill>
-                          <a:latin typeface="Calibri"/>
+                          <a:latin typeface="Calibri" panose="020F0502020204030204"/>
                         </a:defRPr>
                       </a:pPr>
                       <a:r>
@@ -6077,7 +7169,7 @@
                           <a:solidFill>
                             <a:srgbClr val="FFFFFF"/>
                           </a:solidFill>
-                          <a:latin typeface="Calibri"/>
+                          <a:latin typeface="Calibri" panose="020F0502020204030204"/>
                         </a:defRPr>
                       </a:pPr>
                       <a:r>
@@ -6101,7 +7193,7 @@
                           <a:solidFill>
                             <a:srgbClr val="FFFFFF"/>
                           </a:solidFill>
-                          <a:latin typeface="Calibri"/>
+                          <a:latin typeface="Calibri" panose="020F0502020204030204"/>
                         </a:defRPr>
                       </a:pPr>
                       <a:r>
@@ -6125,7 +7217,7 @@
                           <a:solidFill>
                             <a:srgbClr val="FFFFFF"/>
                           </a:solidFill>
-                          <a:latin typeface="Calibri"/>
+                          <a:latin typeface="Calibri" panose="020F0502020204030204"/>
                         </a:defRPr>
                       </a:pPr>
                       <a:r>
@@ -6151,7 +7243,7 @@
                           <a:solidFill>
                             <a:srgbClr val="2C3E50"/>
                           </a:solidFill>
-                          <a:latin typeface="Calibri"/>
+                          <a:latin typeface="Calibri" panose="020F0502020204030204"/>
                         </a:defRPr>
                       </a:pPr>
                       <a:r>
@@ -6175,7 +7267,7 @@
                           <a:solidFill>
                             <a:srgbClr val="2C3E50"/>
                           </a:solidFill>
-                          <a:latin typeface="Calibri"/>
+                          <a:latin typeface="Calibri" panose="020F0502020204030204"/>
                         </a:defRPr>
                       </a:pPr>
                       <a:r>
@@ -6199,7 +7291,7 @@
                           <a:solidFill>
                             <a:srgbClr val="2C3E50"/>
                           </a:solidFill>
-                          <a:latin typeface="Calibri"/>
+                          <a:latin typeface="Calibri" panose="020F0502020204030204"/>
                         </a:defRPr>
                       </a:pPr>
                       <a:r>
@@ -6223,7 +7315,7 @@
                           <a:solidFill>
                             <a:srgbClr val="2C3E50"/>
                           </a:solidFill>
-                          <a:latin typeface="Calibri"/>
+                          <a:latin typeface="Calibri" panose="020F0502020204030204"/>
                         </a:defRPr>
                       </a:pPr>
                       <a:r>
@@ -6247,7 +7339,7 @@
                           <a:solidFill>
                             <a:srgbClr val="2C3E50"/>
                           </a:solidFill>
-                          <a:latin typeface="Calibri"/>
+                          <a:latin typeface="Calibri" panose="020F0502020204030204"/>
                         </a:defRPr>
                       </a:pPr>
                       <a:r>
@@ -6273,7 +7365,7 @@
                           <a:solidFill>
                             <a:srgbClr val="2C3E50"/>
                           </a:solidFill>
-                          <a:latin typeface="Calibri"/>
+                          <a:latin typeface="Calibri" panose="020F0502020204030204"/>
                         </a:defRPr>
                       </a:pPr>
                       <a:r>
@@ -6297,7 +7389,7 @@
                           <a:solidFill>
                             <a:srgbClr val="2C3E50"/>
                           </a:solidFill>
-                          <a:latin typeface="Calibri"/>
+                          <a:latin typeface="Calibri" panose="020F0502020204030204"/>
                         </a:defRPr>
                       </a:pPr>
                       <a:r>
@@ -6321,7 +7413,7 @@
                           <a:solidFill>
                             <a:srgbClr val="2C3E50"/>
                           </a:solidFill>
-                          <a:latin typeface="Calibri"/>
+                          <a:latin typeface="Calibri" panose="020F0502020204030204"/>
                         </a:defRPr>
                       </a:pPr>
                       <a:r>
@@ -6345,7 +7437,7 @@
                           <a:solidFill>
                             <a:srgbClr val="2C3E50"/>
                           </a:solidFill>
-                          <a:latin typeface="Calibri"/>
+                          <a:latin typeface="Calibri" panose="020F0502020204030204"/>
                         </a:defRPr>
                       </a:pPr>
                       <a:r>
@@ -6369,7 +7461,7 @@
                           <a:solidFill>
                             <a:srgbClr val="2C3E50"/>
                           </a:solidFill>
-                          <a:latin typeface="Calibri"/>
+                          <a:latin typeface="Calibri" panose="020F0502020204030204"/>
                         </a:defRPr>
                       </a:pPr>
                       <a:r>
@@ -6415,7 +7507,7 @@
                 <a:solidFill>
                   <a:srgbClr val="1A3A5C"/>
                 </a:solidFill>
-                <a:latin typeface="Calibri"/>
+                <a:latin typeface="Calibri" panose="020F0502020204030204"/>
               </a:defRPr>
             </a:pPr>
             <a:r>
@@ -6459,7 +7551,7 @@
                           <a:solidFill>
                             <a:srgbClr val="FFFFFF"/>
                           </a:solidFill>
-                          <a:latin typeface="Calibri"/>
+                          <a:latin typeface="Calibri" panose="020F0502020204030204"/>
                         </a:defRPr>
                       </a:pPr>
                       <a:r>
@@ -6483,7 +7575,7 @@
                           <a:solidFill>
                             <a:srgbClr val="FFFFFF"/>
                           </a:solidFill>
-                          <a:latin typeface="Calibri"/>
+                          <a:latin typeface="Calibri" panose="020F0502020204030204"/>
                         </a:defRPr>
                       </a:pPr>
                       <a:r>
@@ -6507,7 +7599,7 @@
                           <a:solidFill>
                             <a:srgbClr val="FFFFFF"/>
                           </a:solidFill>
-                          <a:latin typeface="Calibri"/>
+                          <a:latin typeface="Calibri" panose="020F0502020204030204"/>
                         </a:defRPr>
                       </a:pPr>
                       <a:r>
@@ -6531,7 +7623,7 @@
                           <a:solidFill>
                             <a:srgbClr val="FFFFFF"/>
                           </a:solidFill>
-                          <a:latin typeface="Calibri"/>
+                          <a:latin typeface="Calibri" panose="020F0502020204030204"/>
                         </a:defRPr>
                       </a:pPr>
                       <a:r>
@@ -6557,7 +7649,7 @@
                           <a:solidFill>
                             <a:srgbClr val="1A3A5C"/>
                           </a:solidFill>
-                          <a:latin typeface="Calibri"/>
+                          <a:latin typeface="Calibri" panose="020F0502020204030204"/>
                         </a:defRPr>
                       </a:pPr>
                       <a:r>
@@ -6581,7 +7673,7 @@
                           <a:solidFill>
                             <a:srgbClr val="1A3A5C"/>
                           </a:solidFill>
-                          <a:latin typeface="Calibri"/>
+                          <a:latin typeface="Calibri" panose="020F0502020204030204"/>
                         </a:defRPr>
                       </a:pPr>
                       <a:r>
@@ -6605,7 +7697,7 @@
                           <a:solidFill>
                             <a:srgbClr val="1A3A5C"/>
                           </a:solidFill>
-                          <a:latin typeface="Calibri"/>
+                          <a:latin typeface="Calibri" panose="020F0502020204030204"/>
                         </a:defRPr>
                       </a:pPr>
                       <a:r>
@@ -6629,7 +7721,7 @@
                           <a:solidFill>
                             <a:srgbClr val="1A3A5C"/>
                           </a:solidFill>
-                          <a:latin typeface="Calibri"/>
+                          <a:latin typeface="Calibri" panose="020F0502020204030204"/>
                         </a:defRPr>
                       </a:pPr>
                       <a:r>
@@ -6655,7 +7747,7 @@
                           <a:solidFill>
                             <a:srgbClr val="2C3E50"/>
                           </a:solidFill>
-                          <a:latin typeface="Calibri"/>
+                          <a:latin typeface="Calibri" panose="020F0502020204030204"/>
                         </a:defRPr>
                       </a:pPr>
                       <a:r>
@@ -6679,7 +7771,7 @@
                           <a:solidFill>
                             <a:srgbClr val="2C3E50"/>
                           </a:solidFill>
-                          <a:latin typeface="Calibri"/>
+                          <a:latin typeface="Calibri" panose="020F0502020204030204"/>
                         </a:defRPr>
                       </a:pPr>
                       <a:r>
@@ -6703,7 +7795,7 @@
                           <a:solidFill>
                             <a:srgbClr val="2C3E50"/>
                           </a:solidFill>
-                          <a:latin typeface="Calibri"/>
+                          <a:latin typeface="Calibri" panose="020F0502020204030204"/>
                         </a:defRPr>
                       </a:pPr>
                       <a:r>
@@ -6727,7 +7819,7 @@
                           <a:solidFill>
                             <a:srgbClr val="2C3E50"/>
                           </a:solidFill>
-                          <a:latin typeface="Calibri"/>
+                          <a:latin typeface="Calibri" panose="020F0502020204030204"/>
                         </a:defRPr>
                       </a:pPr>
                       <a:r>
@@ -6816,7 +7908,7 @@
                 <a:solidFill>
                   <a:srgbClr val="FFFFFF"/>
                 </a:solidFill>
-                <a:latin typeface="Calibri"/>
+                <a:latin typeface="Calibri" panose="020F0502020204030204"/>
               </a:defRPr>
             </a:pPr>
             <a:r>
@@ -6852,7 +7944,7 @@
                 <a:solidFill>
                   <a:srgbClr val="F5F7FA"/>
                 </a:solidFill>
-                <a:latin typeface="Calibri"/>
+                <a:latin typeface="Calibri" panose="020F0502020204030204"/>
               </a:defRPr>
             </a:pPr>
           </a:p>
@@ -6865,7 +7957,7 @@
                 <a:solidFill>
                   <a:srgbClr val="F18F01"/>
                 </a:solidFill>
-                <a:latin typeface="Calibri"/>
+                <a:latin typeface="Calibri" panose="020F0502020204030204"/>
               </a:defRPr>
             </a:pPr>
             <a:r>
@@ -6881,7 +7973,7 @@
                 <a:solidFill>
                   <a:srgbClr val="FFFFFF"/>
                 </a:solidFill>
-                <a:latin typeface="Calibri"/>
+                <a:latin typeface="Calibri" panose="020F0502020204030204"/>
               </a:defRPr>
             </a:pPr>
             <a:r>
@@ -6894,7 +7986,7 @@
                 <a:solidFill>
                   <a:srgbClr val="F5F7FA"/>
                 </a:solidFill>
-                <a:latin typeface="Calibri"/>
+                <a:latin typeface="Calibri" panose="020F0502020204030204"/>
               </a:defRPr>
             </a:pPr>
             <a:r>
@@ -6907,7 +7999,7 @@
                 <a:solidFill>
                   <a:srgbClr val="F5F7FA"/>
                 </a:solidFill>
-                <a:latin typeface="Calibri"/>
+                <a:latin typeface="Calibri" panose="020F0502020204030204"/>
               </a:defRPr>
             </a:pPr>
             <a:r>
@@ -6920,7 +8012,7 @@
                 <a:solidFill>
                   <a:srgbClr val="F5F7FA"/>
                 </a:solidFill>
-                <a:latin typeface="Calibri"/>
+                <a:latin typeface="Calibri" panose="020F0502020204030204"/>
               </a:defRPr>
             </a:pPr>
           </a:p>
@@ -6933,7 +8025,7 @@
                 <a:solidFill>
                   <a:srgbClr val="F18F01"/>
                 </a:solidFill>
-                <a:latin typeface="Calibri"/>
+                <a:latin typeface="Calibri" panose="020F0502020204030204"/>
               </a:defRPr>
             </a:pPr>
             <a:r>
@@ -6946,7 +8038,7 @@
                 <a:solidFill>
                   <a:srgbClr val="FFFFFF"/>
                 </a:solidFill>
-                <a:latin typeface="Calibri"/>
+                <a:latin typeface="Calibri" panose="020F0502020204030204"/>
               </a:defRPr>
             </a:pPr>
             <a:r>
@@ -6959,7 +8051,7 @@
                 <a:solidFill>
                   <a:srgbClr val="F5F7FA"/>
                 </a:solidFill>
-                <a:latin typeface="Calibri"/>
+                <a:latin typeface="Calibri" panose="020F0502020204030204"/>
               </a:defRPr>
             </a:pPr>
             <a:r>
@@ -6972,7 +8064,7 @@
                 <a:solidFill>
                   <a:srgbClr val="F5F7FA"/>
                 </a:solidFill>
-                <a:latin typeface="Calibri"/>
+                <a:latin typeface="Calibri" panose="020F0502020204030204"/>
               </a:defRPr>
             </a:pPr>
             <a:r>
@@ -6985,7 +8077,7 @@
                 <a:solidFill>
                   <a:srgbClr val="F5F7FA"/>
                 </a:solidFill>
-                <a:latin typeface="Calibri"/>
+                <a:latin typeface="Calibri" panose="020F0502020204030204"/>
               </a:defRPr>
             </a:pPr>
           </a:p>
@@ -6998,7 +8090,7 @@
                 <a:solidFill>
                   <a:srgbClr val="F18F01"/>
                 </a:solidFill>
-                <a:latin typeface="Calibri"/>
+                <a:latin typeface="Calibri" panose="020F0502020204030204"/>
               </a:defRPr>
             </a:pPr>
             <a:r>
@@ -7011,7 +8103,7 @@
                 <a:solidFill>
                   <a:srgbClr val="F5F7FA"/>
                 </a:solidFill>
-                <a:latin typeface="Calibri"/>
+                <a:latin typeface="Calibri" panose="020F0502020204030204"/>
               </a:defRPr>
             </a:pPr>
             <a:r>
@@ -7024,7 +8116,7 @@
                 <a:solidFill>
                   <a:srgbClr val="F5F7FA"/>
                 </a:solidFill>
-                <a:latin typeface="Calibri"/>
+                <a:latin typeface="Calibri" panose="020F0502020204030204"/>
               </a:defRPr>
             </a:pPr>
             <a:r>
@@ -7037,7 +8129,7 @@
                 <a:solidFill>
                   <a:srgbClr val="F5F7FA"/>
                 </a:solidFill>
-                <a:latin typeface="Calibri"/>
+                <a:latin typeface="Calibri" panose="020F0502020204030204"/>
               </a:defRPr>
             </a:pPr>
             <a:r>
@@ -7073,7 +8165,7 @@
                 <a:solidFill>
                   <a:srgbClr val="7F8C9A"/>
                 </a:solidFill>
-                <a:latin typeface="Calibri"/>
+                <a:latin typeface="Calibri" panose="020F0502020204030204"/>
               </a:defRPr>
             </a:pPr>
             <a:r>
@@ -7090,8 +8182,8 @@
 </p:sld>
 </file>
 
-<file path=ppt/slides/slide13.xml><?xml version="1.0" encoding="utf-8"?>
-<p:sld xmlns:a="http://schemas.openxmlformats.org/drawingml/2006/main" xmlns:p="http://schemas.openxmlformats.org/presentationml/2006/main" xmlns:r="http://schemas.openxmlformats.org/officeDocument/2006/relationships">
+<file path=ppt/slides/slide14.xml><?xml version="1.0" encoding="utf-8"?>
+<p:sld xmlns:a="http://schemas.openxmlformats.org/drawingml/2006/main" xmlns:r="http://schemas.openxmlformats.org/officeDocument/2006/relationships" xmlns:p="http://schemas.openxmlformats.org/presentationml/2006/main">
   <p:cSld>
     <p:bg>
       <p:bgPr>
@@ -7178,7 +8270,7 @@
                 <a:solidFill>
                   <a:srgbClr val="FFFFFF"/>
                 </a:solidFill>
-                <a:latin typeface="Calibri"/>
+                <a:latin typeface="Calibri" panose="020F0502020204030204"/>
               </a:defRPr>
             </a:pPr>
             <a:r>
@@ -7224,7 +8316,7 @@
                           <a:solidFill>
                             <a:srgbClr val="FFFFFF"/>
                           </a:solidFill>
-                          <a:latin typeface="Calibri"/>
+                          <a:latin typeface="Calibri" panose="020F0502020204030204"/>
                         </a:defRPr>
                       </a:pPr>
                       <a:r>
@@ -7248,7 +8340,7 @@
                           <a:solidFill>
                             <a:srgbClr val="FFFFFF"/>
                           </a:solidFill>
-                          <a:latin typeface="Calibri"/>
+                          <a:latin typeface="Calibri" panose="020F0502020204030204"/>
                         </a:defRPr>
                       </a:pPr>
                       <a:r>
@@ -7272,7 +8364,7 @@
                           <a:solidFill>
                             <a:srgbClr val="FFFFFF"/>
                           </a:solidFill>
-                          <a:latin typeface="Calibri"/>
+                          <a:latin typeface="Calibri" panose="020F0502020204030204"/>
                         </a:defRPr>
                       </a:pPr>
                       <a:r>
@@ -7296,7 +8388,7 @@
                           <a:solidFill>
                             <a:srgbClr val="FFFFFF"/>
                           </a:solidFill>
-                          <a:latin typeface="Calibri"/>
+                          <a:latin typeface="Calibri" panose="020F0502020204030204"/>
                         </a:defRPr>
                       </a:pPr>
                       <a:r>
@@ -7320,7 +8412,7 @@
                           <a:solidFill>
                             <a:srgbClr val="FFFFFF"/>
                           </a:solidFill>
-                          <a:latin typeface="Calibri"/>
+                          <a:latin typeface="Calibri" panose="020F0502020204030204"/>
                         </a:defRPr>
                       </a:pPr>
                       <a:r>
@@ -7344,7 +8436,7 @@
                           <a:solidFill>
                             <a:srgbClr val="FFFFFF"/>
                           </a:solidFill>
-                          <a:latin typeface="Calibri"/>
+                          <a:latin typeface="Calibri" panose="020F0502020204030204"/>
                         </a:defRPr>
                       </a:pPr>
                       <a:r>
@@ -7370,7 +8462,7 @@
                           <a:solidFill>
                             <a:srgbClr val="2C3E50"/>
                           </a:solidFill>
-                          <a:latin typeface="Calibri"/>
+                          <a:latin typeface="Calibri" panose="020F0502020204030204"/>
                         </a:defRPr>
                       </a:pPr>
                       <a:r>
@@ -7394,7 +8486,7 @@
                           <a:solidFill>
                             <a:srgbClr val="2C3E50"/>
                           </a:solidFill>
-                          <a:latin typeface="Calibri"/>
+                          <a:latin typeface="Calibri" panose="020F0502020204030204"/>
                         </a:defRPr>
                       </a:pPr>
                       <a:r>
@@ -7418,7 +8510,7 @@
                           <a:solidFill>
                             <a:srgbClr val="2C3E50"/>
                           </a:solidFill>
-                          <a:latin typeface="Calibri"/>
+                          <a:latin typeface="Calibri" panose="020F0502020204030204"/>
                         </a:defRPr>
                       </a:pPr>
                       <a:r>
@@ -7442,7 +8534,7 @@
                           <a:solidFill>
                             <a:srgbClr val="2C3E50"/>
                           </a:solidFill>
-                          <a:latin typeface="Calibri"/>
+                          <a:latin typeface="Calibri" panose="020F0502020204030204"/>
                         </a:defRPr>
                       </a:pPr>
                       <a:r>
@@ -7466,7 +8558,7 @@
                           <a:solidFill>
                             <a:srgbClr val="2C3E50"/>
                           </a:solidFill>
-                          <a:latin typeface="Calibri"/>
+                          <a:latin typeface="Calibri" panose="020F0502020204030204"/>
                         </a:defRPr>
                       </a:pPr>
                       <a:r>
@@ -7490,7 +8582,7 @@
                           <a:solidFill>
                             <a:srgbClr val="2C3E50"/>
                           </a:solidFill>
-                          <a:latin typeface="Calibri"/>
+                          <a:latin typeface="Calibri" panose="020F0502020204030204"/>
                         </a:defRPr>
                       </a:pPr>
                       <a:r>
@@ -7516,7 +8608,7 @@
                           <a:solidFill>
                             <a:srgbClr val="2C3E50"/>
                           </a:solidFill>
-                          <a:latin typeface="Calibri"/>
+                          <a:latin typeface="Calibri" panose="020F0502020204030204"/>
                         </a:defRPr>
                       </a:pPr>
                       <a:r>
@@ -7540,7 +8632,7 @@
                           <a:solidFill>
                             <a:srgbClr val="2C3E50"/>
                           </a:solidFill>
-                          <a:latin typeface="Calibri"/>
+                          <a:latin typeface="Calibri" panose="020F0502020204030204"/>
                         </a:defRPr>
                       </a:pPr>
                       <a:r>
@@ -7564,7 +8656,7 @@
                           <a:solidFill>
                             <a:srgbClr val="2C3E50"/>
                           </a:solidFill>
-                          <a:latin typeface="Calibri"/>
+                          <a:latin typeface="Calibri" panose="020F0502020204030204"/>
                         </a:defRPr>
                       </a:pPr>
                       <a:r>
@@ -7588,7 +8680,7 @@
                           <a:solidFill>
                             <a:srgbClr val="2C3E50"/>
                           </a:solidFill>
-                          <a:latin typeface="Calibri"/>
+                          <a:latin typeface="Calibri" panose="020F0502020204030204"/>
                         </a:defRPr>
                       </a:pPr>
                       <a:r>
@@ -7612,7 +8704,7 @@
                           <a:solidFill>
                             <a:srgbClr val="2C3E50"/>
                           </a:solidFill>
-                          <a:latin typeface="Calibri"/>
+                          <a:latin typeface="Calibri" panose="020F0502020204030204"/>
                         </a:defRPr>
                       </a:pPr>
                       <a:r>
@@ -7636,7 +8728,7 @@
                           <a:solidFill>
                             <a:srgbClr val="2C3E50"/>
                           </a:solidFill>
-                          <a:latin typeface="Calibri"/>
+                          <a:latin typeface="Calibri" panose="020F0502020204030204"/>
                         </a:defRPr>
                       </a:pPr>
                       <a:r>
@@ -7662,7 +8754,7 @@
                           <a:solidFill>
                             <a:srgbClr val="2C3E50"/>
                           </a:solidFill>
-                          <a:latin typeface="Calibri"/>
+                          <a:latin typeface="Calibri" panose="020F0502020204030204"/>
                         </a:defRPr>
                       </a:pPr>
                       <a:r>
@@ -7686,7 +8778,7 @@
                           <a:solidFill>
                             <a:srgbClr val="2C3E50"/>
                           </a:solidFill>
-                          <a:latin typeface="Calibri"/>
+                          <a:latin typeface="Calibri" panose="020F0502020204030204"/>
                         </a:defRPr>
                       </a:pPr>
                       <a:r>
@@ -7710,7 +8802,7 @@
                           <a:solidFill>
                             <a:srgbClr val="2C3E50"/>
                           </a:solidFill>
-                          <a:latin typeface="Calibri"/>
+                          <a:latin typeface="Calibri" panose="020F0502020204030204"/>
                         </a:defRPr>
                       </a:pPr>
                       <a:r>
@@ -7734,7 +8826,7 @@
                           <a:solidFill>
                             <a:srgbClr val="2C3E50"/>
                           </a:solidFill>
-                          <a:latin typeface="Calibri"/>
+                          <a:latin typeface="Calibri" panose="020F0502020204030204"/>
                         </a:defRPr>
                       </a:pPr>
                       <a:r>
@@ -7758,7 +8850,7 @@
                           <a:solidFill>
                             <a:srgbClr val="2C3E50"/>
                           </a:solidFill>
-                          <a:latin typeface="Calibri"/>
+                          <a:latin typeface="Calibri" panose="020F0502020204030204"/>
                         </a:defRPr>
                       </a:pPr>
                       <a:r>
@@ -7782,7 +8874,7 @@
                           <a:solidFill>
                             <a:srgbClr val="2C3E50"/>
                           </a:solidFill>
-                          <a:latin typeface="Calibri"/>
+                          <a:latin typeface="Calibri" panose="020F0502020204030204"/>
                         </a:defRPr>
                       </a:pPr>
                       <a:r>
@@ -7808,7 +8900,7 @@
                           <a:solidFill>
                             <a:srgbClr val="2C3E50"/>
                           </a:solidFill>
-                          <a:latin typeface="Calibri"/>
+                          <a:latin typeface="Calibri" panose="020F0502020204030204"/>
                         </a:defRPr>
                       </a:pPr>
                       <a:r>
@@ -7832,7 +8924,7 @@
                           <a:solidFill>
                             <a:srgbClr val="2C3E50"/>
                           </a:solidFill>
-                          <a:latin typeface="Calibri"/>
+                          <a:latin typeface="Calibri" panose="020F0502020204030204"/>
                         </a:defRPr>
                       </a:pPr>
                       <a:r>
@@ -7856,7 +8948,7 @@
                           <a:solidFill>
                             <a:srgbClr val="2C3E50"/>
                           </a:solidFill>
-                          <a:latin typeface="Calibri"/>
+                          <a:latin typeface="Calibri" panose="020F0502020204030204"/>
                         </a:defRPr>
                       </a:pPr>
                       <a:r>
@@ -7880,7 +8972,7 @@
                           <a:solidFill>
                             <a:srgbClr val="2C3E50"/>
                           </a:solidFill>
-                          <a:latin typeface="Calibri"/>
+                          <a:latin typeface="Calibri" panose="020F0502020204030204"/>
                         </a:defRPr>
                       </a:pPr>
                       <a:r>
@@ -7904,7 +8996,7 @@
                           <a:solidFill>
                             <a:srgbClr val="2C3E50"/>
                           </a:solidFill>
-                          <a:latin typeface="Calibri"/>
+                          <a:latin typeface="Calibri" panose="020F0502020204030204"/>
                         </a:defRPr>
                       </a:pPr>
                       <a:r>
@@ -7928,7 +9020,7 @@
                           <a:solidFill>
                             <a:srgbClr val="2C3E50"/>
                           </a:solidFill>
-                          <a:latin typeface="Calibri"/>
+                          <a:latin typeface="Calibri" panose="020F0502020204030204"/>
                         </a:defRPr>
                       </a:pPr>
                       <a:r>
@@ -7954,7 +9046,7 @@
                           <a:solidFill>
                             <a:srgbClr val="2C3E50"/>
                           </a:solidFill>
-                          <a:latin typeface="Calibri"/>
+                          <a:latin typeface="Calibri" panose="020F0502020204030204"/>
                         </a:defRPr>
                       </a:pPr>
                       <a:r>
@@ -7978,7 +9070,7 @@
                           <a:solidFill>
                             <a:srgbClr val="2C3E50"/>
                           </a:solidFill>
-                          <a:latin typeface="Calibri"/>
+                          <a:latin typeface="Calibri" panose="020F0502020204030204"/>
                         </a:defRPr>
                       </a:pPr>
                       <a:r>
@@ -8002,7 +9094,7 @@
                           <a:solidFill>
                             <a:srgbClr val="2C3E50"/>
                           </a:solidFill>
-                          <a:latin typeface="Calibri"/>
+                          <a:latin typeface="Calibri" panose="020F0502020204030204"/>
                         </a:defRPr>
                       </a:pPr>
                       <a:r>
@@ -8026,7 +9118,7 @@
                           <a:solidFill>
                             <a:srgbClr val="2C3E50"/>
                           </a:solidFill>
-                          <a:latin typeface="Calibri"/>
+                          <a:latin typeface="Calibri" panose="020F0502020204030204"/>
                         </a:defRPr>
                       </a:pPr>
                       <a:r>
@@ -8050,7 +9142,7 @@
                           <a:solidFill>
                             <a:srgbClr val="2C3E50"/>
                           </a:solidFill>
-                          <a:latin typeface="Calibri"/>
+                          <a:latin typeface="Calibri" panose="020F0502020204030204"/>
                         </a:defRPr>
                       </a:pPr>
                       <a:r>
@@ -8074,7 +9166,7 @@
                           <a:solidFill>
                             <a:srgbClr val="2C3E50"/>
                           </a:solidFill>
-                          <a:latin typeface="Calibri"/>
+                          <a:latin typeface="Calibri" panose="020F0502020204030204"/>
                         </a:defRPr>
                       </a:pPr>
                       <a:r>
@@ -8100,7 +9192,7 @@
                           <a:solidFill>
                             <a:srgbClr val="1A3A5C"/>
                           </a:solidFill>
-                          <a:latin typeface="Calibri"/>
+                          <a:latin typeface="Calibri" panose="020F0502020204030204"/>
                         </a:defRPr>
                       </a:pPr>
                       <a:r>
@@ -8124,7 +9216,7 @@
                           <a:solidFill>
                             <a:srgbClr val="1A3A5C"/>
                           </a:solidFill>
-                          <a:latin typeface="Calibri"/>
+                          <a:latin typeface="Calibri" panose="020F0502020204030204"/>
                         </a:defRPr>
                       </a:pPr>
                       <a:r>
@@ -8148,7 +9240,7 @@
                           <a:solidFill>
                             <a:srgbClr val="1A3A5C"/>
                           </a:solidFill>
-                          <a:latin typeface="Calibri"/>
+                          <a:latin typeface="Calibri" panose="020F0502020204030204"/>
                         </a:defRPr>
                       </a:pPr>
                       <a:r>
@@ -8172,7 +9264,7 @@
                           <a:solidFill>
                             <a:srgbClr val="1A3A5C"/>
                           </a:solidFill>
-                          <a:latin typeface="Calibri"/>
+                          <a:latin typeface="Calibri" panose="020F0502020204030204"/>
                         </a:defRPr>
                       </a:pPr>
                       <a:r>
@@ -8196,7 +9288,7 @@
                           <a:solidFill>
                             <a:srgbClr val="1A3A5C"/>
                           </a:solidFill>
-                          <a:latin typeface="Calibri"/>
+                          <a:latin typeface="Calibri" panose="020F0502020204030204"/>
                         </a:defRPr>
                       </a:pPr>
                       <a:r>
@@ -8220,7 +9312,7 @@
                           <a:solidFill>
                             <a:srgbClr val="1A3A5C"/>
                           </a:solidFill>
-                          <a:latin typeface="Calibri"/>
+                          <a:latin typeface="Calibri" panose="020F0502020204030204"/>
                         </a:defRPr>
                       </a:pPr>
                       <a:r>
@@ -8246,7 +9338,7 @@
                           <a:solidFill>
                             <a:srgbClr val="2C3E50"/>
                           </a:solidFill>
-                          <a:latin typeface="Calibri"/>
+                          <a:latin typeface="Calibri" panose="020F0502020204030204"/>
                         </a:defRPr>
                       </a:pPr>
                       <a:r>
@@ -8270,7 +9362,7 @@
                           <a:solidFill>
                             <a:srgbClr val="2C3E50"/>
                           </a:solidFill>
-                          <a:latin typeface="Calibri"/>
+                          <a:latin typeface="Calibri" panose="020F0502020204030204"/>
                         </a:defRPr>
                       </a:pPr>
                       <a:r>
@@ -8294,7 +9386,7 @@
                           <a:solidFill>
                             <a:srgbClr val="2C3E50"/>
                           </a:solidFill>
-                          <a:latin typeface="Calibri"/>
+                          <a:latin typeface="Calibri" panose="020F0502020204030204"/>
                         </a:defRPr>
                       </a:pPr>
                       <a:r>
@@ -8318,7 +9410,7 @@
                           <a:solidFill>
                             <a:srgbClr val="2C3E50"/>
                           </a:solidFill>
-                          <a:latin typeface="Calibri"/>
+                          <a:latin typeface="Calibri" panose="020F0502020204030204"/>
                         </a:defRPr>
                       </a:pPr>
                       <a:r>
@@ -8342,7 +9434,7 @@
                           <a:solidFill>
                             <a:srgbClr val="2C3E50"/>
                           </a:solidFill>
-                          <a:latin typeface="Calibri"/>
+                          <a:latin typeface="Calibri" panose="020F0502020204030204"/>
                         </a:defRPr>
                       </a:pPr>
                       <a:r>
@@ -8366,7 +9458,7 @@
                           <a:solidFill>
                             <a:srgbClr val="2C3E50"/>
                           </a:solidFill>
-                          <a:latin typeface="Calibri"/>
+                          <a:latin typeface="Calibri" panose="020F0502020204030204"/>
                         </a:defRPr>
                       </a:pPr>
                       <a:r>
@@ -8455,7 +9547,7 @@
                 <a:solidFill>
                   <a:srgbClr val="2E86AB"/>
                 </a:solidFill>
-                <a:latin typeface="Calibri"/>
+                <a:latin typeface="Calibri" panose="020F0502020204030204"/>
               </a:defRPr>
             </a:pPr>
             <a:r>
@@ -8491,7 +9583,7 @@
                 <a:solidFill>
                   <a:srgbClr val="F18F01"/>
                 </a:solidFill>
-                <a:latin typeface="Calibri"/>
+                <a:latin typeface="Calibri" panose="020F0502020204030204"/>
               </a:defRPr>
             </a:pPr>
             <a:r>
@@ -8527,7 +9619,7 @@
                 <a:solidFill>
                   <a:srgbClr val="2C3E50"/>
                 </a:solidFill>
-                <a:latin typeface="Calibri"/>
+                <a:latin typeface="Calibri" panose="020F0502020204030204"/>
               </a:defRPr>
             </a:pPr>
             <a:r>
@@ -8563,7 +9655,7 @@
                 <a:solidFill>
                   <a:srgbClr val="7F8C9A"/>
                 </a:solidFill>
-                <a:latin typeface="Calibri"/>
+                <a:latin typeface="Calibri" panose="020F0502020204030204"/>
               </a:defRPr>
             </a:pPr>
             <a:r>
@@ -8599,7 +9691,7 @@
                 <a:solidFill>
                   <a:srgbClr val="F18F01"/>
                 </a:solidFill>
-                <a:latin typeface="Calibri"/>
+                <a:latin typeface="Calibri" panose="020F0502020204030204"/>
               </a:defRPr>
             </a:pPr>
             <a:r>
@@ -8635,7 +9727,7 @@
                 <a:solidFill>
                   <a:srgbClr val="2C3E50"/>
                 </a:solidFill>
-                <a:latin typeface="Calibri"/>
+                <a:latin typeface="Calibri" panose="020F0502020204030204"/>
               </a:defRPr>
             </a:pPr>
             <a:r>
@@ -8671,7 +9763,7 @@
                 <a:solidFill>
                   <a:srgbClr val="7F8C9A"/>
                 </a:solidFill>
-                <a:latin typeface="Calibri"/>
+                <a:latin typeface="Calibri" panose="020F0502020204030204"/>
               </a:defRPr>
             </a:pPr>
             <a:r>
@@ -8707,7 +9799,7 @@
                 <a:solidFill>
                   <a:srgbClr val="F18F01"/>
                 </a:solidFill>
-                <a:latin typeface="Calibri"/>
+                <a:latin typeface="Calibri" panose="020F0502020204030204"/>
               </a:defRPr>
             </a:pPr>
             <a:r>
@@ -8743,7 +9835,7 @@
                 <a:solidFill>
                   <a:srgbClr val="2C3E50"/>
                 </a:solidFill>
-                <a:latin typeface="Calibri"/>
+                <a:latin typeface="Calibri" panose="020F0502020204030204"/>
               </a:defRPr>
             </a:pPr>
             <a:r>
@@ -8779,7 +9871,7 @@
                 <a:solidFill>
                   <a:srgbClr val="7F8C9A"/>
                 </a:solidFill>
-                <a:latin typeface="Calibri"/>
+                <a:latin typeface="Calibri" panose="020F0502020204030204"/>
               </a:defRPr>
             </a:pPr>
             <a:r>
@@ -8815,7 +9907,7 @@
                 <a:solidFill>
                   <a:srgbClr val="F18F01"/>
                 </a:solidFill>
-                <a:latin typeface="Calibri"/>
+                <a:latin typeface="Calibri" panose="020F0502020204030204"/>
               </a:defRPr>
             </a:pPr>
             <a:r>
@@ -8851,7 +9943,7 @@
                 <a:solidFill>
                   <a:srgbClr val="2C3E50"/>
                 </a:solidFill>
-                <a:latin typeface="Calibri"/>
+                <a:latin typeface="Calibri" panose="020F0502020204030204"/>
               </a:defRPr>
             </a:pPr>
             <a:r>
@@ -8887,7 +9979,7 @@
                 <a:solidFill>
                   <a:srgbClr val="7F8C9A"/>
                 </a:solidFill>
-                <a:latin typeface="Calibri"/>
+                <a:latin typeface="Calibri" panose="020F0502020204030204"/>
               </a:defRPr>
             </a:pPr>
             <a:r>
@@ -8923,7 +10015,7 @@
                 <a:solidFill>
                   <a:srgbClr val="7F8C9A"/>
                 </a:solidFill>
-                <a:latin typeface="Calibri"/>
+                <a:latin typeface="Calibri" panose="020F0502020204030204"/>
               </a:defRPr>
             </a:pPr>
             <a:r>
@@ -8940,8 +10032,8 @@
 </p:sld>
 </file>
 
-<file path=ppt/slides/slide14.xml><?xml version="1.0" encoding="utf-8"?>
-<p:sld xmlns:a="http://schemas.openxmlformats.org/drawingml/2006/main" xmlns:p="http://schemas.openxmlformats.org/presentationml/2006/main" xmlns:r="http://schemas.openxmlformats.org/officeDocument/2006/relationships">
+<file path=ppt/slides/slide15.xml><?xml version="1.0" encoding="utf-8"?>
+<p:sld xmlns:a="http://schemas.openxmlformats.org/drawingml/2006/main" xmlns:r="http://schemas.openxmlformats.org/officeDocument/2006/relationships" xmlns:p="http://schemas.openxmlformats.org/presentationml/2006/main">
   <p:cSld>
     <p:bg>
       <p:bgPr>
@@ -9028,7 +10120,7 @@
                 <a:solidFill>
                   <a:srgbClr val="FFFFFF"/>
                 </a:solidFill>
-                <a:latin typeface="Calibri"/>
+                <a:latin typeface="Calibri" panose="020F0502020204030204"/>
               </a:defRPr>
             </a:pPr>
             <a:r>
@@ -9150,7 +10242,7 @@
                 <a:solidFill>
                   <a:srgbClr val="2E86AB"/>
                 </a:solidFill>
-                <a:latin typeface="Calibri"/>
+                <a:latin typeface="Calibri" panose="020F0502020204030204"/>
               </a:defRPr>
             </a:pPr>
             <a:r>
@@ -9186,7 +10278,7 @@
                 <a:solidFill>
                   <a:srgbClr val="2C3E50"/>
                 </a:solidFill>
-                <a:latin typeface="Calibri"/>
+                <a:latin typeface="Calibri" panose="020F0502020204030204"/>
               </a:defRPr>
             </a:pPr>
             <a:r>
@@ -9222,7 +10314,7 @@
                 <a:solidFill>
                   <a:srgbClr val="1A3A5C"/>
                 </a:solidFill>
-                <a:latin typeface="Calibri"/>
+                <a:latin typeface="Calibri" panose="020F0502020204030204"/>
               </a:defRPr>
             </a:pPr>
             <a:r>
@@ -9344,7 +10436,7 @@
                 <a:solidFill>
                   <a:srgbClr val="2E86AB"/>
                 </a:solidFill>
-                <a:latin typeface="Calibri"/>
+                <a:latin typeface="Calibri" panose="020F0502020204030204"/>
               </a:defRPr>
             </a:pPr>
             <a:r>
@@ -9380,7 +10472,7 @@
                 <a:solidFill>
                   <a:srgbClr val="2C3E50"/>
                 </a:solidFill>
-                <a:latin typeface="Calibri"/>
+                <a:latin typeface="Calibri" panose="020F0502020204030204"/>
               </a:defRPr>
             </a:pPr>
             <a:r>
@@ -9416,7 +10508,7 @@
                 <a:solidFill>
                   <a:srgbClr val="1A3A5C"/>
                 </a:solidFill>
-                <a:latin typeface="Calibri"/>
+                <a:latin typeface="Calibri" panose="020F0502020204030204"/>
               </a:defRPr>
             </a:pPr>
             <a:r>
@@ -9538,7 +10630,7 @@
                 <a:solidFill>
                   <a:srgbClr val="2E86AB"/>
                 </a:solidFill>
-                <a:latin typeface="Calibri"/>
+                <a:latin typeface="Calibri" panose="020F0502020204030204"/>
               </a:defRPr>
             </a:pPr>
             <a:r>
@@ -9574,7 +10666,7 @@
                 <a:solidFill>
                   <a:srgbClr val="2C3E50"/>
                 </a:solidFill>
-                <a:latin typeface="Calibri"/>
+                <a:latin typeface="Calibri" panose="020F0502020204030204"/>
               </a:defRPr>
             </a:pPr>
             <a:r>
@@ -9610,7 +10702,7 @@
                 <a:solidFill>
                   <a:srgbClr val="1A3A5C"/>
                 </a:solidFill>
-                <a:latin typeface="Calibri"/>
+                <a:latin typeface="Calibri" panose="020F0502020204030204"/>
               </a:defRPr>
             </a:pPr>
             <a:r>
@@ -9646,7 +10738,7 @@
                 <a:solidFill>
                   <a:srgbClr val="7F8C9A"/>
                 </a:solidFill>
-                <a:latin typeface="Calibri"/>
+                <a:latin typeface="Calibri" panose="020F0502020204030204"/>
               </a:defRPr>
             </a:pPr>
             <a:r>
@@ -9663,8 +10755,8 @@
 </p:sld>
 </file>
 
-<file path=ppt/slides/slide15.xml><?xml version="1.0" encoding="utf-8"?>
-<p:sld xmlns:a="http://schemas.openxmlformats.org/drawingml/2006/main" xmlns:p="http://schemas.openxmlformats.org/presentationml/2006/main" xmlns:r="http://schemas.openxmlformats.org/officeDocument/2006/relationships">
+<file path=ppt/slides/slide16.xml><?xml version="1.0" encoding="utf-8"?>
+<p:sld xmlns:a="http://schemas.openxmlformats.org/drawingml/2006/main" xmlns:r="http://schemas.openxmlformats.org/officeDocument/2006/relationships" xmlns:p="http://schemas.openxmlformats.org/presentationml/2006/main">
   <p:cSld>
     <p:bg>
       <p:bgPr>
@@ -9751,7 +10843,7 @@
                 <a:solidFill>
                   <a:srgbClr val="FFFFFF"/>
                 </a:solidFill>
-                <a:latin typeface="Calibri"/>
+                <a:latin typeface="Calibri" panose="020F0502020204030204"/>
               </a:defRPr>
             </a:pPr>
             <a:r>
@@ -9873,7 +10965,7 @@
                 <a:solidFill>
                   <a:srgbClr val="2E86AB"/>
                 </a:solidFill>
-                <a:latin typeface="Calibri"/>
+                <a:latin typeface="Calibri" panose="020F0502020204030204"/>
               </a:defRPr>
             </a:pPr>
             <a:r>
@@ -9909,7 +11001,7 @@
                 <a:solidFill>
                   <a:srgbClr val="2C3E50"/>
                 </a:solidFill>
-                <a:latin typeface="Calibri"/>
+                <a:latin typeface="Calibri" panose="020F0502020204030204"/>
               </a:defRPr>
             </a:pPr>
             <a:r>
@@ -9945,7 +11037,7 @@
                 <a:solidFill>
                   <a:srgbClr val="1A3A5C"/>
                 </a:solidFill>
-                <a:latin typeface="Calibri"/>
+                <a:latin typeface="Calibri" panose="020F0502020204030204"/>
               </a:defRPr>
             </a:pPr>
             <a:r>
@@ -10067,7 +11159,7 @@
                 <a:solidFill>
                   <a:srgbClr val="2E86AB"/>
                 </a:solidFill>
-                <a:latin typeface="Calibri"/>
+                <a:latin typeface="Calibri" panose="020F0502020204030204"/>
               </a:defRPr>
             </a:pPr>
             <a:r>
@@ -10103,7 +11195,7 @@
                 <a:solidFill>
                   <a:srgbClr val="2C3E50"/>
                 </a:solidFill>
-                <a:latin typeface="Calibri"/>
+                <a:latin typeface="Calibri" panose="020F0502020204030204"/>
               </a:defRPr>
             </a:pPr>
             <a:r>
@@ -10139,7 +11231,7 @@
                 <a:solidFill>
                   <a:srgbClr val="1A3A5C"/>
                 </a:solidFill>
-                <a:latin typeface="Calibri"/>
+                <a:latin typeface="Calibri" panose="020F0502020204030204"/>
               </a:defRPr>
             </a:pPr>
             <a:r>
@@ -10261,7 +11353,7 @@
                 <a:solidFill>
                   <a:srgbClr val="2E86AB"/>
                 </a:solidFill>
-                <a:latin typeface="Calibri"/>
+                <a:latin typeface="Calibri" panose="020F0502020204030204"/>
               </a:defRPr>
             </a:pPr>
             <a:r>
@@ -10297,7 +11389,7 @@
                 <a:solidFill>
                   <a:srgbClr val="2C3E50"/>
                 </a:solidFill>
-                <a:latin typeface="Calibri"/>
+                <a:latin typeface="Calibri" panose="020F0502020204030204"/>
               </a:defRPr>
             </a:pPr>
             <a:r>
@@ -10333,7 +11425,7 @@
                 <a:solidFill>
                   <a:srgbClr val="1A3A5C"/>
                 </a:solidFill>
-                <a:latin typeface="Calibri"/>
+                <a:latin typeface="Calibri" panose="020F0502020204030204"/>
               </a:defRPr>
             </a:pPr>
             <a:r>
@@ -10369,7 +11461,7 @@
                 <a:solidFill>
                   <a:srgbClr val="7F8C9A"/>
                 </a:solidFill>
-                <a:latin typeface="Calibri"/>
+                <a:latin typeface="Calibri" panose="020F0502020204030204"/>
               </a:defRPr>
             </a:pPr>
             <a:r>
@@ -10386,8 +11478,8 @@
 </p:sld>
 </file>
 
-<file path=ppt/slides/slide16.xml><?xml version="1.0" encoding="utf-8"?>
-<p:sld xmlns:a="http://schemas.openxmlformats.org/drawingml/2006/main" xmlns:p="http://schemas.openxmlformats.org/presentationml/2006/main" xmlns:r="http://schemas.openxmlformats.org/officeDocument/2006/relationships">
+<file path=ppt/slides/slide17.xml><?xml version="1.0" encoding="utf-8"?>
+<p:sld xmlns:a="http://schemas.openxmlformats.org/drawingml/2006/main" xmlns:r="http://schemas.openxmlformats.org/officeDocument/2006/relationships" xmlns:p="http://schemas.openxmlformats.org/presentationml/2006/main">
   <p:cSld>
     <p:bg>
       <p:bgPr>
@@ -10474,7 +11566,7 @@
                 <a:solidFill>
                   <a:srgbClr val="FFFFFF"/>
                 </a:solidFill>
-                <a:latin typeface="Calibri"/>
+                <a:latin typeface="Calibri" panose="020F0502020204030204"/>
               </a:defRPr>
             </a:pPr>
             <a:r>
@@ -10596,7 +11688,7 @@
                 <a:solidFill>
                   <a:srgbClr val="2C3E50"/>
                 </a:solidFill>
-                <a:latin typeface="Calibri"/>
+                <a:latin typeface="Calibri" panose="020F0502020204030204"/>
               </a:defRPr>
             </a:pPr>
             <a:r>
@@ -10632,7 +11724,7 @@
                 <a:solidFill>
                   <a:srgbClr val="7F8C9A"/>
                 </a:solidFill>
-                <a:latin typeface="Calibri"/>
+                <a:latin typeface="Calibri" panose="020F0502020204030204"/>
               </a:defRPr>
             </a:pPr>
             <a:r>
@@ -10754,7 +11846,7 @@
                 <a:solidFill>
                   <a:srgbClr val="2C3E50"/>
                 </a:solidFill>
-                <a:latin typeface="Calibri"/>
+                <a:latin typeface="Calibri" panose="020F0502020204030204"/>
               </a:defRPr>
             </a:pPr>
             <a:r>
@@ -10790,7 +11882,7 @@
                 <a:solidFill>
                   <a:srgbClr val="7F8C9A"/>
                 </a:solidFill>
-                <a:latin typeface="Calibri"/>
+                <a:latin typeface="Calibri" panose="020F0502020204030204"/>
               </a:defRPr>
             </a:pPr>
             <a:r>
@@ -10912,7 +12004,7 @@
                 <a:solidFill>
                   <a:srgbClr val="2C3E50"/>
                 </a:solidFill>
-                <a:latin typeface="Calibri"/>
+                <a:latin typeface="Calibri" panose="020F0502020204030204"/>
               </a:defRPr>
             </a:pPr>
             <a:r>
@@ -10948,7 +12040,7 @@
                 <a:solidFill>
                   <a:srgbClr val="7F8C9A"/>
                 </a:solidFill>
-                <a:latin typeface="Calibri"/>
+                <a:latin typeface="Calibri" panose="020F0502020204030204"/>
               </a:defRPr>
             </a:pPr>
             <a:r>
@@ -11070,7 +12162,7 @@
                 <a:solidFill>
                   <a:srgbClr val="2C3E50"/>
                 </a:solidFill>
-                <a:latin typeface="Calibri"/>
+                <a:latin typeface="Calibri" panose="020F0502020204030204"/>
               </a:defRPr>
             </a:pPr>
             <a:r>
@@ -11106,7 +12198,7 @@
                 <a:solidFill>
                   <a:srgbClr val="7F8C9A"/>
                 </a:solidFill>
-                <a:latin typeface="Calibri"/>
+                <a:latin typeface="Calibri" panose="020F0502020204030204"/>
               </a:defRPr>
             </a:pPr>
             <a:r>
@@ -11228,7 +12320,7 @@
                 <a:solidFill>
                   <a:srgbClr val="2C3E50"/>
                 </a:solidFill>
-                <a:latin typeface="Calibri"/>
+                <a:latin typeface="Calibri" panose="020F0502020204030204"/>
               </a:defRPr>
             </a:pPr>
             <a:r>
@@ -11264,7 +12356,7 @@
                 <a:solidFill>
                   <a:srgbClr val="7F8C9A"/>
                 </a:solidFill>
-                <a:latin typeface="Calibri"/>
+                <a:latin typeface="Calibri" panose="020F0502020204030204"/>
               </a:defRPr>
             </a:pPr>
             <a:r>
@@ -11343,7 +12435,7 @@
                 <a:solidFill>
                   <a:srgbClr val="F5F7FA"/>
                 </a:solidFill>
-                <a:latin typeface="Calibri"/>
+                <a:latin typeface="Calibri" panose="020F0502020204030204"/>
               </a:defRPr>
             </a:pPr>
             <a:r>
@@ -11379,7 +12471,7 @@
                 <a:solidFill>
                   <a:srgbClr val="7F8C9A"/>
                 </a:solidFill>
-                <a:latin typeface="Calibri"/>
+                <a:latin typeface="Calibri" panose="020F0502020204030204"/>
               </a:defRPr>
             </a:pPr>
             <a:r>
@@ -11396,8 +12488,8 @@
 </p:sld>
 </file>
 
-<file path=ppt/slides/slide17.xml><?xml version="1.0" encoding="utf-8"?>
-<p:sld xmlns:a="http://schemas.openxmlformats.org/drawingml/2006/main" xmlns:p="http://schemas.openxmlformats.org/presentationml/2006/main" xmlns:r="http://schemas.openxmlformats.org/officeDocument/2006/relationships">
+<file path=ppt/slides/slide18.xml><?xml version="1.0" encoding="utf-8"?>
+<p:sld xmlns:a="http://schemas.openxmlformats.org/drawingml/2006/main" xmlns:r="http://schemas.openxmlformats.org/officeDocument/2006/relationships" xmlns:p="http://schemas.openxmlformats.org/presentationml/2006/main">
   <p:cSld>
     <p:bg>
       <p:bgPr>
@@ -11441,7 +12533,7 @@
                 <a:solidFill>
                   <a:srgbClr val="FFFFFF"/>
                 </a:solidFill>
-                <a:latin typeface="Calibri"/>
+                <a:latin typeface="Calibri" panose="020F0502020204030204"/>
               </a:defRPr>
             </a:pPr>
             <a:r>
@@ -11477,7 +12569,7 @@
                 <a:solidFill>
                   <a:srgbClr val="BBCCDD"/>
                 </a:solidFill>
-                <a:latin typeface="Calibri"/>
+                <a:latin typeface="Calibri" panose="020F0502020204030204"/>
               </a:defRPr>
             </a:pPr>
             <a:r>
@@ -11556,7 +12648,7 @@
                 <a:solidFill>
                   <a:srgbClr val="F18F01"/>
                 </a:solidFill>
-                <a:latin typeface="Calibri"/>
+                <a:latin typeface="Calibri" panose="020F0502020204030204"/>
               </a:defRPr>
             </a:pPr>
             <a:r>
@@ -11592,7 +12684,7 @@
                 <a:solidFill>
                   <a:srgbClr val="FFFFFF"/>
                 </a:solidFill>
-                <a:latin typeface="Calibri"/>
+                <a:latin typeface="Calibri" panose="020F0502020204030204"/>
               </a:defRPr>
             </a:pPr>
             <a:r>
@@ -11628,7 +12720,7 @@
                 <a:solidFill>
                   <a:srgbClr val="BBCCDD"/>
                 </a:solidFill>
-                <a:latin typeface="Calibri"/>
+                <a:latin typeface="Calibri" panose="020F0502020204030204"/>
               </a:defRPr>
             </a:pPr>
             <a:r>
@@ -11707,7 +12799,7 @@
                 <a:solidFill>
                   <a:srgbClr val="F18F01"/>
                 </a:solidFill>
-                <a:latin typeface="Calibri"/>
+                <a:latin typeface="Calibri" panose="020F0502020204030204"/>
               </a:defRPr>
             </a:pPr>
             <a:r>
@@ -11743,7 +12835,7 @@
                 <a:solidFill>
                   <a:srgbClr val="FFFFFF"/>
                 </a:solidFill>
-                <a:latin typeface="Calibri"/>
+                <a:latin typeface="Calibri" panose="020F0502020204030204"/>
               </a:defRPr>
             </a:pPr>
             <a:r>
@@ -11779,7 +12871,7 @@
                 <a:solidFill>
                   <a:srgbClr val="BBCCDD"/>
                 </a:solidFill>
-                <a:latin typeface="Calibri"/>
+                <a:latin typeface="Calibri" panose="020F0502020204030204"/>
               </a:defRPr>
             </a:pPr>
             <a:r>
@@ -11858,7 +12950,7 @@
                 <a:solidFill>
                   <a:srgbClr val="F18F01"/>
                 </a:solidFill>
-                <a:latin typeface="Calibri"/>
+                <a:latin typeface="Calibri" panose="020F0502020204030204"/>
               </a:defRPr>
             </a:pPr>
             <a:r>
@@ -11894,7 +12986,7 @@
                 <a:solidFill>
                   <a:srgbClr val="FFFFFF"/>
                 </a:solidFill>
-                <a:latin typeface="Calibri"/>
+                <a:latin typeface="Calibri" panose="020F0502020204030204"/>
               </a:defRPr>
             </a:pPr>
             <a:r>
@@ -11930,7 +13022,7 @@
                 <a:solidFill>
                   <a:srgbClr val="BBCCDD"/>
                 </a:solidFill>
-                <a:latin typeface="Calibri"/>
+                <a:latin typeface="Calibri" panose="020F0502020204030204"/>
               </a:defRPr>
             </a:pPr>
             <a:r>
@@ -12009,7 +13101,7 @@
                 <a:solidFill>
                   <a:srgbClr val="F18F01"/>
                 </a:solidFill>
-                <a:latin typeface="Calibri"/>
+                <a:latin typeface="Calibri" panose="020F0502020204030204"/>
               </a:defRPr>
             </a:pPr>
             <a:r>
@@ -12045,7 +13137,7 @@
                 <a:solidFill>
                   <a:srgbClr val="FFFFFF"/>
                 </a:solidFill>
-                <a:latin typeface="Calibri"/>
+                <a:latin typeface="Calibri" panose="020F0502020204030204"/>
               </a:defRPr>
             </a:pPr>
             <a:r>
@@ -12081,7 +13173,7 @@
                 <a:solidFill>
                   <a:srgbClr val="BBCCDD"/>
                 </a:solidFill>
-                <a:latin typeface="Calibri"/>
+                <a:latin typeface="Calibri" panose="020F0502020204030204"/>
               </a:defRPr>
             </a:pPr>
             <a:r>
@@ -12160,7 +13252,7 @@
                 <a:solidFill>
                   <a:srgbClr val="F18F01"/>
                 </a:solidFill>
-                <a:latin typeface="Calibri"/>
+                <a:latin typeface="Calibri" panose="020F0502020204030204"/>
               </a:defRPr>
             </a:pPr>
             <a:r>
@@ -12196,7 +13288,7 @@
                 <a:solidFill>
                   <a:srgbClr val="F5F7FA"/>
                 </a:solidFill>
-                <a:latin typeface="Calibri"/>
+                <a:latin typeface="Calibri" panose="020F0502020204030204"/>
               </a:defRPr>
             </a:pPr>
             <a:r>
@@ -12232,7 +13324,7 @@
                 <a:solidFill>
                   <a:srgbClr val="F5F7FA"/>
                 </a:solidFill>
-                <a:latin typeface="Calibri"/>
+                <a:latin typeface="Calibri" panose="020F0502020204030204"/>
               </a:defRPr>
             </a:pPr>
             <a:r>
@@ -12268,7 +13360,7 @@
                 <a:solidFill>
                   <a:srgbClr val="F5F7FA"/>
                 </a:solidFill>
-                <a:latin typeface="Calibri"/>
+                <a:latin typeface="Calibri" panose="020F0502020204030204"/>
               </a:defRPr>
             </a:pPr>
             <a:r>
@@ -12304,7 +13396,7 @@
                 <a:solidFill>
                   <a:srgbClr val="F5F7FA"/>
                 </a:solidFill>
-                <a:latin typeface="Calibri"/>
+                <a:latin typeface="Calibri" panose="020F0502020204030204"/>
               </a:defRPr>
             </a:pPr>
             <a:r>
@@ -12340,7 +13432,7 @@
                 <a:solidFill>
                   <a:srgbClr val="F5F7FA"/>
                 </a:solidFill>
-                <a:latin typeface="Calibri"/>
+                <a:latin typeface="Calibri" panose="020F0502020204030204"/>
               </a:defRPr>
             </a:pPr>
             <a:r>
@@ -12376,7 +13468,7 @@
                 <a:solidFill>
                   <a:srgbClr val="F5F7FA"/>
                 </a:solidFill>
-                <a:latin typeface="Calibri"/>
+                <a:latin typeface="Calibri" panose="020F0502020204030204"/>
               </a:defRPr>
             </a:pPr>
             <a:r>
@@ -12412,7 +13504,7 @@
                 <a:solidFill>
                   <a:srgbClr val="7F8C9A"/>
                 </a:solidFill>
-                <a:latin typeface="Calibri"/>
+                <a:latin typeface="Calibri" panose="020F0502020204030204"/>
               </a:defRPr>
             </a:pPr>
             <a:r>
@@ -12429,8 +13521,8 @@
 </p:sld>
 </file>
 
-<file path=ppt/slides/slide18.xml><?xml version="1.0" encoding="utf-8"?>
-<p:sld xmlns:a="http://schemas.openxmlformats.org/drawingml/2006/main" xmlns:p="http://schemas.openxmlformats.org/presentationml/2006/main" xmlns:r="http://schemas.openxmlformats.org/officeDocument/2006/relationships">
+<file path=ppt/slides/slide19.xml><?xml version="1.0" encoding="utf-8"?>
+<p:sld xmlns:a="http://schemas.openxmlformats.org/drawingml/2006/main" xmlns:r="http://schemas.openxmlformats.org/officeDocument/2006/relationships" xmlns:p="http://schemas.openxmlformats.org/presentationml/2006/main">
   <p:cSld>
     <p:bg>
       <p:bgPr>
@@ -12517,7 +13609,7 @@
                 <a:solidFill>
                   <a:srgbClr val="FFFFFF"/>
                 </a:solidFill>
-                <a:latin typeface="Calibri"/>
+                <a:latin typeface="Calibri" panose="020F0502020204030204"/>
               </a:defRPr>
             </a:pPr>
             <a:r>
@@ -12553,7 +13645,7 @@
                 <a:solidFill>
                   <a:srgbClr val="F5F7FA"/>
                 </a:solidFill>
-                <a:latin typeface="Calibri"/>
+                <a:latin typeface="Calibri" panose="020F0502020204030204"/>
               </a:defRPr>
             </a:pPr>
             <a:r>
@@ -12589,7 +13681,7 @@
                 <a:solidFill>
                   <a:srgbClr val="BBCCDD"/>
                 </a:solidFill>
-                <a:latin typeface="Calibri"/>
+                <a:latin typeface="Calibri" panose="020F0502020204030204"/>
               </a:defRPr>
             </a:pPr>
             <a:r>
@@ -12625,7 +13717,7 @@
                 <a:solidFill>
                   <a:srgbClr val="7F8C9A"/>
                 </a:solidFill>
-                <a:latin typeface="Calibri"/>
+                <a:latin typeface="Calibri" panose="020F0502020204030204"/>
               </a:defRPr>
             </a:pPr>
             <a:r>
@@ -12643,7 +13735,25 @@
 </file>
 
 <file path=ppt/slides/slide2.xml><?xml version="1.0" encoding="utf-8"?>
-<p:sld xmlns:a="http://schemas.openxmlformats.org/drawingml/2006/main" xmlns:p="http://schemas.openxmlformats.org/presentationml/2006/main" xmlns:r="http://schemas.openxmlformats.org/officeDocument/2006/relationships">
+<p:sld xmlns:a="http://schemas.openxmlformats.org/drawingml/2006/main" xmlns:r="http://schemas.openxmlformats.org/officeDocument/2006/relationships" xmlns:p="http://schemas.openxmlformats.org/presentationml/2006/main">
+  <p:cSld>
+    <p:spTree>
+      <p:nvGrpSpPr>
+        <p:cNvPr id="1" name=""/>
+        <p:cNvGrpSpPr/>
+        <p:nvPr/>
+      </p:nvGrpSpPr>
+      <p:grpSpPr/>
+    </p:spTree>
+  </p:cSld>
+  <p:clrMapOvr>
+    <a:masterClrMapping/>
+  </p:clrMapOvr>
+</p:sld>
+</file>
+
+<file path=ppt/slides/slide3.xml><?xml version="1.0" encoding="utf-8"?>
+<p:sld xmlns:a="http://schemas.openxmlformats.org/drawingml/2006/main" xmlns:r="http://schemas.openxmlformats.org/officeDocument/2006/relationships" xmlns:p="http://schemas.openxmlformats.org/presentationml/2006/main">
   <p:cSld>
     <p:bg>
       <p:bgPr>
@@ -12730,7 +13840,7 @@
                 <a:solidFill>
                   <a:srgbClr val="1A3A5C"/>
                 </a:solidFill>
-                <a:latin typeface="Calibri"/>
+                <a:latin typeface="Calibri" panose="020F0502020204030204"/>
               </a:defRPr>
             </a:pPr>
             <a:r>
@@ -12809,7 +13919,7 @@
                 <a:solidFill>
                   <a:srgbClr val="FFFFFF"/>
                 </a:solidFill>
-                <a:latin typeface="Calibri"/>
+                <a:latin typeface="Calibri" panose="020F0502020204030204"/>
               </a:defRPr>
             </a:pPr>
             <a:r>
@@ -12845,7 +13955,7 @@
                 <a:solidFill>
                   <a:srgbClr val="1A3A5C"/>
                 </a:solidFill>
-                <a:latin typeface="Calibri"/>
+                <a:latin typeface="Calibri" panose="020F0502020204030204"/>
               </a:defRPr>
             </a:pPr>
             <a:r>
@@ -12881,7 +13991,7 @@
                 <a:solidFill>
                   <a:srgbClr val="7F8C9A"/>
                 </a:solidFill>
-                <a:latin typeface="Calibri"/>
+                <a:latin typeface="Calibri" panose="020F0502020204030204"/>
               </a:defRPr>
             </a:pPr>
             <a:r>
@@ -12960,7 +14070,7 @@
                 <a:solidFill>
                   <a:srgbClr val="FFFFFF"/>
                 </a:solidFill>
-                <a:latin typeface="Calibri"/>
+                <a:latin typeface="Calibri" panose="020F0502020204030204"/>
               </a:defRPr>
             </a:pPr>
             <a:r>
@@ -12996,7 +14106,7 @@
                 <a:solidFill>
                   <a:srgbClr val="1A3A5C"/>
                 </a:solidFill>
-                <a:latin typeface="Calibri"/>
+                <a:latin typeface="Calibri" panose="020F0502020204030204"/>
               </a:defRPr>
             </a:pPr>
             <a:r>
@@ -13032,7 +14142,7 @@
                 <a:solidFill>
                   <a:srgbClr val="7F8C9A"/>
                 </a:solidFill>
-                <a:latin typeface="Calibri"/>
+                <a:latin typeface="Calibri" panose="020F0502020204030204"/>
               </a:defRPr>
             </a:pPr>
             <a:r>
@@ -13111,7 +14221,7 @@
                 <a:solidFill>
                   <a:srgbClr val="FFFFFF"/>
                 </a:solidFill>
-                <a:latin typeface="Calibri"/>
+                <a:latin typeface="Calibri" panose="020F0502020204030204"/>
               </a:defRPr>
             </a:pPr>
             <a:r>
@@ -13147,7 +14257,7 @@
                 <a:solidFill>
                   <a:srgbClr val="1A3A5C"/>
                 </a:solidFill>
-                <a:latin typeface="Calibri"/>
+                <a:latin typeface="Calibri" panose="020F0502020204030204"/>
               </a:defRPr>
             </a:pPr>
             <a:r>
@@ -13183,7 +14293,7 @@
                 <a:solidFill>
                   <a:srgbClr val="7F8C9A"/>
                 </a:solidFill>
-                <a:latin typeface="Calibri"/>
+                <a:latin typeface="Calibri" panose="020F0502020204030204"/>
               </a:defRPr>
             </a:pPr>
             <a:r>
@@ -13262,7 +14372,7 @@
                 <a:solidFill>
                   <a:srgbClr val="FFFFFF"/>
                 </a:solidFill>
-                <a:latin typeface="Calibri"/>
+                <a:latin typeface="Calibri" panose="020F0502020204030204"/>
               </a:defRPr>
             </a:pPr>
             <a:r>
@@ -13298,7 +14408,7 @@
                 <a:solidFill>
                   <a:srgbClr val="1A3A5C"/>
                 </a:solidFill>
-                <a:latin typeface="Calibri"/>
+                <a:latin typeface="Calibri" panose="020F0502020204030204"/>
               </a:defRPr>
             </a:pPr>
             <a:r>
@@ -13334,7 +14444,7 @@
                 <a:solidFill>
                   <a:srgbClr val="7F8C9A"/>
                 </a:solidFill>
-                <a:latin typeface="Calibri"/>
+                <a:latin typeface="Calibri" panose="020F0502020204030204"/>
               </a:defRPr>
             </a:pPr>
             <a:r>
@@ -13413,7 +14523,7 @@
                 <a:solidFill>
                   <a:srgbClr val="FFFFFF"/>
                 </a:solidFill>
-                <a:latin typeface="Calibri"/>
+                <a:latin typeface="Calibri" panose="020F0502020204030204"/>
               </a:defRPr>
             </a:pPr>
             <a:r>
@@ -13449,7 +14559,7 @@
                 <a:solidFill>
                   <a:srgbClr val="1A3A5C"/>
                 </a:solidFill>
-                <a:latin typeface="Calibri"/>
+                <a:latin typeface="Calibri" panose="020F0502020204030204"/>
               </a:defRPr>
             </a:pPr>
             <a:r>
@@ -13485,7 +14595,7 @@
                 <a:solidFill>
                   <a:srgbClr val="7F8C9A"/>
                 </a:solidFill>
-                <a:latin typeface="Calibri"/>
+                <a:latin typeface="Calibri" panose="020F0502020204030204"/>
               </a:defRPr>
             </a:pPr>
             <a:r>
@@ -13564,7 +14674,7 @@
                 <a:solidFill>
                   <a:srgbClr val="FFFFFF"/>
                 </a:solidFill>
-                <a:latin typeface="Calibri"/>
+                <a:latin typeface="Calibri" panose="020F0502020204030204"/>
               </a:defRPr>
             </a:pPr>
             <a:r>
@@ -13600,7 +14710,7 @@
                 <a:solidFill>
                   <a:srgbClr val="1A3A5C"/>
                 </a:solidFill>
-                <a:latin typeface="Calibri"/>
+                <a:latin typeface="Calibri" panose="020F0502020204030204"/>
               </a:defRPr>
             </a:pPr>
             <a:r>
@@ -13636,7 +14746,7 @@
                 <a:solidFill>
                   <a:srgbClr val="7F8C9A"/>
                 </a:solidFill>
-                <a:latin typeface="Calibri"/>
+                <a:latin typeface="Calibri" panose="020F0502020204030204"/>
               </a:defRPr>
             </a:pPr>
             <a:r>
@@ -13672,7 +14782,7 @@
                 <a:solidFill>
                   <a:srgbClr val="7F8C9A"/>
                 </a:solidFill>
-                <a:latin typeface="Calibri"/>
+                <a:latin typeface="Calibri" panose="020F0502020204030204"/>
               </a:defRPr>
             </a:pPr>
             <a:r>
@@ -13689,8 +14799,8 @@
 </p:sld>
 </file>
 
-<file path=ppt/slides/slide3.xml><?xml version="1.0" encoding="utf-8"?>
-<p:sld xmlns:a="http://schemas.openxmlformats.org/drawingml/2006/main" xmlns:p="http://schemas.openxmlformats.org/presentationml/2006/main" xmlns:r="http://schemas.openxmlformats.org/officeDocument/2006/relationships">
+<file path=ppt/slides/slide4.xml><?xml version="1.0" encoding="utf-8"?>
+<p:sld xmlns:a="http://schemas.openxmlformats.org/drawingml/2006/main" xmlns:r="http://schemas.openxmlformats.org/officeDocument/2006/relationships" xmlns:p="http://schemas.openxmlformats.org/presentationml/2006/main">
   <p:cSld>
     <p:bg>
       <p:bgPr>
@@ -13777,7 +14887,7 @@
                 <a:solidFill>
                   <a:srgbClr val="FFFFFF"/>
                 </a:solidFill>
-                <a:latin typeface="Calibri"/>
+                <a:latin typeface="Calibri" panose="020F0502020204030204"/>
               </a:defRPr>
             </a:pPr>
             <a:r>
@@ -13813,7 +14923,7 @@
                 <a:solidFill>
                   <a:srgbClr val="2E86AB"/>
                 </a:solidFill>
-                <a:latin typeface="Calibri"/>
+                <a:latin typeface="Calibri" panose="020F0502020204030204"/>
               </a:defRPr>
             </a:pPr>
             <a:r>
@@ -13830,17 +14940,17 @@
         </p:nvSpPr>
         <p:spPr>
           <a:xfrm>
-            <a:off x="731520" y="1645920"/>
-            <a:ext cx="5029200" cy="2286000"/>
-          </a:xfrm>
-          <a:prstGeom prst="rect">
-            <a:avLst/>
-          </a:prstGeom>
-          <a:noFill/>
-        </p:spPr>
-        <p:txBody>
-          <a:bodyPr wrap="square">
-            <a:spAutoFit/>
+            <a:off x="731520" y="1718945"/>
+            <a:ext cx="3155315" cy="2212975"/>
+          </a:xfrm>
+          <a:prstGeom prst="rect">
+            <a:avLst/>
+          </a:prstGeom>
+          <a:noFill/>
+        </p:spPr>
+        <p:txBody>
+          <a:bodyPr wrap="square">
+            <a:noAutofit/>
           </a:bodyPr>
           <a:lstStyle/>
           <a:p>
@@ -13849,7 +14959,7 @@
                 <a:solidFill>
                   <a:srgbClr val="2C3E50"/>
                 </a:solidFill>
-                <a:latin typeface="Calibri"/>
+                <a:latin typeface="Calibri" panose="020F0502020204030204"/>
               </a:defRPr>
             </a:pPr>
             <a:r>
@@ -13862,7 +14972,7 @@
                 <a:solidFill>
                   <a:srgbClr val="1A3A5C"/>
                 </a:solidFill>
-                <a:latin typeface="Calibri"/>
+                <a:latin typeface="Calibri" panose="020F0502020204030204"/>
               </a:defRPr>
             </a:pPr>
             <a:r>
@@ -13875,7 +14985,7 @@
                 <a:solidFill>
                   <a:srgbClr val="2C3E50"/>
                 </a:solidFill>
-                <a:latin typeface="Calibri"/>
+                <a:latin typeface="Calibri" panose="020F0502020204030204"/>
               </a:defRPr>
             </a:pPr>
             <a:r>
@@ -13911,7 +15021,7 @@
                 <a:solidFill>
                   <a:srgbClr val="2E86AB"/>
                 </a:solidFill>
-                <a:latin typeface="Calibri"/>
+                <a:latin typeface="Calibri" panose="020F0502020204030204"/>
               </a:defRPr>
             </a:pPr>
             <a:r>
@@ -13947,7 +15057,7 @@
                 <a:solidFill>
                   <a:srgbClr val="2C3E50"/>
                 </a:solidFill>
-                <a:latin typeface="Calibri"/>
+                <a:latin typeface="Calibri" panose="020F0502020204030204"/>
               </a:defRPr>
             </a:pPr>
           </a:p>
@@ -13957,7 +15067,7 @@
                 <a:solidFill>
                   <a:srgbClr val="2C3E50"/>
                 </a:solidFill>
-                <a:latin typeface="Calibri"/>
+                <a:latin typeface="Calibri" panose="020F0502020204030204"/>
               </a:defRPr>
             </a:pPr>
             <a:r>
@@ -13970,7 +15080,7 @@
                 <a:solidFill>
                   <a:srgbClr val="2C3E50"/>
                 </a:solidFill>
-                <a:latin typeface="Calibri"/>
+                <a:latin typeface="Calibri" panose="020F0502020204030204"/>
               </a:defRPr>
             </a:pPr>
             <a:r>
@@ -13983,7 +15093,7 @@
                 <a:solidFill>
                   <a:srgbClr val="2C3E50"/>
                 </a:solidFill>
-                <a:latin typeface="Calibri"/>
+                <a:latin typeface="Calibri" panose="020F0502020204030204"/>
               </a:defRPr>
             </a:pPr>
             <a:r>
@@ -14062,7 +15172,7 @@
                 <a:solidFill>
                   <a:srgbClr val="2E86AB"/>
                 </a:solidFill>
-                <a:latin typeface="Calibri"/>
+                <a:latin typeface="Calibri" panose="020F0502020204030204"/>
               </a:defRPr>
             </a:pPr>
             <a:r>
@@ -14098,7 +15208,7 @@
                 <a:solidFill>
                   <a:srgbClr val="7F8C9A"/>
                 </a:solidFill>
-                <a:latin typeface="Calibri"/>
+                <a:latin typeface="Calibri" panose="020F0502020204030204"/>
               </a:defRPr>
             </a:pPr>
             <a:r>
@@ -14134,7 +15244,7 @@
                 <a:solidFill>
                   <a:srgbClr val="2C3E50"/>
                 </a:solidFill>
-                <a:latin typeface="Calibri"/>
+                <a:latin typeface="Calibri" panose="020F0502020204030204"/>
               </a:defRPr>
             </a:pPr>
             <a:r>
@@ -14170,7 +15280,7 @@
                 <a:solidFill>
                   <a:srgbClr val="7F8C9A"/>
                 </a:solidFill>
-                <a:latin typeface="Calibri"/>
+                <a:latin typeface="Calibri" panose="020F0502020204030204"/>
               </a:defRPr>
             </a:pPr>
             <a:r>
@@ -14206,7 +15316,7 @@
                 <a:solidFill>
                   <a:srgbClr val="2C3E50"/>
                 </a:solidFill>
-                <a:latin typeface="Calibri"/>
+                <a:latin typeface="Calibri" panose="020F0502020204030204"/>
               </a:defRPr>
             </a:pPr>
             <a:r>
@@ -14242,7 +15352,7 @@
                 <a:solidFill>
                   <a:srgbClr val="7F8C9A"/>
                 </a:solidFill>
-                <a:latin typeface="Calibri"/>
+                <a:latin typeface="Calibri" panose="020F0502020204030204"/>
               </a:defRPr>
             </a:pPr>
             <a:r>
@@ -14278,7 +15388,7 @@
                 <a:solidFill>
                   <a:srgbClr val="2C3E50"/>
                 </a:solidFill>
-                <a:latin typeface="Calibri"/>
+                <a:latin typeface="Calibri" panose="020F0502020204030204"/>
               </a:defRPr>
             </a:pPr>
             <a:r>
@@ -14314,7 +15424,7 @@
                 <a:solidFill>
                   <a:srgbClr val="7F8C9A"/>
                 </a:solidFill>
-                <a:latin typeface="Calibri"/>
+                <a:latin typeface="Calibri" panose="020F0502020204030204"/>
               </a:defRPr>
             </a:pPr>
             <a:r>
@@ -14350,7 +15460,7 @@
                 <a:solidFill>
                   <a:srgbClr val="2C3E50"/>
                 </a:solidFill>
-                <a:latin typeface="Calibri"/>
+                <a:latin typeface="Calibri" panose="020F0502020204030204"/>
               </a:defRPr>
             </a:pPr>
             <a:r>
@@ -14386,7 +15496,7 @@
                 <a:solidFill>
                   <a:srgbClr val="7F8C9A"/>
                 </a:solidFill>
-                <a:latin typeface="Calibri"/>
+                <a:latin typeface="Calibri" panose="020F0502020204030204"/>
               </a:defRPr>
             </a:pPr>
             <a:r>
@@ -14422,7 +15532,7 @@
                 <a:solidFill>
                   <a:srgbClr val="2C3E50"/>
                 </a:solidFill>
-                <a:latin typeface="Calibri"/>
+                <a:latin typeface="Calibri" panose="020F0502020204030204"/>
               </a:defRPr>
             </a:pPr>
             <a:r>
@@ -14458,7 +15568,7 @@
                 <a:solidFill>
                   <a:srgbClr val="7F8C9A"/>
                 </a:solidFill>
-                <a:latin typeface="Calibri"/>
+                <a:latin typeface="Calibri" panose="020F0502020204030204"/>
               </a:defRPr>
             </a:pPr>
             <a:r>
@@ -14494,7 +15604,7 @@
                 <a:solidFill>
                   <a:srgbClr val="2C3E50"/>
                 </a:solidFill>
-                <a:latin typeface="Calibri"/>
+                <a:latin typeface="Calibri" panose="020F0502020204030204"/>
               </a:defRPr>
             </a:pPr>
             <a:r>
@@ -14530,7 +15640,7 @@
                 <a:solidFill>
                   <a:srgbClr val="7F8C9A"/>
                 </a:solidFill>
-                <a:latin typeface="Calibri"/>
+                <a:latin typeface="Calibri" panose="020F0502020204030204"/>
               </a:defRPr>
             </a:pPr>
             <a:r>
@@ -14566,7 +15676,7 @@
                 <a:solidFill>
                   <a:srgbClr val="2C3E50"/>
                 </a:solidFill>
-                <a:latin typeface="Calibri"/>
+                <a:latin typeface="Calibri" panose="020F0502020204030204"/>
               </a:defRPr>
             </a:pPr>
             <a:r>
@@ -14602,7 +15712,7 @@
                 <a:solidFill>
                   <a:srgbClr val="7F8C9A"/>
                 </a:solidFill>
-                <a:latin typeface="Calibri"/>
+                <a:latin typeface="Calibri" panose="020F0502020204030204"/>
               </a:defRPr>
             </a:pPr>
             <a:r>
@@ -14619,8 +15729,8 @@
 </p:sld>
 </file>
 
-<file path=ppt/slides/slide4.xml><?xml version="1.0" encoding="utf-8"?>
-<p:sld xmlns:a="http://schemas.openxmlformats.org/drawingml/2006/main" xmlns:p="http://schemas.openxmlformats.org/presentationml/2006/main" xmlns:r="http://schemas.openxmlformats.org/officeDocument/2006/relationships">
+<file path=ppt/slides/slide5.xml><?xml version="1.0" encoding="utf-8"?>
+<p:sld xmlns:a="http://schemas.openxmlformats.org/drawingml/2006/main" xmlns:r="http://schemas.openxmlformats.org/officeDocument/2006/relationships" xmlns:p="http://schemas.openxmlformats.org/presentationml/2006/main">
   <p:cSld>
     <p:bg>
       <p:bgPr>
@@ -14707,7 +15817,7 @@
                 <a:solidFill>
                   <a:srgbClr val="FFFFFF"/>
                 </a:solidFill>
-                <a:latin typeface="Calibri"/>
+                <a:latin typeface="Calibri" panose="020F0502020204030204"/>
               </a:defRPr>
             </a:pPr>
             <a:r>
@@ -14829,7 +15939,7 @@
                 <a:solidFill>
                   <a:srgbClr val="FFFFFF"/>
                 </a:solidFill>
-                <a:latin typeface="Calibri"/>
+                <a:latin typeface="Calibri" panose="020F0502020204030204"/>
               </a:defRPr>
             </a:pPr>
             <a:r>
@@ -14865,7 +15975,7 @@
                 <a:solidFill>
                   <a:srgbClr val="F5F7FA"/>
                 </a:solidFill>
-                <a:latin typeface="Calibri"/>
+                <a:latin typeface="Calibri" panose="020F0502020204030204"/>
               </a:defRPr>
             </a:pPr>
             <a:r>
@@ -14901,7 +16011,7 @@
                 <a:solidFill>
                   <a:srgbClr val="7F8C9A"/>
                 </a:solidFill>
-                <a:latin typeface="Calibri"/>
+                <a:latin typeface="Calibri" panose="020F0502020204030204"/>
               </a:defRPr>
             </a:pPr>
             <a:r>
@@ -14937,7 +16047,7 @@
                 <a:solidFill>
                   <a:srgbClr val="2C3E50"/>
                 </a:solidFill>
-                <a:latin typeface="Calibri"/>
+                <a:latin typeface="Calibri" panose="020F0502020204030204"/>
               </a:defRPr>
             </a:pPr>
             <a:r>
@@ -14973,7 +16083,7 @@
                 <a:solidFill>
                   <a:srgbClr val="7F8C9A"/>
                 </a:solidFill>
-                <a:latin typeface="Calibri"/>
+                <a:latin typeface="Calibri" panose="020F0502020204030204"/>
               </a:defRPr>
             </a:pPr>
             <a:r>
@@ -15009,7 +16119,7 @@
                 <a:solidFill>
                   <a:srgbClr val="2C3E50"/>
                 </a:solidFill>
-                <a:latin typeface="Calibri"/>
+                <a:latin typeface="Calibri" panose="020F0502020204030204"/>
               </a:defRPr>
             </a:pPr>
             <a:r>
@@ -15045,7 +16155,7 @@
                 <a:solidFill>
                   <a:srgbClr val="7F8C9A"/>
                 </a:solidFill>
-                <a:latin typeface="Calibri"/>
+                <a:latin typeface="Calibri" panose="020F0502020204030204"/>
               </a:defRPr>
             </a:pPr>
             <a:r>
@@ -15081,7 +16191,7 @@
                 <a:solidFill>
                   <a:srgbClr val="2C3E50"/>
                 </a:solidFill>
-                <a:latin typeface="Calibri"/>
+                <a:latin typeface="Calibri" panose="020F0502020204030204"/>
               </a:defRPr>
             </a:pPr>
             <a:r>
@@ -15203,7 +16313,7 @@
                 <a:solidFill>
                   <a:srgbClr val="FFFFFF"/>
                 </a:solidFill>
-                <a:latin typeface="Calibri"/>
+                <a:latin typeface="Calibri" panose="020F0502020204030204"/>
               </a:defRPr>
             </a:pPr>
             <a:r>
@@ -15239,7 +16349,7 @@
                 <a:solidFill>
                   <a:srgbClr val="F5F7FA"/>
                 </a:solidFill>
-                <a:latin typeface="Calibri"/>
+                <a:latin typeface="Calibri" panose="020F0502020204030204"/>
               </a:defRPr>
             </a:pPr>
             <a:r>
@@ -15275,7 +16385,7 @@
                 <a:solidFill>
                   <a:srgbClr val="7F8C9A"/>
                 </a:solidFill>
-                <a:latin typeface="Calibri"/>
+                <a:latin typeface="Calibri" panose="020F0502020204030204"/>
               </a:defRPr>
             </a:pPr>
             <a:r>
@@ -15311,7 +16421,7 @@
                 <a:solidFill>
                   <a:srgbClr val="2C3E50"/>
                 </a:solidFill>
-                <a:latin typeface="Calibri"/>
+                <a:latin typeface="Calibri" panose="020F0502020204030204"/>
               </a:defRPr>
             </a:pPr>
             <a:r>
@@ -15347,7 +16457,7 @@
                 <a:solidFill>
                   <a:srgbClr val="7F8C9A"/>
                 </a:solidFill>
-                <a:latin typeface="Calibri"/>
+                <a:latin typeface="Calibri" panose="020F0502020204030204"/>
               </a:defRPr>
             </a:pPr>
             <a:r>
@@ -15383,7 +16493,7 @@
                 <a:solidFill>
                   <a:srgbClr val="2C3E50"/>
                 </a:solidFill>
-                <a:latin typeface="Calibri"/>
+                <a:latin typeface="Calibri" panose="020F0502020204030204"/>
               </a:defRPr>
             </a:pPr>
             <a:r>
@@ -15419,7 +16529,7 @@
                 <a:solidFill>
                   <a:srgbClr val="7F8C9A"/>
                 </a:solidFill>
-                <a:latin typeface="Calibri"/>
+                <a:latin typeface="Calibri" panose="020F0502020204030204"/>
               </a:defRPr>
             </a:pPr>
             <a:r>
@@ -15455,7 +16565,7 @@
                 <a:solidFill>
                   <a:srgbClr val="2C3E50"/>
                 </a:solidFill>
-                <a:latin typeface="Calibri"/>
+                <a:latin typeface="Calibri" panose="020F0502020204030204"/>
               </a:defRPr>
             </a:pPr>
             <a:r>
@@ -15577,7 +16687,7 @@
                 <a:solidFill>
                   <a:srgbClr val="FFFFFF"/>
                 </a:solidFill>
-                <a:latin typeface="Calibri"/>
+                <a:latin typeface="Calibri" panose="020F0502020204030204"/>
               </a:defRPr>
             </a:pPr>
             <a:r>
@@ -15613,7 +16723,7 @@
                 <a:solidFill>
                   <a:srgbClr val="F5F7FA"/>
                 </a:solidFill>
-                <a:latin typeface="Calibri"/>
+                <a:latin typeface="Calibri" panose="020F0502020204030204"/>
               </a:defRPr>
             </a:pPr>
             <a:r>
@@ -15649,7 +16759,7 @@
                 <a:solidFill>
                   <a:srgbClr val="7F8C9A"/>
                 </a:solidFill>
-                <a:latin typeface="Calibri"/>
+                <a:latin typeface="Calibri" panose="020F0502020204030204"/>
               </a:defRPr>
             </a:pPr>
             <a:r>
@@ -15685,7 +16795,7 @@
                 <a:solidFill>
                   <a:srgbClr val="2C3E50"/>
                 </a:solidFill>
-                <a:latin typeface="Calibri"/>
+                <a:latin typeface="Calibri" panose="020F0502020204030204"/>
               </a:defRPr>
             </a:pPr>
             <a:r>
@@ -15721,7 +16831,7 @@
                 <a:solidFill>
                   <a:srgbClr val="7F8C9A"/>
                 </a:solidFill>
-                <a:latin typeface="Calibri"/>
+                <a:latin typeface="Calibri" panose="020F0502020204030204"/>
               </a:defRPr>
             </a:pPr>
             <a:r>
@@ -15757,7 +16867,7 @@
                 <a:solidFill>
                   <a:srgbClr val="2C3E50"/>
                 </a:solidFill>
-                <a:latin typeface="Calibri"/>
+                <a:latin typeface="Calibri" panose="020F0502020204030204"/>
               </a:defRPr>
             </a:pPr>
             <a:r>
@@ -15793,7 +16903,7 @@
                 <a:solidFill>
                   <a:srgbClr val="7F8C9A"/>
                 </a:solidFill>
-                <a:latin typeface="Calibri"/>
+                <a:latin typeface="Calibri" panose="020F0502020204030204"/>
               </a:defRPr>
             </a:pPr>
             <a:r>
@@ -15829,7 +16939,7 @@
                 <a:solidFill>
                   <a:srgbClr val="2C3E50"/>
                 </a:solidFill>
-                <a:latin typeface="Calibri"/>
+                <a:latin typeface="Calibri" panose="020F0502020204030204"/>
               </a:defRPr>
             </a:pPr>
             <a:r>
@@ -15865,7 +16975,7 @@
                 <a:solidFill>
                   <a:srgbClr val="7F8C9A"/>
                 </a:solidFill>
-                <a:latin typeface="Calibri"/>
+                <a:latin typeface="Calibri" panose="020F0502020204030204"/>
               </a:defRPr>
             </a:pPr>
             <a:r>
@@ -15882,8 +16992,8 @@
 </p:sld>
 </file>
 
-<file path=ppt/slides/slide5.xml><?xml version="1.0" encoding="utf-8"?>
-<p:sld xmlns:a="http://schemas.openxmlformats.org/drawingml/2006/main" xmlns:p="http://schemas.openxmlformats.org/presentationml/2006/main" xmlns:r="http://schemas.openxmlformats.org/officeDocument/2006/relationships">
+<file path=ppt/slides/slide6.xml><?xml version="1.0" encoding="utf-8"?>
+<p:sld xmlns:a="http://schemas.openxmlformats.org/drawingml/2006/main" xmlns:r="http://schemas.openxmlformats.org/officeDocument/2006/relationships" xmlns:p="http://schemas.openxmlformats.org/presentationml/2006/main">
   <p:cSld>
     <p:bg>
       <p:bgPr>
@@ -15970,7 +17080,7 @@
                 <a:solidFill>
                   <a:srgbClr val="FFFFFF"/>
                 </a:solidFill>
-                <a:latin typeface="Calibri"/>
+                <a:latin typeface="Calibri" panose="020F0502020204030204"/>
               </a:defRPr>
             </a:pPr>
             <a:r>
@@ -16016,7 +17126,7 @@
                           <a:solidFill>
                             <a:srgbClr val="FFFFFF"/>
                           </a:solidFill>
-                          <a:latin typeface="Calibri"/>
+                          <a:latin typeface="Calibri" panose="020F0502020204030204"/>
                         </a:defRPr>
                       </a:pPr>
                       <a:r>
@@ -16040,7 +17150,7 @@
                           <a:solidFill>
                             <a:srgbClr val="FFFFFF"/>
                           </a:solidFill>
-                          <a:latin typeface="Calibri"/>
+                          <a:latin typeface="Calibri" panose="020F0502020204030204"/>
                         </a:defRPr>
                       </a:pPr>
                       <a:r>
@@ -16064,7 +17174,7 @@
                           <a:solidFill>
                             <a:srgbClr val="FFFFFF"/>
                           </a:solidFill>
-                          <a:latin typeface="Calibri"/>
+                          <a:latin typeface="Calibri" panose="020F0502020204030204"/>
                         </a:defRPr>
                       </a:pPr>
                       <a:r>
@@ -16088,7 +17198,7 @@
                           <a:solidFill>
                             <a:srgbClr val="FFFFFF"/>
                           </a:solidFill>
-                          <a:latin typeface="Calibri"/>
+                          <a:latin typeface="Calibri" panose="020F0502020204030204"/>
                         </a:defRPr>
                       </a:pPr>
                       <a:r>
@@ -16112,7 +17222,7 @@
                           <a:solidFill>
                             <a:srgbClr val="FFFFFF"/>
                           </a:solidFill>
-                          <a:latin typeface="Calibri"/>
+                          <a:latin typeface="Calibri" panose="020F0502020204030204"/>
                         </a:defRPr>
                       </a:pPr>
                       <a:r>
@@ -16136,7 +17246,7 @@
                           <a:solidFill>
                             <a:srgbClr val="FFFFFF"/>
                           </a:solidFill>
-                          <a:latin typeface="Calibri"/>
+                          <a:latin typeface="Calibri" panose="020F0502020204030204"/>
                         </a:defRPr>
                       </a:pPr>
                       <a:r>
@@ -16162,7 +17272,7 @@
                           <a:solidFill>
                             <a:srgbClr val="2C3E50"/>
                           </a:solidFill>
-                          <a:latin typeface="Calibri"/>
+                          <a:latin typeface="Calibri" panose="020F0502020204030204"/>
                         </a:defRPr>
                       </a:pPr>
                       <a:r>
@@ -16186,7 +17296,7 @@
                           <a:solidFill>
                             <a:srgbClr val="2C3E50"/>
                           </a:solidFill>
-                          <a:latin typeface="Calibri"/>
+                          <a:latin typeface="Calibri" panose="020F0502020204030204"/>
                         </a:defRPr>
                       </a:pPr>
                       <a:r>
@@ -16210,7 +17320,7 @@
                           <a:solidFill>
                             <a:srgbClr val="2C3E50"/>
                           </a:solidFill>
-                          <a:latin typeface="Calibri"/>
+                          <a:latin typeface="Calibri" panose="020F0502020204030204"/>
                         </a:defRPr>
                       </a:pPr>
                       <a:r>
@@ -16234,7 +17344,7 @@
                           <a:solidFill>
                             <a:srgbClr val="2C3E50"/>
                           </a:solidFill>
-                          <a:latin typeface="Calibri"/>
+                          <a:latin typeface="Calibri" panose="020F0502020204030204"/>
                         </a:defRPr>
                       </a:pPr>
                       <a:r>
@@ -16258,7 +17368,7 @@
                           <a:solidFill>
                             <a:srgbClr val="2C3E50"/>
                           </a:solidFill>
-                          <a:latin typeface="Calibri"/>
+                          <a:latin typeface="Calibri" panose="020F0502020204030204"/>
                         </a:defRPr>
                       </a:pPr>
                       <a:r>
@@ -16282,7 +17392,7 @@
                           <a:solidFill>
                             <a:srgbClr val="2C3E50"/>
                           </a:solidFill>
-                          <a:latin typeface="Calibri"/>
+                          <a:latin typeface="Calibri" panose="020F0502020204030204"/>
                         </a:defRPr>
                       </a:pPr>
                       <a:r>
@@ -16308,7 +17418,7 @@
                           <a:solidFill>
                             <a:srgbClr val="2C3E50"/>
                           </a:solidFill>
-                          <a:latin typeface="Calibri"/>
+                          <a:latin typeface="Calibri" panose="020F0502020204030204"/>
                         </a:defRPr>
                       </a:pPr>
                       <a:r>
@@ -16332,7 +17442,7 @@
                           <a:solidFill>
                             <a:srgbClr val="2C3E50"/>
                           </a:solidFill>
-                          <a:latin typeface="Calibri"/>
+                          <a:latin typeface="Calibri" panose="020F0502020204030204"/>
                         </a:defRPr>
                       </a:pPr>
                       <a:r>
@@ -16356,7 +17466,7 @@
                           <a:solidFill>
                             <a:srgbClr val="2C3E50"/>
                           </a:solidFill>
-                          <a:latin typeface="Calibri"/>
+                          <a:latin typeface="Calibri" panose="020F0502020204030204"/>
                         </a:defRPr>
                       </a:pPr>
                       <a:r>
@@ -16380,7 +17490,7 @@
                           <a:solidFill>
                             <a:srgbClr val="2C3E50"/>
                           </a:solidFill>
-                          <a:latin typeface="Calibri"/>
+                          <a:latin typeface="Calibri" panose="020F0502020204030204"/>
                         </a:defRPr>
                       </a:pPr>
                       <a:r>
@@ -16404,7 +17514,7 @@
                           <a:solidFill>
                             <a:srgbClr val="2C3E50"/>
                           </a:solidFill>
-                          <a:latin typeface="Calibri"/>
+                          <a:latin typeface="Calibri" panose="020F0502020204030204"/>
                         </a:defRPr>
                       </a:pPr>
                       <a:r>
@@ -16428,7 +17538,7 @@
                           <a:solidFill>
                             <a:srgbClr val="2C3E50"/>
                           </a:solidFill>
-                          <a:latin typeface="Calibri"/>
+                          <a:latin typeface="Calibri" panose="020F0502020204030204"/>
                         </a:defRPr>
                       </a:pPr>
                       <a:r>
@@ -16454,7 +17564,7 @@
                           <a:solidFill>
                             <a:srgbClr val="1A3A5C"/>
                           </a:solidFill>
-                          <a:latin typeface="Calibri"/>
+                          <a:latin typeface="Calibri" panose="020F0502020204030204"/>
                         </a:defRPr>
                       </a:pPr>
                       <a:r>
@@ -16478,7 +17588,7 @@
                           <a:solidFill>
                             <a:srgbClr val="1A3A5C"/>
                           </a:solidFill>
-                          <a:latin typeface="Calibri"/>
+                          <a:latin typeface="Calibri" panose="020F0502020204030204"/>
                         </a:defRPr>
                       </a:pPr>
                       <a:r>
@@ -16502,7 +17612,7 @@
                           <a:solidFill>
                             <a:srgbClr val="1A3A5C"/>
                           </a:solidFill>
-                          <a:latin typeface="Calibri"/>
+                          <a:latin typeface="Calibri" panose="020F0502020204030204"/>
                         </a:defRPr>
                       </a:pPr>
                       <a:r>
@@ -16526,7 +17636,7 @@
                           <a:solidFill>
                             <a:srgbClr val="1A3A5C"/>
                           </a:solidFill>
-                          <a:latin typeface="Calibri"/>
+                          <a:latin typeface="Calibri" panose="020F0502020204030204"/>
                         </a:defRPr>
                       </a:pPr>
                       <a:r>
@@ -16550,7 +17660,7 @@
                           <a:solidFill>
                             <a:srgbClr val="1A3A5C"/>
                           </a:solidFill>
-                          <a:latin typeface="Calibri"/>
+                          <a:latin typeface="Calibri" panose="020F0502020204030204"/>
                         </a:defRPr>
                       </a:pPr>
                       <a:r>
@@ -16574,7 +17684,7 @@
                           <a:solidFill>
                             <a:srgbClr val="1A3A5C"/>
                           </a:solidFill>
-                          <a:latin typeface="Calibri"/>
+                          <a:latin typeface="Calibri" panose="020F0502020204030204"/>
                         </a:defRPr>
                       </a:pPr>
                       <a:r>
@@ -16663,7 +17773,7 @@
                 <a:solidFill>
                   <a:srgbClr val="2E86AB"/>
                 </a:solidFill>
-                <a:latin typeface="Calibri"/>
+                <a:latin typeface="Calibri" panose="020F0502020204030204"/>
               </a:defRPr>
             </a:pPr>
             <a:r>
@@ -16699,7 +17809,7 @@
                 <a:solidFill>
                   <a:srgbClr val="2C3E50"/>
                 </a:solidFill>
-                <a:latin typeface="Calibri"/>
+                <a:latin typeface="Calibri" panose="020F0502020204030204"/>
               </a:defRPr>
             </a:pPr>
           </a:p>
@@ -16712,7 +17822,7 @@
                 <a:solidFill>
                   <a:srgbClr val="2C3E50"/>
                 </a:solidFill>
-                <a:latin typeface="Calibri"/>
+                <a:latin typeface="Calibri" panose="020F0502020204030204"/>
               </a:defRPr>
             </a:pPr>
             <a:r>
@@ -16728,7 +17838,7 @@
                 <a:solidFill>
                   <a:srgbClr val="2C3E50"/>
                 </a:solidFill>
-                <a:latin typeface="Calibri"/>
+                <a:latin typeface="Calibri" panose="020F0502020204030204"/>
               </a:defRPr>
             </a:pPr>
             <a:r>
@@ -16744,7 +17854,7 @@
                 <a:solidFill>
                   <a:srgbClr val="2C3E50"/>
                 </a:solidFill>
-                <a:latin typeface="Calibri"/>
+                <a:latin typeface="Calibri" panose="020F0502020204030204"/>
               </a:defRPr>
             </a:pPr>
             <a:r>
@@ -16780,7 +17890,7 @@
                 <a:solidFill>
                   <a:srgbClr val="7F8C9A"/>
                 </a:solidFill>
-                <a:latin typeface="Calibri"/>
+                <a:latin typeface="Calibri" panose="020F0502020204030204"/>
               </a:defRPr>
             </a:pPr>
             <a:r>
@@ -16797,8 +17907,8 @@
 </p:sld>
 </file>
 
-<file path=ppt/slides/slide6.xml><?xml version="1.0" encoding="utf-8"?>
-<p:sld xmlns:a="http://schemas.openxmlformats.org/drawingml/2006/main" xmlns:p="http://schemas.openxmlformats.org/presentationml/2006/main" xmlns:r="http://schemas.openxmlformats.org/officeDocument/2006/relationships">
+<file path=ppt/slides/slide7.xml><?xml version="1.0" encoding="utf-8"?>
+<p:sld xmlns:a="http://schemas.openxmlformats.org/drawingml/2006/main" xmlns:r="http://schemas.openxmlformats.org/officeDocument/2006/relationships" xmlns:p="http://schemas.openxmlformats.org/presentationml/2006/main">
   <p:cSld>
     <p:bg>
       <p:bgPr>
@@ -16842,7 +17952,7 @@
                 <a:solidFill>
                   <a:srgbClr val="FFFFFF"/>
                 </a:solidFill>
-                <a:latin typeface="Calibri"/>
+                <a:latin typeface="Calibri" panose="020F0502020204030204"/>
               </a:defRPr>
             </a:pPr>
             <a:r>
@@ -16878,7 +17988,7 @@
                 <a:solidFill>
                   <a:srgbClr val="BBCCDD"/>
                 </a:solidFill>
-                <a:latin typeface="Calibri"/>
+                <a:latin typeface="Calibri" panose="020F0502020204030204"/>
               </a:defRPr>
             </a:pPr>
             <a:r>
@@ -17000,7 +18110,7 @@
                 <a:solidFill>
                   <a:srgbClr val="FFFFFF"/>
                 </a:solidFill>
-                <a:latin typeface="Calibri"/>
+                <a:latin typeface="Calibri" panose="020F0502020204030204"/>
               </a:defRPr>
             </a:pPr>
             <a:r>
@@ -17036,7 +18146,7 @@
                 <a:solidFill>
                   <a:srgbClr val="FFFFFF"/>
                 </a:solidFill>
-                <a:latin typeface="Calibri"/>
+                <a:latin typeface="Calibri" panose="020F0502020204030204"/>
               </a:defRPr>
             </a:pPr>
             <a:r>
@@ -17072,7 +18182,7 @@
                 <a:solidFill>
                   <a:srgbClr val="F5F7FA"/>
                 </a:solidFill>
-                <a:latin typeface="Calibri"/>
+                <a:latin typeface="Calibri" panose="020F0502020204030204"/>
               </a:defRPr>
             </a:pPr>
             <a:r>
@@ -17202,7 +18312,7 @@
                 <a:solidFill>
                   <a:srgbClr val="FFFFFF"/>
                 </a:solidFill>
-                <a:latin typeface="Calibri"/>
+                <a:latin typeface="Calibri" panose="020F0502020204030204"/>
               </a:defRPr>
             </a:pPr>
             <a:r>
@@ -17238,7 +18348,7 @@
                 <a:solidFill>
                   <a:srgbClr val="FFFFFF"/>
                 </a:solidFill>
-                <a:latin typeface="Calibri"/>
+                <a:latin typeface="Calibri" panose="020F0502020204030204"/>
               </a:defRPr>
             </a:pPr>
             <a:r>
@@ -17274,7 +18384,7 @@
                 <a:solidFill>
                   <a:srgbClr val="F5F7FA"/>
                 </a:solidFill>
-                <a:latin typeface="Calibri"/>
+                <a:latin typeface="Calibri" panose="020F0502020204030204"/>
               </a:defRPr>
             </a:pPr>
             <a:r>
@@ -17404,7 +18514,7 @@
                 <a:solidFill>
                   <a:srgbClr val="FFFFFF"/>
                 </a:solidFill>
-                <a:latin typeface="Calibri"/>
+                <a:latin typeface="Calibri" panose="020F0502020204030204"/>
               </a:defRPr>
             </a:pPr>
             <a:r>
@@ -17440,7 +18550,7 @@
                 <a:solidFill>
                   <a:srgbClr val="FFFFFF"/>
                 </a:solidFill>
-                <a:latin typeface="Calibri"/>
+                <a:latin typeface="Calibri" panose="020F0502020204030204"/>
               </a:defRPr>
             </a:pPr>
             <a:r>
@@ -17476,7 +18586,7 @@
                 <a:solidFill>
                   <a:srgbClr val="F5F7FA"/>
                 </a:solidFill>
-                <a:latin typeface="Calibri"/>
+                <a:latin typeface="Calibri" panose="020F0502020204030204"/>
               </a:defRPr>
             </a:pPr>
             <a:r>
@@ -17563,7 +18673,7 @@
                 <a:solidFill>
                   <a:srgbClr val="F18F01"/>
                 </a:solidFill>
-                <a:latin typeface="Calibri"/>
+                <a:latin typeface="Calibri" panose="020F0502020204030204"/>
               </a:defRPr>
             </a:pPr>
             <a:r>
@@ -17609,7 +18719,7 @@
                           <a:solidFill>
                             <a:srgbClr val="FFFFFF"/>
                           </a:solidFill>
-                          <a:latin typeface="Calibri"/>
+                          <a:latin typeface="Calibri" panose="020F0502020204030204"/>
                         </a:defRPr>
                       </a:pPr>
                       <a:r>
@@ -17633,7 +18743,7 @@
                           <a:solidFill>
                             <a:srgbClr val="FFFFFF"/>
                           </a:solidFill>
-                          <a:latin typeface="Calibri"/>
+                          <a:latin typeface="Calibri" panose="020F0502020204030204"/>
                         </a:defRPr>
                       </a:pPr>
                       <a:r>
@@ -17657,7 +18767,7 @@
                           <a:solidFill>
                             <a:srgbClr val="FFFFFF"/>
                           </a:solidFill>
-                          <a:latin typeface="Calibri"/>
+                          <a:latin typeface="Calibri" panose="020F0502020204030204"/>
                         </a:defRPr>
                       </a:pPr>
                       <a:r>
@@ -17681,7 +18791,7 @@
                           <a:solidFill>
                             <a:srgbClr val="FFFFFF"/>
                           </a:solidFill>
-                          <a:latin typeface="Calibri"/>
+                          <a:latin typeface="Calibri" panose="020F0502020204030204"/>
                         </a:defRPr>
                       </a:pPr>
                       <a:r>
@@ -17705,7 +18815,7 @@
                           <a:solidFill>
                             <a:srgbClr val="FFFFFF"/>
                           </a:solidFill>
-                          <a:latin typeface="Calibri"/>
+                          <a:latin typeface="Calibri" panose="020F0502020204030204"/>
                         </a:defRPr>
                       </a:pPr>
                       <a:r>
@@ -17729,7 +18839,7 @@
                           <a:solidFill>
                             <a:srgbClr val="FFFFFF"/>
                           </a:solidFill>
-                          <a:latin typeface="Calibri"/>
+                          <a:latin typeface="Calibri" panose="020F0502020204030204"/>
                         </a:defRPr>
                       </a:pPr>
                       <a:r>
@@ -17755,7 +18865,7 @@
                           <a:solidFill>
                             <a:srgbClr val="2C3E50"/>
                           </a:solidFill>
-                          <a:latin typeface="Calibri"/>
+                          <a:latin typeface="Calibri" panose="020F0502020204030204"/>
                         </a:defRPr>
                       </a:pPr>
                       <a:r>
@@ -17779,7 +18889,7 @@
                           <a:solidFill>
                             <a:srgbClr val="2C3E50"/>
                           </a:solidFill>
-                          <a:latin typeface="Calibri"/>
+                          <a:latin typeface="Calibri" panose="020F0502020204030204"/>
                         </a:defRPr>
                       </a:pPr>
                       <a:r>
@@ -17803,7 +18913,7 @@
                           <a:solidFill>
                             <a:srgbClr val="2C3E50"/>
                           </a:solidFill>
-                          <a:latin typeface="Calibri"/>
+                          <a:latin typeface="Calibri" panose="020F0502020204030204"/>
                         </a:defRPr>
                       </a:pPr>
                       <a:r>
@@ -17827,7 +18937,7 @@
                           <a:solidFill>
                             <a:srgbClr val="2C3E50"/>
                           </a:solidFill>
-                          <a:latin typeface="Calibri"/>
+                          <a:latin typeface="Calibri" panose="020F0502020204030204"/>
                         </a:defRPr>
                       </a:pPr>
                       <a:r>
@@ -17851,7 +18961,7 @@
                           <a:solidFill>
                             <a:srgbClr val="2C3E50"/>
                           </a:solidFill>
-                          <a:latin typeface="Calibri"/>
+                          <a:latin typeface="Calibri" panose="020F0502020204030204"/>
                         </a:defRPr>
                       </a:pPr>
                       <a:r>
@@ -17875,7 +18985,7 @@
                           <a:solidFill>
                             <a:srgbClr val="2C3E50"/>
                           </a:solidFill>
-                          <a:latin typeface="Calibri"/>
+                          <a:latin typeface="Calibri" panose="020F0502020204030204"/>
                         </a:defRPr>
                       </a:pPr>
                       <a:r>
@@ -17901,7 +19011,7 @@
                           <a:solidFill>
                             <a:srgbClr val="2C3E50"/>
                           </a:solidFill>
-                          <a:latin typeface="Calibri"/>
+                          <a:latin typeface="Calibri" panose="020F0502020204030204"/>
                         </a:defRPr>
                       </a:pPr>
                       <a:r>
@@ -17925,7 +19035,7 @@
                           <a:solidFill>
                             <a:srgbClr val="2C3E50"/>
                           </a:solidFill>
-                          <a:latin typeface="Calibri"/>
+                          <a:latin typeface="Calibri" panose="020F0502020204030204"/>
                         </a:defRPr>
                       </a:pPr>
                       <a:r>
@@ -17949,7 +19059,7 @@
                           <a:solidFill>
                             <a:srgbClr val="2C3E50"/>
                           </a:solidFill>
-                          <a:latin typeface="Calibri"/>
+                          <a:latin typeface="Calibri" panose="020F0502020204030204"/>
                         </a:defRPr>
                       </a:pPr>
                       <a:r>
@@ -17973,7 +19083,7 @@
                           <a:solidFill>
                             <a:srgbClr val="2C3E50"/>
                           </a:solidFill>
-                          <a:latin typeface="Calibri"/>
+                          <a:latin typeface="Calibri" panose="020F0502020204030204"/>
                         </a:defRPr>
                       </a:pPr>
                       <a:r>
@@ -17997,7 +19107,7 @@
                           <a:solidFill>
                             <a:srgbClr val="2C3E50"/>
                           </a:solidFill>
-                          <a:latin typeface="Calibri"/>
+                          <a:latin typeface="Calibri" panose="020F0502020204030204"/>
                         </a:defRPr>
                       </a:pPr>
                       <a:r>
@@ -18021,7 +19131,7 @@
                           <a:solidFill>
                             <a:srgbClr val="2C3E50"/>
                           </a:solidFill>
-                          <a:latin typeface="Calibri"/>
+                          <a:latin typeface="Calibri" panose="020F0502020204030204"/>
                         </a:defRPr>
                       </a:pPr>
                       <a:r>
@@ -18047,7 +19157,7 @@
                           <a:solidFill>
                             <a:srgbClr val="2C3E50"/>
                           </a:solidFill>
-                          <a:latin typeface="Calibri"/>
+                          <a:latin typeface="Calibri" panose="020F0502020204030204"/>
                         </a:defRPr>
                       </a:pPr>
                       <a:r>
@@ -18071,7 +19181,7 @@
                           <a:solidFill>
                             <a:srgbClr val="2C3E50"/>
                           </a:solidFill>
-                          <a:latin typeface="Calibri"/>
+                          <a:latin typeface="Calibri" panose="020F0502020204030204"/>
                         </a:defRPr>
                       </a:pPr>
                       <a:r>
@@ -18095,7 +19205,7 @@
                           <a:solidFill>
                             <a:srgbClr val="2C3E50"/>
                           </a:solidFill>
-                          <a:latin typeface="Calibri"/>
+                          <a:latin typeface="Calibri" panose="020F0502020204030204"/>
                         </a:defRPr>
                       </a:pPr>
                       <a:r>
@@ -18119,7 +19229,7 @@
                           <a:solidFill>
                             <a:srgbClr val="2C3E50"/>
                           </a:solidFill>
-                          <a:latin typeface="Calibri"/>
+                          <a:latin typeface="Calibri" panose="020F0502020204030204"/>
                         </a:defRPr>
                       </a:pPr>
                       <a:r>
@@ -18143,7 +19253,7 @@
                           <a:solidFill>
                             <a:srgbClr val="2C3E50"/>
                           </a:solidFill>
-                          <a:latin typeface="Calibri"/>
+                          <a:latin typeface="Calibri" panose="020F0502020204030204"/>
                         </a:defRPr>
                       </a:pPr>
                       <a:r>
@@ -18167,7 +19277,7 @@
                           <a:solidFill>
                             <a:srgbClr val="2C3E50"/>
                           </a:solidFill>
-                          <a:latin typeface="Calibri"/>
+                          <a:latin typeface="Calibri" panose="020F0502020204030204"/>
                         </a:defRPr>
                       </a:pPr>
                       <a:r>
@@ -18213,7 +19323,7 @@
                 <a:solidFill>
                   <a:srgbClr val="7F8C9A"/>
                 </a:solidFill>
-                <a:latin typeface="Calibri"/>
+                <a:latin typeface="Calibri" panose="020F0502020204030204"/>
               </a:defRPr>
             </a:pPr>
             <a:r>
@@ -18265,8 +19375,8 @@
 </p:sld>
 </file>
 
-<file path=ppt/slides/slide7.xml><?xml version="1.0" encoding="utf-8"?>
-<p:sld xmlns:a="http://schemas.openxmlformats.org/drawingml/2006/main" xmlns:p="http://schemas.openxmlformats.org/presentationml/2006/main" xmlns:r="http://schemas.openxmlformats.org/officeDocument/2006/relationships">
+<file path=ppt/slides/slide8.xml><?xml version="1.0" encoding="utf-8"?>
+<p:sld xmlns:a="http://schemas.openxmlformats.org/drawingml/2006/main" xmlns:r="http://schemas.openxmlformats.org/officeDocument/2006/relationships" xmlns:p="http://schemas.openxmlformats.org/presentationml/2006/main">
   <p:cSld>
     <p:bg>
       <p:bgPr>
@@ -18353,7 +19463,7 @@
                 <a:solidFill>
                   <a:srgbClr val="FFFFFF"/>
                 </a:solidFill>
-                <a:latin typeface="Calibri"/>
+                <a:latin typeface="Calibri" panose="020F0502020204030204"/>
               </a:defRPr>
             </a:pPr>
             <a:r>
@@ -18475,7 +19585,7 @@
                 <a:solidFill>
                   <a:srgbClr val="7F8C9A"/>
                 </a:solidFill>
-                <a:latin typeface="Calibri"/>
+                <a:latin typeface="Calibri" panose="020F0502020204030204"/>
               </a:defRPr>
             </a:pPr>
             <a:r>
@@ -18511,7 +19621,7 @@
                 <a:solidFill>
                   <a:srgbClr val="2C3E50"/>
                 </a:solidFill>
-                <a:latin typeface="Calibri"/>
+                <a:latin typeface="Calibri" panose="020F0502020204030204"/>
               </a:defRPr>
             </a:pPr>
             <a:r>
@@ -18547,7 +19657,7 @@
                 <a:solidFill>
                   <a:srgbClr val="27AE60"/>
                 </a:solidFill>
-                <a:latin typeface="Calibri"/>
+                <a:latin typeface="Calibri" panose="020F0502020204030204"/>
               </a:defRPr>
             </a:pPr>
             <a:r>
@@ -18669,7 +19779,7 @@
                 <a:solidFill>
                   <a:srgbClr val="7F8C9A"/>
                 </a:solidFill>
-                <a:latin typeface="Calibri"/>
+                <a:latin typeface="Calibri" panose="020F0502020204030204"/>
               </a:defRPr>
             </a:pPr>
             <a:r>
@@ -18705,7 +19815,7 @@
                 <a:solidFill>
                   <a:srgbClr val="2C3E50"/>
                 </a:solidFill>
-                <a:latin typeface="Calibri"/>
+                <a:latin typeface="Calibri" panose="020F0502020204030204"/>
               </a:defRPr>
             </a:pPr>
             <a:r>
@@ -18741,7 +19851,7 @@
                 <a:solidFill>
                   <a:srgbClr val="F18F01"/>
                 </a:solidFill>
-                <a:latin typeface="Calibri"/>
+                <a:latin typeface="Calibri" panose="020F0502020204030204"/>
               </a:defRPr>
             </a:pPr>
             <a:r>
@@ -18863,7 +19973,7 @@
                 <a:solidFill>
                   <a:srgbClr val="7F8C9A"/>
                 </a:solidFill>
-                <a:latin typeface="Calibri"/>
+                <a:latin typeface="Calibri" panose="020F0502020204030204"/>
               </a:defRPr>
             </a:pPr>
             <a:r>
@@ -18899,7 +20009,7 @@
                 <a:solidFill>
                   <a:srgbClr val="2C3E50"/>
                 </a:solidFill>
-                <a:latin typeface="Calibri"/>
+                <a:latin typeface="Calibri" panose="020F0502020204030204"/>
               </a:defRPr>
             </a:pPr>
             <a:r>
@@ -18935,7 +20045,7 @@
                 <a:solidFill>
                   <a:srgbClr val="2E86AB"/>
                 </a:solidFill>
-                <a:latin typeface="Calibri"/>
+                <a:latin typeface="Calibri" panose="020F0502020204030204"/>
               </a:defRPr>
             </a:pPr>
             <a:r>
@@ -19014,7 +20124,7 @@
                 <a:solidFill>
                   <a:srgbClr val="1A3A5C"/>
                 </a:solidFill>
-                <a:latin typeface="Calibri"/>
+                <a:latin typeface="Calibri" panose="020F0502020204030204"/>
               </a:defRPr>
             </a:pPr>
             <a:r>
@@ -19050,7 +20160,7 @@
                 <a:solidFill>
                   <a:srgbClr val="2C3E50"/>
                 </a:solidFill>
-                <a:latin typeface="Calibri"/>
+                <a:latin typeface="Calibri" panose="020F0502020204030204"/>
               </a:defRPr>
             </a:pPr>
           </a:p>
@@ -19063,7 +20173,7 @@
                 <a:solidFill>
                   <a:srgbClr val="E74C3C"/>
                 </a:solidFill>
-                <a:latin typeface="Calibri"/>
+                <a:latin typeface="Calibri" panose="020F0502020204030204"/>
               </a:defRPr>
             </a:pPr>
             <a:r>
@@ -19076,7 +20186,7 @@
                 <a:solidFill>
                   <a:srgbClr val="2C3E50"/>
                 </a:solidFill>
-                <a:latin typeface="Calibri"/>
+                <a:latin typeface="Calibri" panose="020F0502020204030204"/>
               </a:defRPr>
             </a:pPr>
           </a:p>
@@ -19089,7 +20199,7 @@
                 <a:solidFill>
                   <a:srgbClr val="27AE60"/>
                 </a:solidFill>
-                <a:latin typeface="Calibri"/>
+                <a:latin typeface="Calibri" panose="020F0502020204030204"/>
               </a:defRPr>
             </a:pPr>
             <a:r>
@@ -19102,7 +20212,7 @@
                 <a:solidFill>
                   <a:srgbClr val="27AE60"/>
                 </a:solidFill>
-                <a:latin typeface="Calibri"/>
+                <a:latin typeface="Calibri" panose="020F0502020204030204"/>
               </a:defRPr>
             </a:pPr>
             <a:r>
@@ -19118,7 +20228,7 @@
                 <a:solidFill>
                   <a:srgbClr val="7F8C9A"/>
                 </a:solidFill>
-                <a:latin typeface="Calibri"/>
+                <a:latin typeface="Calibri" panose="020F0502020204030204"/>
               </a:defRPr>
             </a:pPr>
             <a:r>
@@ -19154,7 +20264,7 @@
                 <a:solidFill>
                   <a:srgbClr val="2C3E50"/>
                 </a:solidFill>
-                <a:latin typeface="Calibri"/>
+                <a:latin typeface="Calibri" panose="020F0502020204030204"/>
               </a:defRPr>
             </a:pPr>
             <a:r>
@@ -19212,7 +20322,7 @@
                 <a:solidFill>
                   <a:srgbClr val="7F8C9A"/>
                 </a:solidFill>
-                <a:latin typeface="Calibri"/>
+                <a:latin typeface="Calibri" panose="020F0502020204030204"/>
               </a:defRPr>
             </a:pPr>
             <a:r>
@@ -19264,8 +20374,8 @@
 </p:sld>
 </file>
 
-<file path=ppt/slides/slide8.xml><?xml version="1.0" encoding="utf-8"?>
-<p:sld xmlns:a="http://schemas.openxmlformats.org/drawingml/2006/main" xmlns:p="http://schemas.openxmlformats.org/presentationml/2006/main" xmlns:r="http://schemas.openxmlformats.org/officeDocument/2006/relationships">
+<file path=ppt/slides/slide9.xml><?xml version="1.0" encoding="utf-8"?>
+<p:sld xmlns:a="http://schemas.openxmlformats.org/drawingml/2006/main" xmlns:r="http://schemas.openxmlformats.org/officeDocument/2006/relationships" xmlns:p="http://schemas.openxmlformats.org/presentationml/2006/main">
   <p:cSld>
     <p:bg>
       <p:bgPr>
@@ -19352,7 +20462,7 @@
                 <a:solidFill>
                   <a:srgbClr val="FFFFFF"/>
                 </a:solidFill>
-                <a:latin typeface="Calibri"/>
+                <a:latin typeface="Calibri" panose="020F0502020204030204"/>
               </a:defRPr>
             </a:pPr>
             <a:r>
@@ -19397,7 +20507,7 @@
                           <a:solidFill>
                             <a:srgbClr val="FFFFFF"/>
                           </a:solidFill>
-                          <a:latin typeface="Calibri"/>
+                          <a:latin typeface="Calibri" panose="020F0502020204030204"/>
                         </a:defRPr>
                       </a:pPr>
                       <a:r>
@@ -19421,7 +20531,7 @@
                           <a:solidFill>
                             <a:srgbClr val="FFFFFF"/>
                           </a:solidFill>
-                          <a:latin typeface="Calibri"/>
+                          <a:latin typeface="Calibri" panose="020F0502020204030204"/>
                         </a:defRPr>
                       </a:pPr>
                       <a:r>
@@ -19445,7 +20555,7 @@
                           <a:solidFill>
                             <a:srgbClr val="FFFFFF"/>
                           </a:solidFill>
-                          <a:latin typeface="Calibri"/>
+                          <a:latin typeface="Calibri" panose="020F0502020204030204"/>
                         </a:defRPr>
                       </a:pPr>
                       <a:r>
@@ -19469,7 +20579,7 @@
                           <a:solidFill>
                             <a:srgbClr val="FFFFFF"/>
                           </a:solidFill>
-                          <a:latin typeface="Calibri"/>
+                          <a:latin typeface="Calibri" panose="020F0502020204030204"/>
                         </a:defRPr>
                       </a:pPr>
                       <a:r>
@@ -19493,7 +20603,7 @@
                           <a:solidFill>
                             <a:srgbClr val="FFFFFF"/>
                           </a:solidFill>
-                          <a:latin typeface="Calibri"/>
+                          <a:latin typeface="Calibri" panose="020F0502020204030204"/>
                         </a:defRPr>
                       </a:pPr>
                       <a:r>
@@ -19519,7 +20629,7 @@
                           <a:solidFill>
                             <a:srgbClr val="2C3E50"/>
                           </a:solidFill>
-                          <a:latin typeface="Calibri"/>
+                          <a:latin typeface="Calibri" panose="020F0502020204030204"/>
                         </a:defRPr>
                       </a:pPr>
                       <a:r>
@@ -19543,7 +20653,7 @@
                           <a:solidFill>
                             <a:srgbClr val="2C3E50"/>
                           </a:solidFill>
-                          <a:latin typeface="Calibri"/>
+                          <a:latin typeface="Calibri" panose="020F0502020204030204"/>
                         </a:defRPr>
                       </a:pPr>
                       <a:r>
@@ -19567,7 +20677,7 @@
                           <a:solidFill>
                             <a:srgbClr val="2C3E50"/>
                           </a:solidFill>
-                          <a:latin typeface="Calibri"/>
+                          <a:latin typeface="Calibri" panose="020F0502020204030204"/>
                         </a:defRPr>
                       </a:pPr>
                       <a:r>
@@ -19591,7 +20701,7 @@
                           <a:solidFill>
                             <a:srgbClr val="2C3E50"/>
                           </a:solidFill>
-                          <a:latin typeface="Calibri"/>
+                          <a:latin typeface="Calibri" panose="020F0502020204030204"/>
                         </a:defRPr>
                       </a:pPr>
                       <a:r>
@@ -19615,7 +20725,7 @@
                           <a:solidFill>
                             <a:srgbClr val="2C3E50"/>
                           </a:solidFill>
-                          <a:latin typeface="Calibri"/>
+                          <a:latin typeface="Calibri" panose="020F0502020204030204"/>
                         </a:defRPr>
                       </a:pPr>
                       <a:r>
@@ -19641,7 +20751,7 @@
                           <a:solidFill>
                             <a:srgbClr val="2C3E50"/>
                           </a:solidFill>
-                          <a:latin typeface="Calibri"/>
+                          <a:latin typeface="Calibri" panose="020F0502020204030204"/>
                         </a:defRPr>
                       </a:pPr>
                       <a:r>
@@ -19665,7 +20775,7 @@
                           <a:solidFill>
                             <a:srgbClr val="2C3E50"/>
                           </a:solidFill>
-                          <a:latin typeface="Calibri"/>
+                          <a:latin typeface="Calibri" panose="020F0502020204030204"/>
                         </a:defRPr>
                       </a:pPr>
                       <a:r>
@@ -19689,7 +20799,7 @@
                           <a:solidFill>
                             <a:srgbClr val="2C3E50"/>
                           </a:solidFill>
-                          <a:latin typeface="Calibri"/>
+                          <a:latin typeface="Calibri" panose="020F0502020204030204"/>
                         </a:defRPr>
                       </a:pPr>
                       <a:r>
@@ -19713,7 +20823,7 @@
                           <a:solidFill>
                             <a:srgbClr val="2C3E50"/>
                           </a:solidFill>
-                          <a:latin typeface="Calibri"/>
+                          <a:latin typeface="Calibri" panose="020F0502020204030204"/>
                         </a:defRPr>
                       </a:pPr>
                       <a:r>
@@ -19737,7 +20847,7 @@
                           <a:solidFill>
                             <a:srgbClr val="2C3E50"/>
                           </a:solidFill>
-                          <a:latin typeface="Calibri"/>
+                          <a:latin typeface="Calibri" panose="020F0502020204030204"/>
                         </a:defRPr>
                       </a:pPr>
                       <a:r>
@@ -19763,7 +20873,7 @@
                           <a:solidFill>
                             <a:srgbClr val="2C3E50"/>
                           </a:solidFill>
-                          <a:latin typeface="Calibri"/>
+                          <a:latin typeface="Calibri" panose="020F0502020204030204"/>
                         </a:defRPr>
                       </a:pPr>
                       <a:r>
@@ -19787,7 +20897,7 @@
                           <a:solidFill>
                             <a:srgbClr val="2C3E50"/>
                           </a:solidFill>
-                          <a:latin typeface="Calibri"/>
+                          <a:latin typeface="Calibri" panose="020F0502020204030204"/>
                         </a:defRPr>
                       </a:pPr>
                       <a:r>
@@ -19811,7 +20921,7 @@
                           <a:solidFill>
                             <a:srgbClr val="2C3E50"/>
                           </a:solidFill>
-                          <a:latin typeface="Calibri"/>
+                          <a:latin typeface="Calibri" panose="020F0502020204030204"/>
                         </a:defRPr>
                       </a:pPr>
                       <a:r>
@@ -19835,7 +20945,7 @@
                           <a:solidFill>
                             <a:srgbClr val="2C3E50"/>
                           </a:solidFill>
-                          <a:latin typeface="Calibri"/>
+                          <a:latin typeface="Calibri" panose="020F0502020204030204"/>
                         </a:defRPr>
                       </a:pPr>
                       <a:r>
@@ -19859,7 +20969,7 @@
                           <a:solidFill>
                             <a:srgbClr val="2C3E50"/>
                           </a:solidFill>
-                          <a:latin typeface="Calibri"/>
+                          <a:latin typeface="Calibri" panose="020F0502020204030204"/>
                         </a:defRPr>
                       </a:pPr>
                       <a:r>
@@ -19885,7 +20995,7 @@
                           <a:solidFill>
                             <a:srgbClr val="2C3E50"/>
                           </a:solidFill>
-                          <a:latin typeface="Calibri"/>
+                          <a:latin typeface="Calibri" panose="020F0502020204030204"/>
                         </a:defRPr>
                       </a:pPr>
                       <a:r>
@@ -19909,7 +21019,7 @@
                           <a:solidFill>
                             <a:srgbClr val="2C3E50"/>
                           </a:solidFill>
-                          <a:latin typeface="Calibri"/>
+                          <a:latin typeface="Calibri" panose="020F0502020204030204"/>
                         </a:defRPr>
                       </a:pPr>
                       <a:r>
@@ -19933,7 +21043,7 @@
                           <a:solidFill>
                             <a:srgbClr val="2C3E50"/>
                           </a:solidFill>
-                          <a:latin typeface="Calibri"/>
+                          <a:latin typeface="Calibri" panose="020F0502020204030204"/>
                         </a:defRPr>
                       </a:pPr>
                       <a:r>
@@ -19957,7 +21067,7 @@
                           <a:solidFill>
                             <a:srgbClr val="2C3E50"/>
                           </a:solidFill>
-                          <a:latin typeface="Calibri"/>
+                          <a:latin typeface="Calibri" panose="020F0502020204030204"/>
                         </a:defRPr>
                       </a:pPr>
                       <a:r>
@@ -19981,7 +21091,7 @@
                           <a:solidFill>
                             <a:srgbClr val="2C3E50"/>
                           </a:solidFill>
-                          <a:latin typeface="Calibri"/>
+                          <a:latin typeface="Calibri" panose="020F0502020204030204"/>
                         </a:defRPr>
                       </a:pPr>
                       <a:r>
@@ -20027,7 +21137,7 @@
                 <a:solidFill>
                   <a:srgbClr val="2E86AB"/>
                 </a:solidFill>
-                <a:latin typeface="Calibri"/>
+                <a:latin typeface="Calibri" panose="020F0502020204030204"/>
               </a:defRPr>
             </a:pPr>
             <a:r>
@@ -20071,7 +21181,7 @@
                           <a:solidFill>
                             <a:srgbClr val="FFFFFF"/>
                           </a:solidFill>
-                          <a:latin typeface="Calibri"/>
+                          <a:latin typeface="Calibri" panose="020F0502020204030204"/>
                         </a:defRPr>
                       </a:pPr>
                       <a:r>
@@ -20095,7 +21205,7 @@
                           <a:solidFill>
                             <a:srgbClr val="FFFFFF"/>
                           </a:solidFill>
-                          <a:latin typeface="Calibri"/>
+                          <a:latin typeface="Calibri" panose="020F0502020204030204"/>
                         </a:defRPr>
                       </a:pPr>
                       <a:r>
@@ -20119,7 +21229,7 @@
                           <a:solidFill>
                             <a:srgbClr val="FFFFFF"/>
                           </a:solidFill>
-                          <a:latin typeface="Calibri"/>
+                          <a:latin typeface="Calibri" panose="020F0502020204030204"/>
                         </a:defRPr>
                       </a:pPr>
                       <a:r>
@@ -20143,7 +21253,7 @@
                           <a:solidFill>
                             <a:srgbClr val="FFFFFF"/>
                           </a:solidFill>
-                          <a:latin typeface="Calibri"/>
+                          <a:latin typeface="Calibri" panose="020F0502020204030204"/>
                         </a:defRPr>
                       </a:pPr>
                       <a:r>
@@ -20169,7 +21279,7 @@
                           <a:solidFill>
                             <a:srgbClr val="2C3E50"/>
                           </a:solidFill>
-                          <a:latin typeface="Calibri"/>
+                          <a:latin typeface="Calibri" panose="020F0502020204030204"/>
                         </a:defRPr>
                       </a:pPr>
                       <a:r>
@@ -20193,7 +21303,7 @@
                           <a:solidFill>
                             <a:srgbClr val="2C3E50"/>
                           </a:solidFill>
-                          <a:latin typeface="Calibri"/>
+                          <a:latin typeface="Calibri" panose="020F0502020204030204"/>
                         </a:defRPr>
                       </a:pPr>
                       <a:r>
@@ -20217,7 +21327,7 @@
                           <a:solidFill>
                             <a:srgbClr val="2C3E50"/>
                           </a:solidFill>
-                          <a:latin typeface="Calibri"/>
+                          <a:latin typeface="Calibri" panose="020F0502020204030204"/>
                         </a:defRPr>
                       </a:pPr>
                       <a:r>
@@ -20241,7 +21351,7 @@
                           <a:solidFill>
                             <a:srgbClr val="2C3E50"/>
                           </a:solidFill>
-                          <a:latin typeface="Calibri"/>
+                          <a:latin typeface="Calibri" panose="020F0502020204030204"/>
                         </a:defRPr>
                       </a:pPr>
                       <a:r>
@@ -20267,7 +21377,7 @@
                           <a:solidFill>
                             <a:srgbClr val="2C3E50"/>
                           </a:solidFill>
-                          <a:latin typeface="Calibri"/>
+                          <a:latin typeface="Calibri" panose="020F0502020204030204"/>
                         </a:defRPr>
                       </a:pPr>
                       <a:r>
@@ -20291,7 +21401,7 @@
                           <a:solidFill>
                             <a:srgbClr val="2C3E50"/>
                           </a:solidFill>
-                          <a:latin typeface="Calibri"/>
+                          <a:latin typeface="Calibri" panose="020F0502020204030204"/>
                         </a:defRPr>
                       </a:pPr>
                       <a:r>
@@ -20315,7 +21425,7 @@
                           <a:solidFill>
                             <a:srgbClr val="2C3E50"/>
                           </a:solidFill>
-                          <a:latin typeface="Calibri"/>
+                          <a:latin typeface="Calibri" panose="020F0502020204030204"/>
                         </a:defRPr>
                       </a:pPr>
                       <a:r>
@@ -20339,7 +21449,7 @@
                           <a:solidFill>
                             <a:srgbClr val="2C3E50"/>
                           </a:solidFill>
-                          <a:latin typeface="Calibri"/>
+                          <a:latin typeface="Calibri" panose="020F0502020204030204"/>
                         </a:defRPr>
                       </a:pPr>
                       <a:r>
@@ -20365,7 +21475,7 @@
                           <a:solidFill>
                             <a:srgbClr val="2C3E50"/>
                           </a:solidFill>
-                          <a:latin typeface="Calibri"/>
+                          <a:latin typeface="Calibri" panose="020F0502020204030204"/>
                         </a:defRPr>
                       </a:pPr>
                       <a:r>
@@ -20389,7 +21499,7 @@
                           <a:solidFill>
                             <a:srgbClr val="2C3E50"/>
                           </a:solidFill>
-                          <a:latin typeface="Calibri"/>
+                          <a:latin typeface="Calibri" panose="020F0502020204030204"/>
                         </a:defRPr>
                       </a:pPr>
                       <a:r>
@@ -20413,7 +21523,7 @@
                           <a:solidFill>
                             <a:srgbClr val="2C3E50"/>
                           </a:solidFill>
-                          <a:latin typeface="Calibri"/>
+                          <a:latin typeface="Calibri" panose="020F0502020204030204"/>
                         </a:defRPr>
                       </a:pPr>
                       <a:r>
@@ -20437,7 +21547,7 @@
                           <a:solidFill>
                             <a:srgbClr val="2C3E50"/>
                           </a:solidFill>
-                          <a:latin typeface="Calibri"/>
+                          <a:latin typeface="Calibri" panose="020F0502020204030204"/>
                         </a:defRPr>
                       </a:pPr>
                       <a:r>
@@ -20463,7 +21573,7 @@
                           <a:solidFill>
                             <a:srgbClr val="2C3E50"/>
                           </a:solidFill>
-                          <a:latin typeface="Calibri"/>
+                          <a:latin typeface="Calibri" panose="020F0502020204030204"/>
                         </a:defRPr>
                       </a:pPr>
                       <a:r>
@@ -20487,7 +21597,7 @@
                           <a:solidFill>
                             <a:srgbClr val="2C3E50"/>
                           </a:solidFill>
-                          <a:latin typeface="Calibri"/>
+                          <a:latin typeface="Calibri" panose="020F0502020204030204"/>
                         </a:defRPr>
                       </a:pPr>
                       <a:r>
@@ -20511,7 +21621,7 @@
                           <a:solidFill>
                             <a:srgbClr val="2C3E50"/>
                           </a:solidFill>
-                          <a:latin typeface="Calibri"/>
+                          <a:latin typeface="Calibri" panose="020F0502020204030204"/>
                         </a:defRPr>
                       </a:pPr>
                       <a:r>
@@ -20535,7 +21645,7 @@
                           <a:solidFill>
                             <a:srgbClr val="2C3E50"/>
                           </a:solidFill>
-                          <a:latin typeface="Calibri"/>
+                          <a:latin typeface="Calibri" panose="020F0502020204030204"/>
                         </a:defRPr>
                       </a:pPr>
                       <a:r>
@@ -20624,7 +21734,7 @@
                 <a:solidFill>
                   <a:srgbClr val="2E86AB"/>
                 </a:solidFill>
-                <a:latin typeface="Calibri"/>
+                <a:latin typeface="Calibri" panose="020F0502020204030204"/>
               </a:defRPr>
             </a:pPr>
             <a:r>
@@ -20660,7 +21770,7 @@
                 <a:solidFill>
                   <a:srgbClr val="2C3E50"/>
                 </a:solidFill>
-                <a:latin typeface="Calibri"/>
+                <a:latin typeface="Calibri" panose="020F0502020204030204"/>
               </a:defRPr>
             </a:pPr>
           </a:p>
@@ -20673,7 +21783,7 @@
                 <a:solidFill>
                   <a:srgbClr val="2C3E50"/>
                 </a:solidFill>
-                <a:latin typeface="Calibri"/>
+                <a:latin typeface="Calibri" panose="020F0502020204030204"/>
               </a:defRPr>
             </a:pPr>
             <a:r>
@@ -20689,7 +21799,7 @@
                 <a:solidFill>
                   <a:srgbClr val="7F8C9A"/>
                 </a:solidFill>
-                <a:latin typeface="Calibri"/>
+                <a:latin typeface="Calibri" panose="020F0502020204030204"/>
               </a:defRPr>
             </a:pPr>
             <a:r>
@@ -20705,7 +21815,7 @@
                 <a:solidFill>
                   <a:srgbClr val="2C3E50"/>
                 </a:solidFill>
-                <a:latin typeface="Calibri"/>
+                <a:latin typeface="Calibri" panose="020F0502020204030204"/>
               </a:defRPr>
             </a:pPr>
             <a:r>
@@ -20721,7 +21831,7 @@
                 <a:solidFill>
                   <a:srgbClr val="2C3E50"/>
                 </a:solidFill>
-                <a:latin typeface="Calibri"/>
+                <a:latin typeface="Calibri" panose="020F0502020204030204"/>
               </a:defRPr>
             </a:pPr>
             <a:r>
@@ -20734,7 +21844,7 @@
                 <a:solidFill>
                   <a:srgbClr val="2C3E50"/>
                 </a:solidFill>
-                <a:latin typeface="Calibri"/>
+                <a:latin typeface="Calibri" panose="020F0502020204030204"/>
               </a:defRPr>
             </a:pPr>
           </a:p>
@@ -20747,7 +21857,7 @@
                 <a:solidFill>
                   <a:srgbClr val="1A3A5C"/>
                 </a:solidFill>
-                <a:latin typeface="Calibri"/>
+                <a:latin typeface="Calibri" panose="020F0502020204030204"/>
               </a:defRPr>
             </a:pPr>
             <a:r>
@@ -20760,7 +21870,7 @@
                 <a:solidFill>
                   <a:srgbClr val="1A3A5C"/>
                 </a:solidFill>
-                <a:latin typeface="Calibri"/>
+                <a:latin typeface="Calibri" panose="020F0502020204030204"/>
               </a:defRPr>
             </a:pPr>
             <a:r>
@@ -20796,1109 +21906,11 @@
                 <a:solidFill>
                   <a:srgbClr val="7F8C9A"/>
                 </a:solidFill>
-                <a:latin typeface="Calibri"/>
+                <a:latin typeface="Calibri" panose="020F0502020204030204"/>
               </a:defRPr>
             </a:pPr>
             <a:r>
               <a:t>8/18</a:t>
-            </a:r>
-          </a:p>
-        </p:txBody>
-      </p:sp>
-    </p:spTree>
-  </p:cSld>
-  <p:clrMapOvr>
-    <a:masterClrMapping/>
-  </p:clrMapOvr>
-</p:sld>
-</file>
-
-<file path=ppt/slides/slide9.xml><?xml version="1.0" encoding="utf-8"?>
-<p:sld xmlns:a="http://schemas.openxmlformats.org/drawingml/2006/main" xmlns:p="http://schemas.openxmlformats.org/presentationml/2006/main" xmlns:r="http://schemas.openxmlformats.org/officeDocument/2006/relationships">
-  <p:cSld>
-    <p:bg>
-      <p:bgPr>
-        <a:solidFill>
-          <a:srgbClr val="F5F7FA"/>
-        </a:solidFill>
-        <a:effectLst/>
-      </p:bgPr>
-    </p:bg>
-    <p:spTree>
-      <p:nvGrpSpPr>
-        <p:cNvPr id="1" name=""/>
-        <p:cNvGrpSpPr/>
-        <p:nvPr/>
-      </p:nvGrpSpPr>
-      <p:grpSpPr/>
-      <p:sp>
-        <p:nvSpPr>
-          <p:cNvPr id="2" name="Rectangle 1"/>
-          <p:cNvSpPr/>
-          <p:nvPr/>
-        </p:nvSpPr>
-        <p:spPr>
-          <a:xfrm>
-            <a:off x="0" y="0"/>
-            <a:ext cx="12191695" cy="914400"/>
-          </a:xfrm>
-          <a:prstGeom prst="rect">
-            <a:avLst/>
-          </a:prstGeom>
-          <a:solidFill>
-            <a:srgbClr val="1A3A5C"/>
-          </a:solidFill>
-          <a:ln>
-            <a:noFill/>
-          </a:ln>
-        </p:spPr>
-        <p:style>
-          <a:lnRef idx="1">
-            <a:schemeClr val="accent1"/>
-          </a:lnRef>
-          <a:fillRef idx="3">
-            <a:schemeClr val="accent1"/>
-          </a:fillRef>
-          <a:effectRef idx="2">
-            <a:schemeClr val="accent1"/>
-          </a:effectRef>
-          <a:fontRef idx="minor">
-            <a:schemeClr val="lt1"/>
-          </a:fontRef>
-        </p:style>
-        <p:txBody>
-          <a:bodyPr rtlCol="0" anchor="ctr"/>
-          <a:lstStyle/>
-          <a:p>
-            <a:pPr algn="ctr"/>
-          </a:p>
-        </p:txBody>
-      </p:sp>
-      <p:sp>
-        <p:nvSpPr>
-          <p:cNvPr id="3" name="TextBox 2"/>
-          <p:cNvSpPr txBox="1"/>
-          <p:nvPr/>
-        </p:nvSpPr>
-        <p:spPr>
-          <a:xfrm>
-            <a:off x="731520" y="137160"/>
-            <a:ext cx="9144000" cy="640080"/>
-          </a:xfrm>
-          <a:prstGeom prst="rect">
-            <a:avLst/>
-          </a:prstGeom>
-          <a:noFill/>
-        </p:spPr>
-        <p:txBody>
-          <a:bodyPr wrap="square">
-            <a:spAutoFit/>
-          </a:bodyPr>
-          <a:lstStyle/>
-          <a:p>
-            <a:pPr algn="l">
-              <a:defRPr sz="2800" b="1">
-                <a:solidFill>
-                  <a:srgbClr val="FFFFFF"/>
-                </a:solidFill>
-                <a:latin typeface="Calibri"/>
-              </a:defRPr>
-            </a:pPr>
-            <a:r>
-              <a:t>跨数据集验证：CIFAR-10</a:t>
-            </a:r>
-          </a:p>
-        </p:txBody>
-      </p:sp>
-      <p:graphicFrame>
-        <p:nvGraphicFramePr>
-          <p:cNvPr id="4" name="Table 3"/>
-          <p:cNvGraphicFramePr>
-            <a:graphicFrameLocks noGrp="1"/>
-          </p:cNvGraphicFramePr>
-          <p:nvPr/>
-        </p:nvGraphicFramePr>
-        <p:xfrm>
-          <a:off x="731520" y="1188720"/>
-          <a:ext cx="10515600" cy="2286000"/>
-        </p:xfrm>
-        <a:graphic>
-          <a:graphicData uri="http://schemas.openxmlformats.org/drawingml/2006/table">
-            <a:tbl>
-              <a:tblPr firstRow="1" bandRow="1">
-                <a:tableStyleId>{5C22544A-7EE6-4342-B048-85BDC9FD1C3A}</a:tableStyleId>
-              </a:tblPr>
-              <a:tblGrid>
-                <a:gridCol w="2628900"/>
-                <a:gridCol w="2628900"/>
-                <a:gridCol w="2628900"/>
-                <a:gridCol w="2628900"/>
-              </a:tblGrid>
-              <a:tr h="457200">
-                <a:tc>
-                  <a:txBody>
-                    <a:bodyPr/>
-                    <a:lstStyle/>
-                    <a:p>
-                      <a:pPr algn="ctr">
-                        <a:defRPr sz="1200" b="1">
-                          <a:solidFill>
-                            <a:srgbClr val="FFFFFF"/>
-                          </a:solidFill>
-                          <a:latin typeface="Calibri"/>
-                        </a:defRPr>
-                      </a:pPr>
-                      <a:r>
-                        <a:t>指标</a:t>
-                      </a:r>
-                    </a:p>
-                  </a:txBody>
-                  <a:tcPr anchor="ctr">
-                    <a:solidFill>
-                      <a:srgbClr val="1A3A5C"/>
-                    </a:solidFill>
-                  </a:tcPr>
-                </a:tc>
-                <a:tc>
-                  <a:txBody>
-                    <a:bodyPr/>
-                    <a:lstStyle/>
-                    <a:p>
-                      <a:pPr algn="ctr">
-                        <a:defRPr sz="1200" b="1">
-                          <a:solidFill>
-                            <a:srgbClr val="FFFFFF"/>
-                          </a:solidFill>
-                          <a:latin typeface="Calibri"/>
-                        </a:defRPr>
-                      </a:pPr>
-                      <a:r>
-                        <a:t>MNIST (ε=0.01)</a:t>
-                      </a:r>
-                    </a:p>
-                  </a:txBody>
-                  <a:tcPr anchor="ctr">
-                    <a:solidFill>
-                      <a:srgbClr val="1A3A5C"/>
-                    </a:solidFill>
-                  </a:tcPr>
-                </a:tc>
-                <a:tc>
-                  <a:txBody>
-                    <a:bodyPr/>
-                    <a:lstStyle/>
-                    <a:p>
-                      <a:pPr algn="ctr">
-                        <a:defRPr sz="1200" b="1">
-                          <a:solidFill>
-                            <a:srgbClr val="FFFFFF"/>
-                          </a:solidFill>
-                          <a:latin typeface="Calibri"/>
-                        </a:defRPr>
-                      </a:pPr>
-                      <a:r>
-                        <a:t>CIFAR-10 (ε=2/255)</a:t>
-                      </a:r>
-                    </a:p>
-                  </a:txBody>
-                  <a:tcPr anchor="ctr">
-                    <a:solidFill>
-                      <a:srgbClr val="1A3A5C"/>
-                    </a:solidFill>
-                  </a:tcPr>
-                </a:tc>
-                <a:tc>
-                  <a:txBody>
-                    <a:bodyPr/>
-                    <a:lstStyle/>
-                    <a:p>
-                      <a:pPr algn="ctr">
-                        <a:defRPr sz="1200" b="1">
-                          <a:solidFill>
-                            <a:srgbClr val="FFFFFF"/>
-                          </a:solidFill>
-                          <a:latin typeface="Calibri"/>
-                        </a:defRPr>
-                      </a:pPr>
-                      <a:r>
-                        <a:t>差距</a:t>
-                      </a:r>
-                    </a:p>
-                  </a:txBody>
-                  <a:tcPr anchor="ctr">
-                    <a:solidFill>
-                      <a:srgbClr val="1A3A5C"/>
-                    </a:solidFill>
-                  </a:tcPr>
-                </a:tc>
-              </a:tr>
-              <a:tr h="457200">
-                <a:tc>
-                  <a:txBody>
-                    <a:bodyPr/>
-                    <a:lstStyle/>
-                    <a:p>
-                      <a:pPr algn="ctr">
-                        <a:defRPr sz="1200">
-                          <a:solidFill>
-                            <a:srgbClr val="2C3E50"/>
-                          </a:solidFill>
-                          <a:latin typeface="Calibri"/>
-                        </a:defRPr>
-                      </a:pPr>
-                      <a:r>
-                        <a:t>CROWN VRA</a:t>
-                      </a:r>
-                    </a:p>
-                  </a:txBody>
-                  <a:tcPr anchor="ctr">
-                    <a:solidFill>
-                      <a:srgbClr val="FFFFFF"/>
-                    </a:solidFill>
-                  </a:tcPr>
-                </a:tc>
-                <a:tc>
-                  <a:txBody>
-                    <a:bodyPr/>
-                    <a:lstStyle/>
-                    <a:p>
-                      <a:pPr algn="ctr">
-                        <a:defRPr sz="1200">
-                          <a:solidFill>
-                            <a:srgbClr val="2C3E50"/>
-                          </a:solidFill>
-                          <a:latin typeface="Calibri"/>
-                        </a:defRPr>
-                      </a:pPr>
-                      <a:r>
-                        <a:t>98.0%</a:t>
-                      </a:r>
-                    </a:p>
-                  </a:txBody>
-                  <a:tcPr anchor="ctr">
-                    <a:solidFill>
-                      <a:srgbClr val="FFFFFF"/>
-                    </a:solidFill>
-                  </a:tcPr>
-                </a:tc>
-                <a:tc>
-                  <a:txBody>
-                    <a:bodyPr/>
-                    <a:lstStyle/>
-                    <a:p>
-                      <a:pPr algn="ctr">
-                        <a:defRPr sz="1200">
-                          <a:solidFill>
-                            <a:srgbClr val="2C3E50"/>
-                          </a:solidFill>
-                          <a:latin typeface="Calibri"/>
-                        </a:defRPr>
-                      </a:pPr>
-                      <a:r>
-                        <a:t>0.0%</a:t>
-                      </a:r>
-                    </a:p>
-                  </a:txBody>
-                  <a:tcPr anchor="ctr">
-                    <a:solidFill>
-                      <a:srgbClr val="FFFFFF"/>
-                    </a:solidFill>
-                  </a:tcPr>
-                </a:tc>
-                <a:tc>
-                  <a:txBody>
-                    <a:bodyPr/>
-                    <a:lstStyle/>
-                    <a:p>
-                      <a:pPr algn="ctr">
-                        <a:defRPr sz="1200">
-                          <a:solidFill>
-                            <a:srgbClr val="2C3E50"/>
-                          </a:solidFill>
-                          <a:latin typeface="Calibri"/>
-                        </a:defRPr>
-                      </a:pPr>
-                      <a:r>
-                        <a:t>断层</a:t>
-                      </a:r>
-                    </a:p>
-                  </a:txBody>
-                  <a:tcPr anchor="ctr">
-                    <a:solidFill>
-                      <a:srgbClr val="FFFFFF"/>
-                    </a:solidFill>
-                  </a:tcPr>
-                </a:tc>
-              </a:tr>
-              <a:tr h="457200">
-                <a:tc>
-                  <a:txBody>
-                    <a:bodyPr/>
-                    <a:lstStyle/>
-                    <a:p>
-                      <a:pPr algn="ctr">
-                        <a:defRPr sz="1200">
-                          <a:solidFill>
-                            <a:srgbClr val="2C3E50"/>
-                          </a:solidFill>
-                          <a:latin typeface="Calibri"/>
-                        </a:defRPr>
-                      </a:pPr>
-                      <a:r>
-                        <a:t>BaB VRA</a:t>
-                      </a:r>
-                    </a:p>
-                  </a:txBody>
-                  <a:tcPr anchor="ctr">
-                    <a:solidFill>
-                      <a:srgbClr val="FFFFFF"/>
-                    </a:solidFill>
-                  </a:tcPr>
-                </a:tc>
-                <a:tc>
-                  <a:txBody>
-                    <a:bodyPr/>
-                    <a:lstStyle/>
-                    <a:p>
-                      <a:pPr algn="ctr">
-                        <a:defRPr sz="1200">
-                          <a:solidFill>
-                            <a:srgbClr val="2C3E50"/>
-                          </a:solidFill>
-                          <a:latin typeface="Calibri"/>
-                        </a:defRPr>
-                      </a:pPr>
-                      <a:r>
-                        <a:t>100.0%</a:t>
-                      </a:r>
-                    </a:p>
-                  </a:txBody>
-                  <a:tcPr anchor="ctr">
-                    <a:solidFill>
-                      <a:srgbClr val="FFFFFF"/>
-                    </a:solidFill>
-                  </a:tcPr>
-                </a:tc>
-                <a:tc>
-                  <a:txBody>
-                    <a:bodyPr/>
-                    <a:lstStyle/>
-                    <a:p>
-                      <a:pPr algn="ctr">
-                        <a:defRPr sz="1200">
-                          <a:solidFill>
-                            <a:srgbClr val="2C3E50"/>
-                          </a:solidFill>
-                          <a:latin typeface="Calibri"/>
-                        </a:defRPr>
-                      </a:pPr>
-                      <a:r>
-                        <a:t>0.0%</a:t>
-                      </a:r>
-                    </a:p>
-                  </a:txBody>
-                  <a:tcPr anchor="ctr">
-                    <a:solidFill>
-                      <a:srgbClr val="FFFFFF"/>
-                    </a:solidFill>
-                  </a:tcPr>
-                </a:tc>
-                <a:tc>
-                  <a:txBody>
-                    <a:bodyPr/>
-                    <a:lstStyle/>
-                    <a:p>
-                      <a:pPr algn="ctr">
-                        <a:defRPr sz="1200">
-                          <a:solidFill>
-                            <a:srgbClr val="2C3E50"/>
-                          </a:solidFill>
-                          <a:latin typeface="Calibri"/>
-                        </a:defRPr>
-                      </a:pPr>
-                      <a:r>
-                        <a:t>断层</a:t>
-                      </a:r>
-                    </a:p>
-                  </a:txBody>
-                  <a:tcPr anchor="ctr">
-                    <a:solidFill>
-                      <a:srgbClr val="FFFFFF"/>
-                    </a:solidFill>
-                  </a:tcPr>
-                </a:tc>
-              </a:tr>
-              <a:tr h="457200">
-                <a:tc>
-                  <a:txBody>
-                    <a:bodyPr/>
-                    <a:lstStyle/>
-                    <a:p>
-                      <a:pPr algn="ctr">
-                        <a:defRPr sz="1200">
-                          <a:solidFill>
-                            <a:srgbClr val="2C3E50"/>
-                          </a:solidFill>
-                          <a:latin typeface="Calibri"/>
-                        </a:defRPr>
-                      </a:pPr>
-                      <a:r>
-                        <a:t>单样本耗时</a:t>
-                      </a:r>
-                    </a:p>
-                  </a:txBody>
-                  <a:tcPr anchor="ctr">
-                    <a:solidFill>
-                      <a:srgbClr val="FFFFFF"/>
-                    </a:solidFill>
-                  </a:tcPr>
-                </a:tc>
-                <a:tc>
-                  <a:txBody>
-                    <a:bodyPr/>
-                    <a:lstStyle/>
-                    <a:p>
-                      <a:pPr algn="ctr">
-                        <a:defRPr sz="1200">
-                          <a:solidFill>
-                            <a:srgbClr val="2C3E50"/>
-                          </a:solidFill>
-                          <a:latin typeface="Calibri"/>
-                        </a:defRPr>
-                      </a:pPr>
-                      <a:r>
-                        <a:t>~3s</a:t>
-                      </a:r>
-                    </a:p>
-                  </a:txBody>
-                  <a:tcPr anchor="ctr">
-                    <a:solidFill>
-                      <a:srgbClr val="FFFFFF"/>
-                    </a:solidFill>
-                  </a:tcPr>
-                </a:tc>
-                <a:tc>
-                  <a:txBody>
-                    <a:bodyPr/>
-                    <a:lstStyle/>
-                    <a:p>
-                      <a:pPr algn="ctr">
-                        <a:defRPr sz="1200">
-                          <a:solidFill>
-                            <a:srgbClr val="2C3E50"/>
-                          </a:solidFill>
-                          <a:latin typeface="Calibri"/>
-                        </a:defRPr>
-                      </a:pPr>
-                      <a:r>
-                        <a:t>~68s</a:t>
-                      </a:r>
-                    </a:p>
-                  </a:txBody>
-                  <a:tcPr anchor="ctr">
-                    <a:solidFill>
-                      <a:srgbClr val="FFFFFF"/>
-                    </a:solidFill>
-                  </a:tcPr>
-                </a:tc>
-                <a:tc>
-                  <a:txBody>
-                    <a:bodyPr/>
-                    <a:lstStyle/>
-                    <a:p>
-                      <a:pPr algn="ctr">
-                        <a:defRPr sz="1200">
-                          <a:solidFill>
-                            <a:srgbClr val="2C3E50"/>
-                          </a:solidFill>
-                          <a:latin typeface="Calibri"/>
-                        </a:defRPr>
-                      </a:pPr>
-                      <a:r>
-                        <a:t>~23×</a:t>
-                      </a:r>
-                    </a:p>
-                  </a:txBody>
-                  <a:tcPr anchor="ctr">
-                    <a:solidFill>
-                      <a:srgbClr val="FFFFFF"/>
-                    </a:solidFill>
-                  </a:tcPr>
-                </a:tc>
-              </a:tr>
-              <a:tr h="457200">
-                <a:tc>
-                  <a:txBody>
-                    <a:bodyPr/>
-                    <a:lstStyle/>
-                    <a:p>
-                      <a:pPr algn="ctr">
-                        <a:defRPr sz="1200">
-                          <a:solidFill>
-                            <a:srgbClr val="2C3E50"/>
-                          </a:solidFill>
-                          <a:latin typeface="Calibri"/>
-                        </a:defRPr>
-                      </a:pPr>
-                      <a:r>
-                        <a:t>PGD unsafe 检出</a:t>
-                      </a:r>
-                    </a:p>
-                  </a:txBody>
-                  <a:tcPr anchor="ctr">
-                    <a:solidFill>
-                      <a:srgbClr val="FFFFFF"/>
-                    </a:solidFill>
-                  </a:tcPr>
-                </a:tc>
-                <a:tc>
-                  <a:txBody>
-                    <a:bodyPr/>
-                    <a:lstStyle/>
-                    <a:p>
-                      <a:pPr algn="ctr">
-                        <a:defRPr sz="1200">
-                          <a:solidFill>
-                            <a:srgbClr val="2C3E50"/>
-                          </a:solidFill>
-                          <a:latin typeface="Calibri"/>
-                        </a:defRPr>
-                      </a:pPr>
-                      <a:r>
-                        <a:t>0%</a:t>
-                      </a:r>
-                    </a:p>
-                  </a:txBody>
-                  <a:tcPr anchor="ctr">
-                    <a:solidFill>
-                      <a:srgbClr val="FFFFFF"/>
-                    </a:solidFill>
-                  </a:tcPr>
-                </a:tc>
-                <a:tc>
-                  <a:txBody>
-                    <a:bodyPr/>
-                    <a:lstStyle/>
-                    <a:p>
-                      <a:pPr algn="ctr">
-                        <a:defRPr sz="1200">
-                          <a:solidFill>
-                            <a:srgbClr val="2C3E50"/>
-                          </a:solidFill>
-                          <a:latin typeface="Calibri"/>
-                        </a:defRPr>
-                      </a:pPr>
-                      <a:r>
-                        <a:t>80%</a:t>
-                      </a:r>
-                    </a:p>
-                  </a:txBody>
-                  <a:tcPr anchor="ctr">
-                    <a:solidFill>
-                      <a:srgbClr val="FFFFFF"/>
-                    </a:solidFill>
-                  </a:tcPr>
-                </a:tc>
-                <a:tc>
-                  <a:txBody>
-                    <a:bodyPr/>
-                    <a:lstStyle/>
-                    <a:p>
-                      <a:pPr algn="ctr">
-                        <a:defRPr sz="1200">
-                          <a:solidFill>
-                            <a:srgbClr val="2C3E50"/>
-                          </a:solidFill>
-                          <a:latin typeface="Calibri"/>
-                        </a:defRPr>
-                      </a:pPr>
-                      <a:r>
-                        <a:t>—</a:t>
-                      </a:r>
-                    </a:p>
-                  </a:txBody>
-                  <a:tcPr anchor="ctr">
-                    <a:solidFill>
-                      <a:srgbClr val="FFFFFF"/>
-                    </a:solidFill>
-                  </a:tcPr>
-                </a:tc>
-              </a:tr>
-            </a:tbl>
-          </a:graphicData>
-        </a:graphic>
-      </p:graphicFrame>
-      <p:sp>
-        <p:nvSpPr>
-          <p:cNvPr id="5" name="Rectangle 4"/>
-          <p:cNvSpPr/>
-          <p:nvPr/>
-        </p:nvSpPr>
-        <p:spPr>
-          <a:xfrm>
-            <a:off x="731520" y="3840480"/>
-            <a:ext cx="10515600" cy="2560320"/>
-          </a:xfrm>
-          <a:prstGeom prst="rect">
-            <a:avLst/>
-          </a:prstGeom>
-          <a:solidFill>
-            <a:srgbClr val="FFFFFF"/>
-          </a:solidFill>
-          <a:ln>
-            <a:noFill/>
-          </a:ln>
-        </p:spPr>
-        <p:style>
-          <a:lnRef idx="1">
-            <a:schemeClr val="accent1"/>
-          </a:lnRef>
-          <a:fillRef idx="3">
-            <a:schemeClr val="accent1"/>
-          </a:fillRef>
-          <a:effectRef idx="2">
-            <a:schemeClr val="accent1"/>
-          </a:effectRef>
-          <a:fontRef idx="minor">
-            <a:schemeClr val="lt1"/>
-          </a:fontRef>
-        </p:style>
-        <p:txBody>
-          <a:bodyPr rtlCol="0" anchor="ctr"/>
-          <a:lstStyle/>
-          <a:p>
-            <a:pPr algn="ctr"/>
-          </a:p>
-        </p:txBody>
-      </p:sp>
-      <p:sp>
-        <p:nvSpPr>
-          <p:cNvPr id="6" name="TextBox 5"/>
-          <p:cNvSpPr txBox="1"/>
-          <p:nvPr/>
-        </p:nvSpPr>
-        <p:spPr>
-          <a:xfrm>
-            <a:off x="1097280" y="4023360"/>
-            <a:ext cx="5486400" cy="365760"/>
-          </a:xfrm>
-          <a:prstGeom prst="rect">
-            <a:avLst/>
-          </a:prstGeom>
-          <a:noFill/>
-        </p:spPr>
-        <p:txBody>
-          <a:bodyPr wrap="square">
-            <a:spAutoFit/>
-          </a:bodyPr>
-          <a:lstStyle/>
-          <a:p>
-            <a:pPr algn="l">
-              <a:defRPr sz="2000" b="1">
-                <a:solidFill>
-                  <a:srgbClr val="2E86AB"/>
-                </a:solidFill>
-                <a:latin typeface="Calibri"/>
-              </a:defRPr>
-            </a:pPr>
-            <a:r>
-              <a:t>难度骤降的 5 因素复合作用</a:t>
-            </a:r>
-          </a:p>
-        </p:txBody>
-      </p:sp>
-      <p:sp>
-        <p:nvSpPr>
-          <p:cNvPr id="7" name="TextBox 6"/>
-          <p:cNvSpPr txBox="1"/>
-          <p:nvPr/>
-        </p:nvSpPr>
-        <p:spPr>
-          <a:xfrm>
-            <a:off x="1097280" y="4480560"/>
-            <a:ext cx="1828800" cy="274320"/>
-          </a:xfrm>
-          <a:prstGeom prst="rect">
-            <a:avLst/>
-          </a:prstGeom>
-          <a:noFill/>
-        </p:spPr>
-        <p:txBody>
-          <a:bodyPr wrap="square">
-            <a:spAutoFit/>
-          </a:bodyPr>
-          <a:lstStyle/>
-          <a:p>
-            <a:pPr algn="l">
-              <a:defRPr sz="1200" b="1">
-                <a:solidFill>
-                  <a:srgbClr val="1A3A5C"/>
-                </a:solidFill>
-                <a:latin typeface="Calibri"/>
-              </a:defRPr>
-            </a:pPr>
-            <a:r>
-              <a:t>  1. 输入维度</a:t>
-            </a:r>
-          </a:p>
-        </p:txBody>
-      </p:sp>
-      <p:sp>
-        <p:nvSpPr>
-          <p:cNvPr id="8" name="TextBox 7"/>
-          <p:cNvSpPr txBox="1"/>
-          <p:nvPr/>
-        </p:nvSpPr>
-        <p:spPr>
-          <a:xfrm>
-            <a:off x="2926080" y="4480560"/>
-            <a:ext cx="7772400" cy="274320"/>
-          </a:xfrm>
-          <a:prstGeom prst="rect">
-            <a:avLst/>
-          </a:prstGeom>
-          <a:noFill/>
-        </p:spPr>
-        <p:txBody>
-          <a:bodyPr wrap="square">
-            <a:spAutoFit/>
-          </a:bodyPr>
-          <a:lstStyle/>
-          <a:p>
-            <a:pPr algn="l">
-              <a:defRPr sz="1200" b="0">
-                <a:solidFill>
-                  <a:srgbClr val="2C3E50"/>
-                </a:solidFill>
-                <a:latin typeface="Calibri"/>
-              </a:defRPr>
-            </a:pPr>
-            <a:r>
-              <a:t>784 → 3072 (×3.9)</a:t>
-            </a:r>
-          </a:p>
-        </p:txBody>
-      </p:sp>
-      <p:sp>
-        <p:nvSpPr>
-          <p:cNvPr id="9" name="TextBox 8"/>
-          <p:cNvSpPr txBox="1"/>
-          <p:nvPr/>
-        </p:nvSpPr>
-        <p:spPr>
-          <a:xfrm>
-            <a:off x="1097280" y="4864608"/>
-            <a:ext cx="1828800" cy="274320"/>
-          </a:xfrm>
-          <a:prstGeom prst="rect">
-            <a:avLst/>
-          </a:prstGeom>
-          <a:noFill/>
-        </p:spPr>
-        <p:txBody>
-          <a:bodyPr wrap="square">
-            <a:spAutoFit/>
-          </a:bodyPr>
-          <a:lstStyle/>
-          <a:p>
-            <a:pPr algn="l">
-              <a:defRPr sz="1200" b="1">
-                <a:solidFill>
-                  <a:srgbClr val="1A3A5C"/>
-                </a:solidFill>
-                <a:latin typeface="Calibri"/>
-              </a:defRPr>
-            </a:pPr>
-            <a:r>
-              <a:t>  2. RGB 通道</a:t>
-            </a:r>
-          </a:p>
-        </p:txBody>
-      </p:sp>
-      <p:sp>
-        <p:nvSpPr>
-          <p:cNvPr id="10" name="TextBox 9"/>
-          <p:cNvSpPr txBox="1"/>
-          <p:nvPr/>
-        </p:nvSpPr>
-        <p:spPr>
-          <a:xfrm>
-            <a:off x="2926080" y="4864608"/>
-            <a:ext cx="7772400" cy="274320"/>
-          </a:xfrm>
-          <a:prstGeom prst="rect">
-            <a:avLst/>
-          </a:prstGeom>
-          <a:noFill/>
-        </p:spPr>
-        <p:txBody>
-          <a:bodyPr wrap="square">
-            <a:spAutoFit/>
-          </a:bodyPr>
-          <a:lstStyle/>
-          <a:p>
-            <a:pPr algn="l">
-              <a:defRPr sz="1200" b="0">
-                <a:solidFill>
-                  <a:srgbClr val="2C3E50"/>
-                </a:solidFill>
-                <a:latin typeface="Calibri"/>
-              </a:defRPr>
-            </a:pPr>
-            <a:r>
-              <a:t>灰度 → 3 通道扰动组合爆炸</a:t>
-            </a:r>
-          </a:p>
-        </p:txBody>
-      </p:sp>
-      <p:sp>
-        <p:nvSpPr>
-          <p:cNvPr id="11" name="TextBox 10"/>
-          <p:cNvSpPr txBox="1"/>
-          <p:nvPr/>
-        </p:nvSpPr>
-        <p:spPr>
-          <a:xfrm>
-            <a:off x="1097280" y="5248656"/>
-            <a:ext cx="1828800" cy="274320"/>
-          </a:xfrm>
-          <a:prstGeom prst="rect">
-            <a:avLst/>
-          </a:prstGeom>
-          <a:noFill/>
-        </p:spPr>
-        <p:txBody>
-          <a:bodyPr wrap="square">
-            <a:spAutoFit/>
-          </a:bodyPr>
-          <a:lstStyle/>
-          <a:p>
-            <a:pPr algn="l">
-              <a:defRPr sz="1200" b="1">
-                <a:solidFill>
-                  <a:srgbClr val="1A3A5C"/>
-                </a:solidFill>
-                <a:latin typeface="Calibri"/>
-              </a:defRPr>
-            </a:pPr>
-            <a:r>
-              <a:t>  3. Conv 松弛放大</a:t>
-            </a:r>
-          </a:p>
-        </p:txBody>
-      </p:sp>
-      <p:sp>
-        <p:nvSpPr>
-          <p:cNvPr id="12" name="TextBox 11"/>
-          <p:cNvSpPr txBox="1"/>
-          <p:nvPr/>
-        </p:nvSpPr>
-        <p:spPr>
-          <a:xfrm>
-            <a:off x="2926080" y="5248656"/>
-            <a:ext cx="7772400" cy="274320"/>
-          </a:xfrm>
-          <a:prstGeom prst="rect">
-            <a:avLst/>
-          </a:prstGeom>
-          <a:noFill/>
-        </p:spPr>
-        <p:txBody>
-          <a:bodyPr wrap="square">
-            <a:spAutoFit/>
-          </a:bodyPr>
-          <a:lstStyle/>
-          <a:p>
-            <a:pPr algn="l">
-              <a:defRPr sz="1200" b="0">
-                <a:solidFill>
-                  <a:srgbClr val="2C3E50"/>
-                </a:solidFill>
-                <a:latin typeface="Calibri"/>
-              </a:defRPr>
-            </a:pPr>
-            <a:r>
-              <a:t>共享感受野使不确定性相互放大</a:t>
-            </a:r>
-          </a:p>
-        </p:txBody>
-      </p:sp>
-      <p:sp>
-        <p:nvSpPr>
-          <p:cNvPr id="13" name="TextBox 12"/>
-          <p:cNvSpPr txBox="1"/>
-          <p:nvPr/>
-        </p:nvSpPr>
-        <p:spPr>
-          <a:xfrm>
-            <a:off x="1097280" y="5632704"/>
-            <a:ext cx="1828800" cy="274320"/>
-          </a:xfrm>
-          <a:prstGeom prst="rect">
-            <a:avLst/>
-          </a:prstGeom>
-          <a:noFill/>
-        </p:spPr>
-        <p:txBody>
-          <a:bodyPr wrap="square">
-            <a:spAutoFit/>
-          </a:bodyPr>
-          <a:lstStyle/>
-          <a:p>
-            <a:pPr algn="l">
-              <a:defRPr sz="1200" b="1">
-                <a:solidFill>
-                  <a:srgbClr val="1A3A5C"/>
-                </a:solidFill>
-                <a:latin typeface="Calibri"/>
-              </a:defRPr>
-            </a:pPr>
-            <a:r>
-              <a:t>  4. ReLU 层数</a:t>
-            </a:r>
-          </a:p>
-        </p:txBody>
-      </p:sp>
-      <p:sp>
-        <p:nvSpPr>
-          <p:cNvPr id="14" name="TextBox 13"/>
-          <p:cNvSpPr txBox="1"/>
-          <p:nvPr/>
-        </p:nvSpPr>
-        <p:spPr>
-          <a:xfrm>
-            <a:off x="2926080" y="5632704"/>
-            <a:ext cx="7772400" cy="274320"/>
-          </a:xfrm>
-          <a:prstGeom prst="rect">
-            <a:avLst/>
-          </a:prstGeom>
-          <a:noFill/>
-        </p:spPr>
-        <p:txBody>
-          <a:bodyPr wrap="square">
-            <a:spAutoFit/>
-          </a:bodyPr>
-          <a:lstStyle/>
-          <a:p>
-            <a:pPr algn="l">
-              <a:defRPr sz="1200" b="0">
-                <a:solidFill>
-                  <a:srgbClr val="2C3E50"/>
-                </a:solidFill>
-                <a:latin typeface="Calibri"/>
-              </a:defRPr>
-            </a:pPr>
-            <a:r>
-              <a:t>2 → 4，累积误差非线性增长</a:t>
-            </a:r>
-          </a:p>
-        </p:txBody>
-      </p:sp>
-      <p:sp>
-        <p:nvSpPr>
-          <p:cNvPr id="15" name="TextBox 14"/>
-          <p:cNvSpPr txBox="1"/>
-          <p:nvPr/>
-        </p:nvSpPr>
-        <p:spPr>
-          <a:xfrm>
-            <a:off x="1097280" y="6016752"/>
-            <a:ext cx="1828800" cy="274320"/>
-          </a:xfrm>
-          <a:prstGeom prst="rect">
-            <a:avLst/>
-          </a:prstGeom>
-          <a:noFill/>
-        </p:spPr>
-        <p:txBody>
-          <a:bodyPr wrap="square">
-            <a:spAutoFit/>
-          </a:bodyPr>
-          <a:lstStyle/>
-          <a:p>
-            <a:pPr algn="l">
-              <a:defRPr sz="1200" b="1">
-                <a:solidFill>
-                  <a:srgbClr val="1A3A5C"/>
-                </a:solidFill>
-                <a:latin typeface="Calibri"/>
-              </a:defRPr>
-            </a:pPr>
-            <a:r>
-              <a:t>  5. 数据复杂度</a:t>
-            </a:r>
-          </a:p>
-        </p:txBody>
-      </p:sp>
-      <p:sp>
-        <p:nvSpPr>
-          <p:cNvPr id="16" name="TextBox 15"/>
-          <p:cNvSpPr txBox="1"/>
-          <p:nvPr/>
-        </p:nvSpPr>
-        <p:spPr>
-          <a:xfrm>
-            <a:off x="2926080" y="6016752"/>
-            <a:ext cx="7772400" cy="274320"/>
-          </a:xfrm>
-          <a:prstGeom prst="rect">
-            <a:avLst/>
-          </a:prstGeom>
-          <a:noFill/>
-        </p:spPr>
-        <p:txBody>
-          <a:bodyPr wrap="square">
-            <a:spAutoFit/>
-          </a:bodyPr>
-          <a:lstStyle/>
-          <a:p>
-            <a:pPr algn="l">
-              <a:defRPr sz="1200" b="0">
-                <a:solidFill>
-                  <a:srgbClr val="2C3E50"/>
-                </a:solidFill>
-                <a:latin typeface="Calibri"/>
-              </a:defRPr>
-            </a:pPr>
-            <a:r>
-              <a:t>手写数字 → 自然图像高纹理</a:t>
-            </a:r>
-          </a:p>
-        </p:txBody>
-      </p:sp>
-      <p:sp>
-        <p:nvSpPr>
-          <p:cNvPr id="17" name="TextBox 16"/>
-          <p:cNvSpPr txBox="1"/>
-          <p:nvPr/>
-        </p:nvSpPr>
-        <p:spPr>
-          <a:xfrm>
-            <a:off x="11094415" y="6400800"/>
-            <a:ext cx="914400" cy="365760"/>
-          </a:xfrm>
-          <a:prstGeom prst="rect">
-            <a:avLst/>
-          </a:prstGeom>
-          <a:noFill/>
-        </p:spPr>
-        <p:txBody>
-          <a:bodyPr wrap="square">
-            <a:spAutoFit/>
-          </a:bodyPr>
-          <a:lstStyle/>
-          <a:p>
-            <a:pPr algn="r">
-              <a:defRPr sz="1000" b="0">
-                <a:solidFill>
-                  <a:srgbClr val="7F8C9A"/>
-                </a:solidFill>
-                <a:latin typeface="Calibri"/>
-              </a:defRPr>
-            </a:pPr>
-            <a:r>
-              <a:t>9/18</a:t>
             </a:r>
           </a:p>
         </p:txBody>
@@ -22227,6 +22239,10 @@
       </a:style>
     </a:lnDef>
   </a:objectDefaults>
-  <a:extraClrSchemeLst/>
+  <a:extLst>
+    <a:ext uri="{05A4C25C-085E-4340-85A3-A5531E510DB2}">
+      <thm15:themeFamily xmlns:thm15="http://schemas.microsoft.com/office/thememl/2012/main" name="Office Theme" id="{62F939B6-93AF-4DB8-9C6B-D6C7DFDC589F}" vid="{4A3C46E8-61CC-4603-A589-7422A47A8E4A}"/>
+    </a:ext>
+  </a:extLst>
 </a:theme>
 </file>